--- a/HallHub-Presentation.pptx
+++ b/HallHub-Presentation.pptx
@@ -7,11 +7,12 @@
   <p:sldIdLst>
     <p:sldId id="256" r:id="rId2"/>
     <p:sldId id="257" r:id="rId3"/>
-    <p:sldId id="258" r:id="rId4"/>
-    <p:sldId id="259" r:id="rId5"/>
-    <p:sldId id="260" r:id="rId6"/>
-    <p:sldId id="261" r:id="rId7"/>
-    <p:sldId id="262" r:id="rId8"/>
+    <p:sldId id="263" r:id="rId13"/>
+    <p:sldId id="264" r:id="rId14"/>
+    <p:sldId id="265" r:id="rId15"/>
+    <p:sldId id="266" r:id="rId16"/>
+    <p:sldId id="267" r:id="rId17"/>
+    <p:sldId id="268" r:id="rId18"/>
   </p:sldIdLst>
   <p:sldSz cx="12192000" cy="6858000"/>
   <p:notesSz cx="6858000" cy="9144000"/>
@@ -3281,7 +3282,7 @@
                 </a:solidFill>
                 <a:latin typeface="Calibri"/>
               </a:rPr>
-              <a:t>HallHub</a:t>
+              <a:t>Problem</a:t>
             </a:r>
           </a:p>
         </p:txBody>
@@ -3360,7 +3361,7 @@
                 </a:solidFill>
                 <a:latin typeface="Calibri"/>
               </a:rPr>
-              <a:t>Solution</a:t>
+              <a:t>Values</a:t>
             </a:r>
           </a:p>
         </p:txBody>
@@ -3395,7 +3396,7 @@
                 </a:solidFill>
                 <a:latin typeface="Calibri"/>
               </a:rPr>
-              <a:t>Types</a:t>
+              <a:t>Market</a:t>
             </a:r>
           </a:p>
         </p:txBody>
@@ -3430,7 +3431,7 @@
                 </a:solidFill>
                 <a:latin typeface="Calibri"/>
               </a:rPr>
-              <a:t>Next</a:t>
+              <a:t>Revenue</a:t>
             </a:r>
           </a:p>
         </p:txBody>
@@ -3465,7 +3466,7 @@
                 </a:solidFill>
                 <a:latin typeface="Calibri"/>
               </a:rPr>
-              <a:t>Technology</a:t>
+              <a:t>Advantage</a:t>
             </a:r>
           </a:p>
         </p:txBody>
@@ -3500,7 +3501,7 @@
                 </a:solidFill>
                 <a:latin typeface="Calibri"/>
               </a:rPr>
-              <a:t>Team</a:t>
+              <a:t>Product</a:t>
             </a:r>
           </a:p>
         </p:txBody>
@@ -3535,7 +3536,7 @@
                 </a:solidFill>
                 <a:latin typeface="Calibri"/>
               </a:rPr>
-              <a:t>Discover</a:t>
+              <a:t>Vision</a:t>
             </a:r>
           </a:p>
         </p:txBody>
@@ -3720,18 +3721,62 @@
           </a:bodyPr>
           <a:lstStyle/>
           <a:p>
-            <a:pPr algn="l"/>
-            <a:r>
-              <a:rPr sz="1600" dirty="0" err="1">
-                <a:latin typeface="Calibri"/>
-              </a:rPr>
-              <a:t>HallHub</a:t>
-            </a:r>
-            <a:r>
-              <a:rPr sz="1600" dirty="0">
-                <a:latin typeface="Calibri"/>
-              </a:rPr>
-              <a:t> helps people in Hargeisa find and book banquet halls in one place. Customers search approved venues, request a date, and visit the hall before they confirm. Hotel owners list their halls after they are verified, and admins keep every listing trusted.</a:t>
+            <a:pPr>
+              <a:spcAft>
+                <a:spcPts val="600"/>
+              </a:spcAft>
+            </a:pPr>
+            <a:r>
+              <a:rPr sz="1800" b="1" i="0">
+                <a:solidFill>
+                  <a:srgbClr val="4A2040"/>
+                </a:solidFill>
+                <a:latin typeface="Calibri"/>
+              </a:rPr>
+              <a:t>Venue Booking &amp; Management System</a:t>
+            </a:r>
+          </a:p>
+          <a:p>
+            <a:pPr>
+              <a:spcAft>
+                <a:spcPts val="1200"/>
+              </a:spcAft>
+            </a:pPr>
+            <a:r>
+              <a:rPr sz="1500" b="0" i="1">
+                <a:solidFill>
+                  <a:srgbClr val="6B6570"/>
+                </a:solidFill>
+                <a:latin typeface="Calibri"/>
+              </a:rPr>
+              <a:t>“Making venue discovery and booking simpler, faster, and more organized.”</a:t>
+            </a:r>
+          </a:p>
+          <a:p>
+            <a:pPr>
+              <a:spcAft>
+                <a:spcPts val="400"/>
+              </a:spcAft>
+            </a:pPr>
+            <a:r>
+              <a:rPr sz="1300" b="1" i="0">
+                <a:solidFill>
+                  <a:srgbClr val="C5A070"/>
+                </a:solidFill>
+                <a:latin typeface="Calibri"/>
+              </a:rPr>
+              <a:t>Telesom Academy  —  Graduation / Final Project Presentation</a:t>
+            </a:r>
+          </a:p>
+          <a:p>
+            <a:r>
+              <a:rPr sz="1200" b="0" i="0">
+                <a:solidFill>
+                  <a:srgbClr val="6B6570"/>
+                </a:solidFill>
+                <a:latin typeface="Calibri"/>
+              </a:rPr>
+              <a:t>Presented by: Naima Muse Ahmed (Team Lead) &amp; HallHub Team</a:t>
             </a:r>
           </a:p>
         </p:txBody>
@@ -3845,7 +3890,5007 @@
                 </a:solidFill>
                 <a:latin typeface="Calibri"/>
               </a:rPr>
-              <a:t>01 / 07</a:t>
+              <a:t>01 / 08</a:t>
+            </a:r>
+          </a:p>
+        </p:txBody>
+      </p:sp>
+    </p:spTree>
+  </p:cSld>
+  <p:clrMapOvr>
+    <a:masterClrMapping/>
+  </p:clrMapOvr>
+</p:sld>
+</file>
+
+<file path=ppt/slides/slide10.xml><?xml version="1.0" encoding="utf-8"?>
+<p:sld xmlns:a="http://schemas.openxmlformats.org/drawingml/2006/main" xmlns:p="http://schemas.openxmlformats.org/presentationml/2006/main" xmlns:r="http://schemas.openxmlformats.org/officeDocument/2006/relationships">
+  <p:cSld>
+    <p:spTree>
+      <p:nvGrpSpPr>
+        <p:cNvPr id="1" name=""/>
+        <p:cNvGrpSpPr/>
+        <p:nvPr/>
+      </p:nvGrpSpPr>
+      <p:grpSpPr/>
+      <p:sp>
+        <p:nvSpPr>
+          <p:cNvPr id="2" name="Rectangle 1"/>
+          <p:cNvSpPr/>
+          <p:nvPr/>
+        </p:nvSpPr>
+        <p:spPr>
+          <a:xfrm>
+            <a:off x="-15240" y="16439"/>
+            <a:ext cx="12191999" cy="6858000"/>
+          </a:xfrm>
+          <a:prstGeom prst="rect">
+            <a:avLst/>
+          </a:prstGeom>
+          <a:solidFill>
+            <a:srgbClr val="FAF7F9"/>
+          </a:solidFill>
+          <a:ln>
+            <a:noFill/>
+          </a:ln>
+        </p:spPr>
+        <p:style>
+          <a:lnRef idx="1">
+            <a:schemeClr val="accent1"/>
+          </a:lnRef>
+          <a:fillRef idx="3">
+            <a:schemeClr val="accent1"/>
+          </a:fillRef>
+          <a:effectRef idx="2">
+            <a:schemeClr val="accent1"/>
+          </a:effectRef>
+          <a:fontRef idx="minor">
+            <a:schemeClr val="lt1"/>
+          </a:fontRef>
+        </p:style>
+        <p:txBody>
+          <a:bodyPr rtlCol="0" anchor="ctr"/>
+          <a:lstStyle/>
+          <a:p>
+            <a:pPr algn="ctr"/>
+            <a:endParaRPr dirty="0"/>
+          </a:p>
+        </p:txBody>
+      </p:sp>
+      <p:sp>
+        <p:nvSpPr>
+          <p:cNvPr id="3" name="Rounded Rectangle 2"/>
+          <p:cNvSpPr/>
+          <p:nvPr/>
+        </p:nvSpPr>
+        <p:spPr>
+          <a:xfrm>
+            <a:off x="365760" y="256032"/>
+            <a:ext cx="11430000" cy="566928"/>
+          </a:xfrm>
+          <a:prstGeom prst="roundRect">
+            <a:avLst>
+              <a:gd name="adj" fmla="val 50000"/>
+            </a:avLst>
+          </a:prstGeom>
+          <a:solidFill>
+            <a:srgbClr val="FFFFFF"/>
+          </a:solidFill>
+          <a:ln w="12700">
+            <a:solidFill>
+              <a:srgbClr val="D4B37A"/>
+            </a:solidFill>
+          </a:ln>
+        </p:spPr>
+        <p:style>
+          <a:lnRef idx="1">
+            <a:schemeClr val="accent1"/>
+          </a:lnRef>
+          <a:fillRef idx="3">
+            <a:schemeClr val="accent1"/>
+          </a:fillRef>
+          <a:effectRef idx="2">
+            <a:schemeClr val="accent1"/>
+          </a:effectRef>
+          <a:fontRef idx="minor">
+            <a:schemeClr val="lt1"/>
+          </a:fontRef>
+        </p:style>
+        <p:txBody>
+          <a:bodyPr rtlCol="0" anchor="ctr"/>
+          <a:lstStyle/>
+          <a:p>
+            <a:pPr algn="ctr"/>
+            <a:endParaRPr/>
+          </a:p>
+        </p:txBody>
+      </p:sp>
+      <p:sp>
+        <p:nvSpPr>
+          <p:cNvPr id="4" name="Rounded Rectangle 3"/>
+          <p:cNvSpPr/>
+          <p:nvPr/>
+        </p:nvSpPr>
+        <p:spPr>
+          <a:xfrm>
+            <a:off x="457200" y="329184"/>
+            <a:ext cx="1325880" cy="420624"/>
+          </a:xfrm>
+          <a:prstGeom prst="roundRect">
+            <a:avLst>
+              <a:gd name="adj" fmla="val 50000"/>
+            </a:avLst>
+          </a:prstGeom>
+          <a:solidFill>
+            <a:srgbClr val="4A2040"/>
+          </a:solidFill>
+          <a:ln w="12700">
+            <a:solidFill>
+              <a:srgbClr val="D4B37A"/>
+            </a:solidFill>
+          </a:ln>
+        </p:spPr>
+        <p:style>
+          <a:lnRef idx="1">
+            <a:schemeClr val="accent1"/>
+          </a:lnRef>
+          <a:fillRef idx="3">
+            <a:schemeClr val="accent1"/>
+          </a:fillRef>
+          <a:effectRef idx="2">
+            <a:schemeClr val="accent1"/>
+          </a:effectRef>
+          <a:fontRef idx="minor">
+            <a:schemeClr val="lt1"/>
+          </a:fontRef>
+        </p:style>
+        <p:txBody>
+          <a:bodyPr rtlCol="0" anchor="ctr"/>
+          <a:lstStyle/>
+          <a:p>
+            <a:pPr algn="ctr"/>
+            <a:endParaRPr/>
+          </a:p>
+        </p:txBody>
+      </p:sp>
+      <p:sp>
+        <p:nvSpPr>
+          <p:cNvPr id="5" name="TextBox 4"/>
+          <p:cNvSpPr txBox="1"/>
+          <p:nvPr/>
+        </p:nvSpPr>
+        <p:spPr>
+          <a:xfrm>
+            <a:off x="457200" y="384048"/>
+            <a:ext cx="1325880" cy="310896"/>
+          </a:xfrm>
+          <a:prstGeom prst="rect">
+            <a:avLst/>
+          </a:prstGeom>
+          <a:noFill/>
+        </p:spPr>
+        <p:txBody>
+          <a:bodyPr wrap="square">
+            <a:spAutoFit/>
+          </a:bodyPr>
+          <a:lstStyle/>
+          <a:p>
+            <a:pPr algn="ctr"/>
+            <a:r>
+              <a:rPr sz="1300" b="0">
+                <a:solidFill>
+                  <a:srgbClr val="FFFFFF"/>
+                </a:solidFill>
+                <a:latin typeface="Georgia"/>
+              </a:rPr>
+              <a:t>HallHub</a:t>
+            </a:r>
+          </a:p>
+        </p:txBody>
+      </p:sp>
+      <p:sp>
+        <p:nvSpPr>
+          <p:cNvPr id="6" name="TextBox 5"/>
+          <p:cNvSpPr txBox="1"/>
+          <p:nvPr/>
+        </p:nvSpPr>
+        <p:spPr>
+          <a:xfrm>
+            <a:off x="1965960" y="365760"/>
+            <a:ext cx="1000000" cy="310896"/>
+          </a:xfrm>
+          <a:prstGeom prst="rect">
+            <a:avLst/>
+          </a:prstGeom>
+          <a:noFill/>
+        </p:spPr>
+        <p:txBody>
+          <a:bodyPr wrap="none" lIns="0" tIns="0" rIns="0" bIns="0">
+            <a:spAutoFit/>
+          </a:bodyPr>
+          <a:lstStyle/>
+          <a:p>
+            <a:r>
+              <a:rPr sz="1100" b="1">
+                <a:solidFill>
+                  <a:srgbClr val="4A2040"/>
+                </a:solidFill>
+                <a:latin typeface="Calibri"/>
+              </a:rPr>
+              <a:t>HallHub</a:t>
+            </a:r>
+          </a:p>
+        </p:txBody>
+      </p:sp>
+      <p:sp>
+        <p:nvSpPr>
+          <p:cNvPr id="7" name="TextBox 6"/>
+          <p:cNvSpPr txBox="1"/>
+          <p:nvPr/>
+        </p:nvSpPr>
+        <p:spPr>
+          <a:xfrm>
+            <a:off x="3000000" y="365760"/>
+            <a:ext cx="1000000" cy="310896"/>
+          </a:xfrm>
+          <a:prstGeom prst="rect">
+            <a:avLst/>
+          </a:prstGeom>
+          <a:noFill/>
+        </p:spPr>
+        <p:txBody>
+          <a:bodyPr wrap="none" lIns="0" tIns="0" rIns="0" bIns="0">
+            <a:spAutoFit/>
+          </a:bodyPr>
+          <a:lstStyle/>
+          <a:p>
+            <a:r>
+              <a:rPr sz="1100" b="1">
+                <a:solidFill>
+                  <a:srgbClr val="4A2040"/>
+                </a:solidFill>
+                <a:latin typeface="Calibri"/>
+              </a:rPr>
+              <a:t>Problem</a:t>
+            </a:r>
+          </a:p>
+        </p:txBody>
+      </p:sp>
+      <p:sp>
+        <p:nvSpPr>
+          <p:cNvPr id="8" name="TextBox 7"/>
+          <p:cNvSpPr txBox="1"/>
+          <p:nvPr/>
+        </p:nvSpPr>
+        <p:spPr>
+          <a:xfrm>
+            <a:off x="4050000" y="365760"/>
+            <a:ext cx="1000000" cy="310896"/>
+          </a:xfrm>
+          <a:prstGeom prst="rect">
+            <a:avLst/>
+          </a:prstGeom>
+          <a:noFill/>
+        </p:spPr>
+        <p:txBody>
+          <a:bodyPr wrap="none" lIns="0" tIns="0" rIns="0" bIns="0">
+            <a:spAutoFit/>
+          </a:bodyPr>
+          <a:lstStyle/>
+          <a:p>
+            <a:r>
+              <a:rPr sz="1100" b="1">
+                <a:solidFill>
+                  <a:srgbClr val="4A2040"/>
+                </a:solidFill>
+                <a:latin typeface="Calibri"/>
+              </a:rPr>
+              <a:t>Values</a:t>
+            </a:r>
+          </a:p>
+        </p:txBody>
+      </p:sp>
+      <p:sp>
+        <p:nvSpPr>
+          <p:cNvPr id="9" name="TextBox 8"/>
+          <p:cNvSpPr txBox="1"/>
+          <p:nvPr/>
+        </p:nvSpPr>
+        <p:spPr>
+          <a:xfrm>
+            <a:off x="5000000" y="365760"/>
+            <a:ext cx="1000000" cy="310896"/>
+          </a:xfrm>
+          <a:prstGeom prst="rect">
+            <a:avLst/>
+          </a:prstGeom>
+          <a:noFill/>
+        </p:spPr>
+        <p:txBody>
+          <a:bodyPr wrap="none" lIns="0" tIns="0" rIns="0" bIns="0">
+            <a:spAutoFit/>
+          </a:bodyPr>
+          <a:lstStyle/>
+          <a:p>
+            <a:r>
+              <a:rPr sz="1100" b="1">
+                <a:solidFill>
+                  <a:srgbClr val="4A2040"/>
+                </a:solidFill>
+                <a:latin typeface="Calibri"/>
+              </a:rPr>
+              <a:t>Market</a:t>
+            </a:r>
+          </a:p>
+        </p:txBody>
+      </p:sp>
+      <p:sp>
+        <p:nvSpPr>
+          <p:cNvPr id="10" name="TextBox 9"/>
+          <p:cNvSpPr txBox="1"/>
+          <p:nvPr/>
+        </p:nvSpPr>
+        <p:spPr>
+          <a:xfrm>
+            <a:off x="5950000" y="365760"/>
+            <a:ext cx="1000000" cy="310896"/>
+          </a:xfrm>
+          <a:prstGeom prst="rect">
+            <a:avLst/>
+          </a:prstGeom>
+          <a:noFill/>
+        </p:spPr>
+        <p:txBody>
+          <a:bodyPr wrap="none" lIns="0" tIns="0" rIns="0" bIns="0">
+            <a:spAutoFit/>
+          </a:bodyPr>
+          <a:lstStyle/>
+          <a:p>
+            <a:r>
+              <a:rPr sz="1100" b="1">
+                <a:solidFill>
+                  <a:srgbClr val="7A3A6A"/>
+                </a:solidFill>
+                <a:latin typeface="Calibri"/>
+              </a:rPr>
+              <a:t>Revenue</a:t>
+            </a:r>
+          </a:p>
+        </p:txBody>
+      </p:sp>
+      <p:sp>
+        <p:nvSpPr>
+          <p:cNvPr id="11" name="Rectangle 10"/>
+          <p:cNvSpPr/>
+          <p:nvPr/>
+        </p:nvSpPr>
+        <p:spPr>
+          <a:xfrm>
+            <a:off x="5990000" y="676656"/>
+            <a:ext cx="520000" cy="16459"/>
+          </a:xfrm>
+          <a:prstGeom prst="rect">
+            <a:avLst/>
+          </a:prstGeom>
+          <a:solidFill>
+            <a:srgbClr val="4A2040"/>
+          </a:solidFill>
+          <a:ln>
+            <a:noFill/>
+          </a:ln>
+        </p:spPr>
+        <p:style>
+          <a:lnRef idx="1">
+            <a:schemeClr val="accent1"/>
+          </a:lnRef>
+          <a:fillRef idx="3">
+            <a:schemeClr val="accent1"/>
+          </a:fillRef>
+          <a:effectRef idx="2">
+            <a:schemeClr val="accent1"/>
+          </a:effectRef>
+          <a:fontRef idx="minor">
+            <a:schemeClr val="lt1"/>
+          </a:fontRef>
+        </p:style>
+        <p:txBody>
+          <a:bodyPr rtlCol="0" anchor="ctr"/>
+          <a:lstStyle/>
+          <a:p>
+            <a:pPr algn="ctr"/>
+          </a:p>
+        </p:txBody>
+      </p:sp>
+      <p:sp>
+        <p:nvSpPr>
+          <p:cNvPr id="12" name="TextBox 11"/>
+          <p:cNvSpPr txBox="1"/>
+          <p:nvPr/>
+        </p:nvSpPr>
+        <p:spPr>
+          <a:xfrm>
+            <a:off x="7000000" y="365760"/>
+            <a:ext cx="1000000" cy="310896"/>
+          </a:xfrm>
+          <a:prstGeom prst="rect">
+            <a:avLst/>
+          </a:prstGeom>
+          <a:noFill/>
+        </p:spPr>
+        <p:txBody>
+          <a:bodyPr wrap="none" lIns="0" tIns="0" rIns="0" bIns="0">
+            <a:spAutoFit/>
+          </a:bodyPr>
+          <a:lstStyle/>
+          <a:p>
+            <a:r>
+              <a:rPr sz="1100" b="1">
+                <a:solidFill>
+                  <a:srgbClr val="4A2040"/>
+                </a:solidFill>
+                <a:latin typeface="Calibri"/>
+              </a:rPr>
+              <a:t>Advantage</a:t>
+            </a:r>
+          </a:p>
+        </p:txBody>
+      </p:sp>
+      <p:sp>
+        <p:nvSpPr>
+          <p:cNvPr id="13" name="TextBox 12"/>
+          <p:cNvSpPr txBox="1"/>
+          <p:nvPr/>
+        </p:nvSpPr>
+        <p:spPr>
+          <a:xfrm>
+            <a:off x="8150000" y="365760"/>
+            <a:ext cx="1000000" cy="310896"/>
+          </a:xfrm>
+          <a:prstGeom prst="rect">
+            <a:avLst/>
+          </a:prstGeom>
+          <a:noFill/>
+        </p:spPr>
+        <p:txBody>
+          <a:bodyPr wrap="none" lIns="0" tIns="0" rIns="0" bIns="0">
+            <a:spAutoFit/>
+          </a:bodyPr>
+          <a:lstStyle/>
+          <a:p>
+            <a:r>
+              <a:rPr sz="1100" b="1">
+                <a:solidFill>
+                  <a:srgbClr val="4A2040"/>
+                </a:solidFill>
+                <a:latin typeface="Calibri"/>
+              </a:rPr>
+              <a:t>Product</a:t>
+            </a:r>
+          </a:p>
+        </p:txBody>
+      </p:sp>
+      <p:sp>
+        <p:nvSpPr>
+          <p:cNvPr id="14" name="TextBox 13"/>
+          <p:cNvSpPr txBox="1"/>
+          <p:nvPr/>
+        </p:nvSpPr>
+        <p:spPr>
+          <a:xfrm>
+            <a:off x="9250000" y="365760"/>
+            <a:ext cx="1000000" cy="310896"/>
+          </a:xfrm>
+          <a:prstGeom prst="rect">
+            <a:avLst/>
+          </a:prstGeom>
+          <a:noFill/>
+        </p:spPr>
+        <p:txBody>
+          <a:bodyPr wrap="none" lIns="0" tIns="0" rIns="0" bIns="0">
+            <a:spAutoFit/>
+          </a:bodyPr>
+          <a:lstStyle/>
+          <a:p>
+            <a:r>
+              <a:rPr sz="1100" b="1">
+                <a:solidFill>
+                  <a:srgbClr val="4A2040"/>
+                </a:solidFill>
+                <a:latin typeface="Calibri"/>
+              </a:rPr>
+              <a:t>Vision</a:t>
+            </a:r>
+          </a:p>
+        </p:txBody>
+      </p:sp>
+      <p:sp>
+        <p:nvSpPr>
+          <p:cNvPr id="14" name="Rectangle 13"/>
+          <p:cNvSpPr/>
+          <p:nvPr/>
+        </p:nvSpPr>
+        <p:spPr>
+          <a:xfrm>
+            <a:off x="457200" y="1042416"/>
+            <a:ext cx="201168" cy="13716"/>
+          </a:xfrm>
+          <a:prstGeom prst="rect">
+            <a:avLst/>
+          </a:prstGeom>
+          <a:solidFill>
+            <a:srgbClr val="C5A070"/>
+          </a:solidFill>
+          <a:ln>
+            <a:noFill/>
+          </a:ln>
+        </p:spPr>
+        <p:style>
+          <a:lnRef idx="1">
+            <a:schemeClr val="accent1"/>
+          </a:lnRef>
+          <a:fillRef idx="3">
+            <a:schemeClr val="accent1"/>
+          </a:fillRef>
+          <a:effectRef idx="2">
+            <a:schemeClr val="accent1"/>
+          </a:effectRef>
+          <a:fontRef idx="minor">
+            <a:schemeClr val="lt1"/>
+          </a:fontRef>
+        </p:style>
+        <p:txBody>
+          <a:bodyPr rtlCol="0" anchor="ctr"/>
+          <a:lstStyle/>
+          <a:p>
+            <a:pPr algn="ctr"/>
+            <a:endParaRPr/>
+          </a:p>
+        </p:txBody>
+      </p:sp>
+      <p:sp>
+        <p:nvSpPr>
+          <p:cNvPr id="15" name="TextBox 14"/>
+          <p:cNvSpPr txBox="1"/>
+          <p:nvPr/>
+        </p:nvSpPr>
+        <p:spPr>
+          <a:xfrm>
+            <a:off x="731520" y="960120"/>
+            <a:ext cx="9144000" cy="256032"/>
+          </a:xfrm>
+          <a:prstGeom prst="rect">
+            <a:avLst/>
+          </a:prstGeom>
+          <a:noFill/>
+        </p:spPr>
+        <p:txBody>
+          <a:bodyPr wrap="none" lIns="0" tIns="0" rIns="0" bIns="0">
+            <a:spAutoFit/>
+          </a:bodyPr>
+          <a:lstStyle/>
+          <a:p>
+            <a:r>
+              <a:rPr sz="1200" b="1" i="0">
+                <a:solidFill>
+                  <a:srgbClr val="C5A070"/>
+                </a:solidFill>
+                <a:latin typeface="Calibri"/>
+              </a:rPr>
+              <a:t>05  —  REVENUE STREAMS</a:t>
+            </a:r>
+          </a:p>
+        </p:txBody>
+      </p:sp>
+      <p:sp>
+        <p:nvSpPr>
+          <p:cNvPr id="16" name="TextBox 15"/>
+          <p:cNvSpPr txBox="1"/>
+          <p:nvPr/>
+        </p:nvSpPr>
+        <p:spPr>
+          <a:xfrm>
+            <a:off x="457200" y="1207008"/>
+            <a:ext cx="10972800" cy="420000"/>
+          </a:xfrm>
+          <a:prstGeom prst="rect">
+            <a:avLst/>
+          </a:prstGeom>
+          <a:noFill/>
+        </p:spPr>
+        <p:txBody>
+          <a:bodyPr wrap="none" lIns="0" tIns="0" rIns="0" bIns="0">
+            <a:spAutoFit/>
+          </a:bodyPr>
+          <a:lstStyle/>
+          <a:p>
+            <a:r>
+              <a:rPr sz="2500" b="1" i="0">
+                <a:solidFill>
+                  <a:srgbClr val="4A2040"/>
+                </a:solidFill>
+                <a:latin typeface="Georgia"/>
+              </a:rPr>
+              <a:t>Current business model and future monetization roadmap</a:t>
+            </a:r>
+          </a:p>
+        </p:txBody>
+      </p:sp>
+      <p:sp>
+        <p:nvSpPr>
+          <p:cNvPr id="28" name="TextBox 27"/>
+          <p:cNvSpPr txBox="1"/>
+          <p:nvPr/>
+        </p:nvSpPr>
+        <p:spPr>
+          <a:xfrm>
+            <a:off x="640080" y="6510528"/>
+            <a:ext cx="2743200" cy="256032"/>
+          </a:xfrm>
+          <a:prstGeom prst="rect">
+            <a:avLst/>
+          </a:prstGeom>
+          <a:noFill/>
+        </p:spPr>
+        <p:txBody>
+          <a:bodyPr wrap="square">
+            <a:spAutoFit/>
+          </a:bodyPr>
+          <a:lstStyle/>
+          <a:p>
+            <a:pPr algn="l"/>
+            <a:r>
+              <a:rPr sz="1300" b="1">
+                <a:solidFill>
+                  <a:srgbClr val="4A2040"/>
+                </a:solidFill>
+                <a:latin typeface="Georgia"/>
+              </a:rPr>
+              <a:t>HallHub</a:t>
+            </a:r>
+          </a:p>
+        </p:txBody>
+      </p:sp>
+      <p:sp>
+        <p:nvSpPr>
+          <p:cNvPr id="29" name="TextBox 28"/>
+          <p:cNvSpPr txBox="1"/>
+          <p:nvPr/>
+        </p:nvSpPr>
+        <p:spPr>
+          <a:xfrm>
+            <a:off x="10241280" y="6510528"/>
+            <a:ext cx="1280160" cy="256032"/>
+          </a:xfrm>
+          <a:prstGeom prst="rect">
+            <a:avLst/>
+          </a:prstGeom>
+          <a:noFill/>
+        </p:spPr>
+        <p:txBody>
+          <a:bodyPr wrap="none" lIns="0" tIns="0" rIns="0" bIns="0">
+            <a:spAutoFit/>
+          </a:bodyPr>
+          <a:lstStyle/>
+          <a:p>
+            <a:r>
+              <a:rPr sz="1200" b="0" i="0">
+                <a:solidFill>
+                  <a:srgbClr val="6B6570"/>
+                </a:solidFill>
+                <a:latin typeface="Calibri"/>
+              </a:rPr>
+              <a:t>05 / 08</a:t>
+            </a:r>
+          </a:p>
+        </p:txBody>
+      </p:sp>
+      <p:sp>
+        <p:nvSpPr>
+          <p:cNvPr id="17" name="Rounded Rectangle 16"/>
+          <p:cNvSpPr/>
+          <p:nvPr/>
+        </p:nvSpPr>
+        <p:spPr>
+          <a:xfrm>
+            <a:off x="457200" y="1737360"/>
+            <a:ext cx="5532120" cy="4434840"/>
+          </a:xfrm>
+          <a:prstGeom prst="roundRect">
+            <a:avLst>
+              <a:gd name="adj" fmla="val 8000"/>
+            </a:avLst>
+          </a:prstGeom>
+          <a:solidFill>
+            <a:srgbClr val="FFFDFB"/>
+          </a:solidFill>
+          <a:ln w="12700">
+            <a:solidFill>
+              <a:srgbClr val="EAD9C2"/>
+            </a:solidFill>
+          </a:ln>
+        </p:spPr>
+        <p:style>
+          <a:lnRef idx="1">
+            <a:schemeClr val="accent1"/>
+          </a:lnRef>
+          <a:fillRef idx="3">
+            <a:schemeClr val="accent1"/>
+          </a:fillRef>
+          <a:effectRef idx="2">
+            <a:schemeClr val="accent1"/>
+          </a:effectRef>
+          <a:fontRef idx="minor">
+            <a:schemeClr val="lt1"/>
+          </a:fontRef>
+        </p:style>
+        <p:txBody>
+          <a:bodyPr rtlCol="0" anchor="ctr"/>
+          <a:lstStyle/>
+          <a:p>
+            <a:pPr algn="ctr"/>
+            <a:endParaRPr dirty="0"/>
+          </a:p>
+        </p:txBody>
+      </p:sp>
+      <p:sp>
+        <p:nvSpPr>
+          <p:cNvPr id="18" name="Rounded Rectangle 17"/>
+          <p:cNvSpPr/>
+          <p:nvPr/>
+        </p:nvSpPr>
+        <p:spPr>
+          <a:xfrm>
+            <a:off x="749808" y="1917360"/>
+            <a:ext cx="502920" cy="54864"/>
+          </a:xfrm>
+          <a:prstGeom prst="roundRect">
+            <a:avLst>
+              <a:gd name="adj" fmla="val 50000"/>
+            </a:avLst>
+          </a:prstGeom>
+          <a:solidFill>
+            <a:srgbClr val="C5A070"/>
+          </a:solidFill>
+          <a:ln>
+            <a:noFill/>
+          </a:ln>
+        </p:spPr>
+        <p:style>
+          <a:lnRef idx="1">
+            <a:schemeClr val="accent1"/>
+          </a:lnRef>
+          <a:fillRef idx="3">
+            <a:schemeClr val="accent1"/>
+          </a:fillRef>
+          <a:effectRef idx="2">
+            <a:schemeClr val="accent1"/>
+          </a:effectRef>
+          <a:fontRef idx="minor">
+            <a:schemeClr val="lt1"/>
+          </a:fontRef>
+        </p:style>
+        <p:txBody>
+          <a:bodyPr rtlCol="0" anchor="ctr"/>
+          <a:lstStyle/>
+          <a:p>
+            <a:pPr algn="ctr"/>
+            <a:endParaRPr/>
+          </a:p>
+        </p:txBody>
+      </p:sp>
+      <p:sp>
+        <p:nvSpPr>
+          <p:cNvPr id="30" name="TextBox 29"/>
+          <p:cNvSpPr txBox="1"/>
+          <p:nvPr/>
+        </p:nvSpPr>
+        <p:spPr>
+          <a:xfrm>
+            <a:off x="749808" y="2057360"/>
+            <a:ext cx="4900000" cy="260000"/>
+          </a:xfrm>
+          <a:prstGeom prst="rect">
+            <a:avLst/>
+          </a:prstGeom>
+          <a:noFill/>
+        </p:spPr>
+        <p:txBody>
+          <a:bodyPr wrap="none">
+            <a:spAutoFit/>
+          </a:bodyPr>
+          <a:lstStyle/>
+          <a:p>
+            <a:r>
+              <a:rPr sz="1200" b="1" i="0">
+                <a:solidFill>
+                  <a:srgbClr val="C5A070"/>
+                </a:solidFill>
+                <a:latin typeface="Calibri"/>
+              </a:rPr>
+              <a:t>CURRENT REVENUE MODEL</a:t>
+            </a:r>
+          </a:p>
+        </p:txBody>
+      </p:sp>
+      <p:sp>
+        <p:nvSpPr>
+          <p:cNvPr id="31" name="TextBox 30"/>
+          <p:cNvSpPr txBox="1"/>
+          <p:nvPr/>
+        </p:nvSpPr>
+        <p:spPr>
+          <a:xfrm>
+            <a:off x="749808" y="2337360"/>
+            <a:ext cx="4900000" cy="400000"/>
+          </a:xfrm>
+          <a:prstGeom prst="rect">
+            <a:avLst/>
+          </a:prstGeom>
+          <a:noFill/>
+        </p:spPr>
+        <p:txBody>
+          <a:bodyPr wrap="none">
+            <a:spAutoFit/>
+          </a:bodyPr>
+          <a:lstStyle/>
+          <a:p>
+            <a:r>
+              <a:rPr sz="2300" b="1" i="0">
+                <a:solidFill>
+                  <a:srgbClr val="4A2040"/>
+                </a:solidFill>
+                <a:latin typeface="Georgia"/>
+              </a:rPr>
+              <a:t>HallHub Plus ⭐ (Subscription)</a:t>
+            </a:r>
+          </a:p>
+        </p:txBody>
+      </p:sp>
+      <p:sp>
+        <p:nvSpPr>
+          <p:cNvPr id="32" name="TextBox 31"/>
+          <p:cNvSpPr txBox="1"/>
+          <p:nvPr/>
+        </p:nvSpPr>
+        <p:spPr>
+          <a:xfrm>
+            <a:off x="749808" y="2787360"/>
+            <a:ext cx="4900000" cy="400000"/>
+          </a:xfrm>
+          <a:prstGeom prst="rect">
+            <a:avLst/>
+          </a:prstGeom>
+          <a:noFill/>
+        </p:spPr>
+        <p:txBody>
+          <a:bodyPr wrap="none">
+            <a:spAutoFit/>
+          </a:bodyPr>
+          <a:lstStyle/>
+          <a:p>
+            <a:r>
+              <a:rPr sz="1300" b="0" i="0">
+                <a:solidFill>
+                  <a:srgbClr val="6B6570"/>
+                </a:solidFill>
+                <a:latin typeface="Calibri"/>
+              </a:rPr>
+              <a:t>Hotel &amp; hall owners subscribe to HallHub Plus to significantly increase visibility.</a:t>
+            </a:r>
+          </a:p>
+        </p:txBody>
+      </p:sp>
+      <p:sp>
+        <p:nvSpPr>
+          <p:cNvPr id="33" name="TextBox 32"/>
+          <p:cNvSpPr txBox="1"/>
+          <p:nvPr/>
+        </p:nvSpPr>
+        <p:spPr>
+          <a:xfrm>
+            <a:off x="749808" y="3287360"/>
+            <a:ext cx="4900000" cy="2500000"/>
+          </a:xfrm>
+          <a:prstGeom prst="rect">
+            <a:avLst/>
+          </a:prstGeom>
+          <a:noFill/>
+        </p:spPr>
+        <p:txBody>
+          <a:bodyPr wrap="none">
+            <a:spAutoFit/>
+          </a:bodyPr>
+          <a:lstStyle/>
+          <a:p>
+            <a:pPr>
+              <a:spcAft>
+                <a:spcPts val="600"/>
+              </a:spcAft>
+            </a:pPr>
+            <a:r>
+              <a:rPr sz="1200" b="0" i="0">
+                <a:solidFill>
+                  <a:srgbClr val="2A1D33"/>
+                </a:solidFill>
+                <a:latin typeface="Calibri"/>
+              </a:rPr>
+              <a:t>•  Featured Venue Badge on listing cards to establish credibility</a:t>
+            </a:r>
+          </a:p>
+          <a:p>
+            <a:pPr>
+              <a:spcAft>
+                <a:spcPts val="600"/>
+              </a:spcAft>
+            </a:pPr>
+            <a:r>
+              <a:rPr sz="1200" b="0" i="0">
+                <a:solidFill>
+                  <a:srgbClr val="2A1D33"/>
+                </a:solidFill>
+                <a:latin typeface="Calibri"/>
+              </a:rPr>
+              <a:t>•  Higher placement in search, filter results, and venue directory</a:t>
+            </a:r>
+          </a:p>
+          <a:p>
+            <a:pPr>
+              <a:spcAft>
+                <a:spcPts val="600"/>
+              </a:spcAft>
+            </a:pPr>
+            <a:r>
+              <a:rPr sz="1200" b="0" i="0">
+                <a:solidFill>
+                  <a:srgbClr val="2A1D33"/>
+                </a:solidFill>
+                <a:latin typeface="Calibri"/>
+              </a:rPr>
+              <a:t>•  Homepage featured placement reaching high-intent event organizers</a:t>
+            </a:r>
+          </a:p>
+          <a:p>
+            <a:pPr>
+              <a:spcAft>
+                <a:spcPts val="600"/>
+              </a:spcAft>
+            </a:pPr>
+            <a:r>
+              <a:rPr sz="1200" b="0" i="0">
+                <a:solidFill>
+                  <a:srgbClr val="2A1D33"/>
+                </a:solidFill>
+                <a:latin typeface="Calibri"/>
+              </a:rPr>
+              <a:t>•  Additional profile photos &amp; high-resolution gallery showcases</a:t>
+            </a:r>
+          </a:p>
+          <a:p>
+            <a:pPr>
+              <a:spcAft>
+                <a:spcPts val="600"/>
+              </a:spcAft>
+            </a:pPr>
+            <a:r>
+              <a:rPr sz="1200" b="0" i="0">
+                <a:solidFill>
+                  <a:srgbClr val="2A1D33"/>
+                </a:solidFill>
+                <a:latin typeface="Calibri"/>
+              </a:rPr>
+              <a:t>•  Premium analytics &amp; performance reporting tools</a:t>
+            </a:r>
+          </a:p>
+          <a:p>
+            <a:pPr>
+              <a:spcAft>
+                <a:spcPts val="600"/>
+              </a:spcAft>
+            </a:pPr>
+            <a:r>
+              <a:rPr sz="1200" b="0" i="0">
+                <a:solidFill>
+                  <a:srgbClr val="2A1D33"/>
+                </a:solidFill>
+                <a:latin typeface="Calibri"/>
+              </a:rPr>
+              <a:t>•  Model: Hotel Owner → HallHub Plus Subscription → Increased Visibility</a:t>
+            </a:r>
+          </a:p>
+        </p:txBody>
+      </p:sp>
+      <p:sp>
+        <p:nvSpPr>
+          <p:cNvPr id="23" name="Rounded Rectangle 22"/>
+          <p:cNvSpPr/>
+          <p:nvPr/>
+        </p:nvSpPr>
+        <p:spPr>
+          <a:xfrm>
+            <a:off x="6217920" y="1737360"/>
+            <a:ext cx="5532120" cy="4434840"/>
+          </a:xfrm>
+          <a:prstGeom prst="roundRect">
+            <a:avLst>
+              <a:gd name="adj" fmla="val 8000"/>
+            </a:avLst>
+          </a:prstGeom>
+          <a:solidFill>
+            <a:srgbClr val="4A2040"/>
+          </a:solidFill>
+          <a:ln>
+            <a:noFill/>
+          </a:ln>
+        </p:spPr>
+        <p:style>
+          <a:lnRef idx="1">
+            <a:schemeClr val="accent1"/>
+          </a:lnRef>
+          <a:fillRef idx="3">
+            <a:schemeClr val="accent1"/>
+          </a:fillRef>
+          <a:effectRef idx="2">
+            <a:schemeClr val="accent1"/>
+          </a:effectRef>
+          <a:fontRef idx="minor">
+            <a:schemeClr val="lt1"/>
+          </a:fontRef>
+        </p:style>
+        <p:txBody>
+          <a:bodyPr rtlCol="0" anchor="ctr"/>
+          <a:lstStyle/>
+          <a:p>
+            <a:pPr algn="ctr"/>
+            <a:endParaRPr/>
+          </a:p>
+        </p:txBody>
+      </p:sp>
+      <p:sp>
+        <p:nvSpPr>
+          <p:cNvPr id="34" name="TextBox 33"/>
+          <p:cNvSpPr txBox="1"/>
+          <p:nvPr/>
+        </p:nvSpPr>
+        <p:spPr>
+          <a:xfrm>
+            <a:off x="6510528" y="2057360"/>
+            <a:ext cx="4900000" cy="260000"/>
+          </a:xfrm>
+          <a:prstGeom prst="rect">
+            <a:avLst/>
+          </a:prstGeom>
+          <a:noFill/>
+        </p:spPr>
+        <p:txBody>
+          <a:bodyPr wrap="none">
+            <a:spAutoFit/>
+          </a:bodyPr>
+          <a:lstStyle/>
+          <a:p>
+            <a:r>
+              <a:rPr sz="1200" b="1" i="0">
+                <a:solidFill>
+                  <a:srgbClr val="C5A070"/>
+                </a:solidFill>
+                <a:latin typeface="Calibri"/>
+              </a:rPr>
+              <a:t>FUTURE REVENUE STREAMS  (PLANNED)</a:t>
+            </a:r>
+          </a:p>
+        </p:txBody>
+      </p:sp>
+      <p:sp>
+        <p:nvSpPr>
+          <p:cNvPr id="35" name="TextBox 34"/>
+          <p:cNvSpPr txBox="1"/>
+          <p:nvPr/>
+        </p:nvSpPr>
+        <p:spPr>
+          <a:xfrm>
+            <a:off x="6510528" y="2337360"/>
+            <a:ext cx="4900000" cy="400000"/>
+          </a:xfrm>
+          <a:prstGeom prst="rect">
+            <a:avLst/>
+          </a:prstGeom>
+          <a:noFill/>
+        </p:spPr>
+        <p:txBody>
+          <a:bodyPr wrap="none">
+            <a:spAutoFit/>
+          </a:bodyPr>
+          <a:lstStyle/>
+          <a:p>
+            <a:r>
+              <a:rPr sz="2300" b="1" i="0">
+                <a:solidFill>
+                  <a:srgbClr val="FFFFFF"/>
+                </a:solidFill>
+                <a:latin typeface="Georgia"/>
+              </a:rPr>
+              <a:t>Growth &amp; Monetization Roadmap</a:t>
+            </a:r>
+          </a:p>
+        </p:txBody>
+      </p:sp>
+      <p:sp>
+        <p:nvSpPr>
+          <p:cNvPr id="36" name="TextBox 35"/>
+          <p:cNvSpPr txBox="1"/>
+          <p:nvPr/>
+        </p:nvSpPr>
+        <p:spPr>
+          <a:xfrm>
+            <a:off x="6510528" y="2787360"/>
+            <a:ext cx="4900000" cy="400000"/>
+          </a:xfrm>
+          <a:prstGeom prst="rect">
+            <a:avLst/>
+          </a:prstGeom>
+          <a:noFill/>
+        </p:spPr>
+        <p:txBody>
+          <a:bodyPr wrap="none">
+            <a:spAutoFit/>
+          </a:bodyPr>
+          <a:lstStyle/>
+          <a:p>
+            <a:r>
+              <a:rPr sz="1300" b="0" i="1">
+                <a:solidFill>
+                  <a:srgbClr val="D2C3CD"/>
+                </a:solidFill>
+                <a:latin typeface="Calibri"/>
+              </a:rPr>
+              <a:t>Future enhancements not currently implemented in the system:</a:t>
+            </a:r>
+          </a:p>
+        </p:txBody>
+      </p:sp>
+      <p:sp>
+        <p:nvSpPr>
+          <p:cNvPr id="37" name="TextBox 36"/>
+          <p:cNvSpPr txBox="1"/>
+          <p:nvPr/>
+        </p:nvSpPr>
+        <p:spPr>
+          <a:xfrm>
+            <a:off x="6510528" y="3287360"/>
+            <a:ext cx="4900000" cy="2500000"/>
+          </a:xfrm>
+          <a:prstGeom prst="rect">
+            <a:avLst/>
+          </a:prstGeom>
+          <a:noFill/>
+        </p:spPr>
+        <p:txBody>
+          <a:bodyPr wrap="none">
+            <a:spAutoFit/>
+          </a:bodyPr>
+          <a:lstStyle/>
+          <a:p>
+            <a:pPr>
+              <a:spcAft>
+                <a:spcPts val="600"/>
+              </a:spcAft>
+            </a:pPr>
+            <a:r>
+              <a:rPr sz="1100" b="0" i="0">
+                <a:solidFill>
+                  <a:srgbClr val="FFFFFF"/>
+                </a:solidFill>
+                <a:latin typeface="Calibri"/>
+              </a:rPr>
+              <a:t>•  Online Payments: Enable digital deposit and payment processing directly on HallHub (e.g. mobile money / card integration)</a:t>
+            </a:r>
+          </a:p>
+          <a:p>
+            <a:pPr>
+              <a:spcAft>
+                <a:spcPts val="600"/>
+              </a:spcAft>
+            </a:pPr>
+            <a:r>
+              <a:rPr sz="1100" b="0" i="0">
+                <a:solidFill>
+                  <a:srgbClr val="FFFFFF"/>
+                </a:solidFill>
+                <a:latin typeface="Calibri"/>
+              </a:rPr>
+              <a:t>•  Booking Commission: Once online payments are implemented, earn a percentage from completed transactions (e.g., 5% fee)</a:t>
+            </a:r>
+          </a:p>
+          <a:p>
+            <a:pPr>
+              <a:spcAft>
+                <a:spcPts val="600"/>
+              </a:spcAft>
+            </a:pPr>
+            <a:r>
+              <a:rPr sz="1100" b="0" i="0">
+                <a:solidFill>
+                  <a:srgbClr val="FFFFFF"/>
+                </a:solidFill>
+                <a:latin typeface="Calibri"/>
+              </a:rPr>
+              <a:t>•  Event Service Advertising: Paid placement for third-party event professionals seeking clients:</a:t>
+            </a:r>
+          </a:p>
+          <a:p>
+            <a:pPr>
+              <a:spcAft>
+                <a:spcPts val="600"/>
+              </a:spcAft>
+            </a:pPr>
+            <a:r>
+              <a:rPr sz="1100" b="0" i="0">
+                <a:solidFill>
+                  <a:srgbClr val="FFFFFF"/>
+                </a:solidFill>
+                <a:latin typeface="Calibri"/>
+              </a:rPr>
+              <a:t>    – Photographers &amp; videographers
+    – Decorators, florists &amp; sound/lighting teams
+    – Caterers, wedding planners, DJs &amp; makeup artists</a:t>
+            </a:r>
+          </a:p>
+        </p:txBody>
+      </p:sp>
+    </p:spTree>
+  </p:cSld>
+  <p:clrMapOvr>
+    <a:masterClrMapping/>
+  </p:clrMapOvr>
+</p:sld>
+</file>
+
+<file path=ppt/slides/slide11.xml><?xml version="1.0" encoding="utf-8"?>
+<p:sld xmlns:a="http://schemas.openxmlformats.org/drawingml/2006/main" xmlns:p="http://schemas.openxmlformats.org/presentationml/2006/main" xmlns:r="http://schemas.openxmlformats.org/officeDocument/2006/relationships">
+  <p:cSld>
+    <p:spTree>
+      <p:nvGrpSpPr>
+        <p:cNvPr id="1" name=""/>
+        <p:cNvGrpSpPr/>
+        <p:nvPr/>
+      </p:nvGrpSpPr>
+      <p:grpSpPr/>
+      <p:sp>
+        <p:nvSpPr>
+          <p:cNvPr id="2" name="Rectangle 1"/>
+          <p:cNvSpPr/>
+          <p:nvPr/>
+        </p:nvSpPr>
+        <p:spPr>
+          <a:xfrm>
+            <a:off x="-15240" y="16439"/>
+            <a:ext cx="12191999" cy="6858000"/>
+          </a:xfrm>
+          <a:prstGeom prst="rect">
+            <a:avLst/>
+          </a:prstGeom>
+          <a:solidFill>
+            <a:srgbClr val="FAF7F9"/>
+          </a:solidFill>
+          <a:ln>
+            <a:noFill/>
+          </a:ln>
+        </p:spPr>
+        <p:style>
+          <a:lnRef idx="1">
+            <a:schemeClr val="accent1"/>
+          </a:lnRef>
+          <a:fillRef idx="3">
+            <a:schemeClr val="accent1"/>
+          </a:fillRef>
+          <a:effectRef idx="2">
+            <a:schemeClr val="accent1"/>
+          </a:effectRef>
+          <a:fontRef idx="minor">
+            <a:schemeClr val="lt1"/>
+          </a:fontRef>
+        </p:style>
+        <p:txBody>
+          <a:bodyPr rtlCol="0" anchor="ctr"/>
+          <a:lstStyle/>
+          <a:p>
+            <a:pPr algn="ctr"/>
+            <a:endParaRPr dirty="0"/>
+          </a:p>
+        </p:txBody>
+      </p:sp>
+      <p:sp>
+        <p:nvSpPr>
+          <p:cNvPr id="3" name="Rounded Rectangle 2"/>
+          <p:cNvSpPr/>
+          <p:nvPr/>
+        </p:nvSpPr>
+        <p:spPr>
+          <a:xfrm>
+            <a:off x="365760" y="256032"/>
+            <a:ext cx="11430000" cy="566928"/>
+          </a:xfrm>
+          <a:prstGeom prst="roundRect">
+            <a:avLst>
+              <a:gd name="adj" fmla="val 50000"/>
+            </a:avLst>
+          </a:prstGeom>
+          <a:solidFill>
+            <a:srgbClr val="FFFFFF"/>
+          </a:solidFill>
+          <a:ln w="12700">
+            <a:solidFill>
+              <a:srgbClr val="D4B37A"/>
+            </a:solidFill>
+          </a:ln>
+        </p:spPr>
+        <p:style>
+          <a:lnRef idx="1">
+            <a:schemeClr val="accent1"/>
+          </a:lnRef>
+          <a:fillRef idx="3">
+            <a:schemeClr val="accent1"/>
+          </a:fillRef>
+          <a:effectRef idx="2">
+            <a:schemeClr val="accent1"/>
+          </a:effectRef>
+          <a:fontRef idx="minor">
+            <a:schemeClr val="lt1"/>
+          </a:fontRef>
+        </p:style>
+        <p:txBody>
+          <a:bodyPr rtlCol="0" anchor="ctr"/>
+          <a:lstStyle/>
+          <a:p>
+            <a:pPr algn="ctr"/>
+            <a:endParaRPr/>
+          </a:p>
+        </p:txBody>
+      </p:sp>
+      <p:sp>
+        <p:nvSpPr>
+          <p:cNvPr id="4" name="Rounded Rectangle 3"/>
+          <p:cNvSpPr/>
+          <p:nvPr/>
+        </p:nvSpPr>
+        <p:spPr>
+          <a:xfrm>
+            <a:off x="457200" y="329184"/>
+            <a:ext cx="1325880" cy="420624"/>
+          </a:xfrm>
+          <a:prstGeom prst="roundRect">
+            <a:avLst>
+              <a:gd name="adj" fmla="val 50000"/>
+            </a:avLst>
+          </a:prstGeom>
+          <a:solidFill>
+            <a:srgbClr val="4A2040"/>
+          </a:solidFill>
+          <a:ln w="12700">
+            <a:solidFill>
+              <a:srgbClr val="D4B37A"/>
+            </a:solidFill>
+          </a:ln>
+        </p:spPr>
+        <p:style>
+          <a:lnRef idx="1">
+            <a:schemeClr val="accent1"/>
+          </a:lnRef>
+          <a:fillRef idx="3">
+            <a:schemeClr val="accent1"/>
+          </a:fillRef>
+          <a:effectRef idx="2">
+            <a:schemeClr val="accent1"/>
+          </a:effectRef>
+          <a:fontRef idx="minor">
+            <a:schemeClr val="lt1"/>
+          </a:fontRef>
+        </p:style>
+        <p:txBody>
+          <a:bodyPr rtlCol="0" anchor="ctr"/>
+          <a:lstStyle/>
+          <a:p>
+            <a:pPr algn="ctr"/>
+            <a:endParaRPr/>
+          </a:p>
+        </p:txBody>
+      </p:sp>
+      <p:sp>
+        <p:nvSpPr>
+          <p:cNvPr id="5" name="TextBox 4"/>
+          <p:cNvSpPr txBox="1"/>
+          <p:nvPr/>
+        </p:nvSpPr>
+        <p:spPr>
+          <a:xfrm>
+            <a:off x="457200" y="384048"/>
+            <a:ext cx="1325880" cy="310896"/>
+          </a:xfrm>
+          <a:prstGeom prst="rect">
+            <a:avLst/>
+          </a:prstGeom>
+          <a:noFill/>
+        </p:spPr>
+        <p:txBody>
+          <a:bodyPr wrap="square">
+            <a:spAutoFit/>
+          </a:bodyPr>
+          <a:lstStyle/>
+          <a:p>
+            <a:pPr algn="ctr"/>
+            <a:r>
+              <a:rPr sz="1300" b="0">
+                <a:solidFill>
+                  <a:srgbClr val="FFFFFF"/>
+                </a:solidFill>
+                <a:latin typeface="Georgia"/>
+              </a:rPr>
+              <a:t>HallHub</a:t>
+            </a:r>
+          </a:p>
+        </p:txBody>
+      </p:sp>
+      <p:sp>
+        <p:nvSpPr>
+          <p:cNvPr id="6" name="TextBox 5"/>
+          <p:cNvSpPr txBox="1"/>
+          <p:nvPr/>
+        </p:nvSpPr>
+        <p:spPr>
+          <a:xfrm>
+            <a:off x="1965960" y="365760"/>
+            <a:ext cx="1000000" cy="310896"/>
+          </a:xfrm>
+          <a:prstGeom prst="rect">
+            <a:avLst/>
+          </a:prstGeom>
+          <a:noFill/>
+        </p:spPr>
+        <p:txBody>
+          <a:bodyPr wrap="none" lIns="0" tIns="0" rIns="0" bIns="0">
+            <a:spAutoFit/>
+          </a:bodyPr>
+          <a:lstStyle/>
+          <a:p>
+            <a:r>
+              <a:rPr sz="1100" b="1">
+                <a:solidFill>
+                  <a:srgbClr val="4A2040"/>
+                </a:solidFill>
+                <a:latin typeface="Calibri"/>
+              </a:rPr>
+              <a:t>HallHub</a:t>
+            </a:r>
+          </a:p>
+        </p:txBody>
+      </p:sp>
+      <p:sp>
+        <p:nvSpPr>
+          <p:cNvPr id="7" name="TextBox 6"/>
+          <p:cNvSpPr txBox="1"/>
+          <p:nvPr/>
+        </p:nvSpPr>
+        <p:spPr>
+          <a:xfrm>
+            <a:off x="3000000" y="365760"/>
+            <a:ext cx="1000000" cy="310896"/>
+          </a:xfrm>
+          <a:prstGeom prst="rect">
+            <a:avLst/>
+          </a:prstGeom>
+          <a:noFill/>
+        </p:spPr>
+        <p:txBody>
+          <a:bodyPr wrap="none" lIns="0" tIns="0" rIns="0" bIns="0">
+            <a:spAutoFit/>
+          </a:bodyPr>
+          <a:lstStyle/>
+          <a:p>
+            <a:r>
+              <a:rPr sz="1100" b="1">
+                <a:solidFill>
+                  <a:srgbClr val="4A2040"/>
+                </a:solidFill>
+                <a:latin typeface="Calibri"/>
+              </a:rPr>
+              <a:t>Problem</a:t>
+            </a:r>
+          </a:p>
+        </p:txBody>
+      </p:sp>
+      <p:sp>
+        <p:nvSpPr>
+          <p:cNvPr id="8" name="TextBox 7"/>
+          <p:cNvSpPr txBox="1"/>
+          <p:nvPr/>
+        </p:nvSpPr>
+        <p:spPr>
+          <a:xfrm>
+            <a:off x="4050000" y="365760"/>
+            <a:ext cx="1000000" cy="310896"/>
+          </a:xfrm>
+          <a:prstGeom prst="rect">
+            <a:avLst/>
+          </a:prstGeom>
+          <a:noFill/>
+        </p:spPr>
+        <p:txBody>
+          <a:bodyPr wrap="none" lIns="0" tIns="0" rIns="0" bIns="0">
+            <a:spAutoFit/>
+          </a:bodyPr>
+          <a:lstStyle/>
+          <a:p>
+            <a:r>
+              <a:rPr sz="1100" b="1">
+                <a:solidFill>
+                  <a:srgbClr val="4A2040"/>
+                </a:solidFill>
+                <a:latin typeface="Calibri"/>
+              </a:rPr>
+              <a:t>Values</a:t>
+            </a:r>
+          </a:p>
+        </p:txBody>
+      </p:sp>
+      <p:sp>
+        <p:nvSpPr>
+          <p:cNvPr id="9" name="TextBox 8"/>
+          <p:cNvSpPr txBox="1"/>
+          <p:nvPr/>
+        </p:nvSpPr>
+        <p:spPr>
+          <a:xfrm>
+            <a:off x="5000000" y="365760"/>
+            <a:ext cx="1000000" cy="310896"/>
+          </a:xfrm>
+          <a:prstGeom prst="rect">
+            <a:avLst/>
+          </a:prstGeom>
+          <a:noFill/>
+        </p:spPr>
+        <p:txBody>
+          <a:bodyPr wrap="none" lIns="0" tIns="0" rIns="0" bIns="0">
+            <a:spAutoFit/>
+          </a:bodyPr>
+          <a:lstStyle/>
+          <a:p>
+            <a:r>
+              <a:rPr sz="1100" b="1">
+                <a:solidFill>
+                  <a:srgbClr val="4A2040"/>
+                </a:solidFill>
+                <a:latin typeface="Calibri"/>
+              </a:rPr>
+              <a:t>Market</a:t>
+            </a:r>
+          </a:p>
+        </p:txBody>
+      </p:sp>
+      <p:sp>
+        <p:nvSpPr>
+          <p:cNvPr id="10" name="TextBox 9"/>
+          <p:cNvSpPr txBox="1"/>
+          <p:nvPr/>
+        </p:nvSpPr>
+        <p:spPr>
+          <a:xfrm>
+            <a:off x="5950000" y="365760"/>
+            <a:ext cx="1000000" cy="310896"/>
+          </a:xfrm>
+          <a:prstGeom prst="rect">
+            <a:avLst/>
+          </a:prstGeom>
+          <a:noFill/>
+        </p:spPr>
+        <p:txBody>
+          <a:bodyPr wrap="none" lIns="0" tIns="0" rIns="0" bIns="0">
+            <a:spAutoFit/>
+          </a:bodyPr>
+          <a:lstStyle/>
+          <a:p>
+            <a:r>
+              <a:rPr sz="1100" b="1">
+                <a:solidFill>
+                  <a:srgbClr val="4A2040"/>
+                </a:solidFill>
+                <a:latin typeface="Calibri"/>
+              </a:rPr>
+              <a:t>Revenue</a:t>
+            </a:r>
+          </a:p>
+        </p:txBody>
+      </p:sp>
+      <p:sp>
+        <p:nvSpPr>
+          <p:cNvPr id="11" name="TextBox 10"/>
+          <p:cNvSpPr txBox="1"/>
+          <p:nvPr/>
+        </p:nvSpPr>
+        <p:spPr>
+          <a:xfrm>
+            <a:off x="7000000" y="365760"/>
+            <a:ext cx="1000000" cy="310896"/>
+          </a:xfrm>
+          <a:prstGeom prst="rect">
+            <a:avLst/>
+          </a:prstGeom>
+          <a:noFill/>
+        </p:spPr>
+        <p:txBody>
+          <a:bodyPr wrap="none" lIns="0" tIns="0" rIns="0" bIns="0">
+            <a:spAutoFit/>
+          </a:bodyPr>
+          <a:lstStyle/>
+          <a:p>
+            <a:r>
+              <a:rPr sz="1100" b="1">
+                <a:solidFill>
+                  <a:srgbClr val="7A3A6A"/>
+                </a:solidFill>
+                <a:latin typeface="Calibri"/>
+              </a:rPr>
+              <a:t>Advantage</a:t>
+            </a:r>
+          </a:p>
+        </p:txBody>
+      </p:sp>
+      <p:sp>
+        <p:nvSpPr>
+          <p:cNvPr id="12" name="Rectangle 11"/>
+          <p:cNvSpPr/>
+          <p:nvPr/>
+        </p:nvSpPr>
+        <p:spPr>
+          <a:xfrm>
+            <a:off x="7040000" y="676656"/>
+            <a:ext cx="520000" cy="16459"/>
+          </a:xfrm>
+          <a:prstGeom prst="rect">
+            <a:avLst/>
+          </a:prstGeom>
+          <a:solidFill>
+            <a:srgbClr val="4A2040"/>
+          </a:solidFill>
+          <a:ln>
+            <a:noFill/>
+          </a:ln>
+        </p:spPr>
+        <p:style>
+          <a:lnRef idx="1">
+            <a:schemeClr val="accent1"/>
+          </a:lnRef>
+          <a:fillRef idx="3">
+            <a:schemeClr val="accent1"/>
+          </a:fillRef>
+          <a:effectRef idx="2">
+            <a:schemeClr val="accent1"/>
+          </a:effectRef>
+          <a:fontRef idx="minor">
+            <a:schemeClr val="lt1"/>
+          </a:fontRef>
+        </p:style>
+        <p:txBody>
+          <a:bodyPr rtlCol="0" anchor="ctr"/>
+          <a:lstStyle/>
+          <a:p>
+            <a:pPr algn="ctr"/>
+          </a:p>
+        </p:txBody>
+      </p:sp>
+      <p:sp>
+        <p:nvSpPr>
+          <p:cNvPr id="13" name="TextBox 12"/>
+          <p:cNvSpPr txBox="1"/>
+          <p:nvPr/>
+        </p:nvSpPr>
+        <p:spPr>
+          <a:xfrm>
+            <a:off x="8150000" y="365760"/>
+            <a:ext cx="1000000" cy="310896"/>
+          </a:xfrm>
+          <a:prstGeom prst="rect">
+            <a:avLst/>
+          </a:prstGeom>
+          <a:noFill/>
+        </p:spPr>
+        <p:txBody>
+          <a:bodyPr wrap="none" lIns="0" tIns="0" rIns="0" bIns="0">
+            <a:spAutoFit/>
+          </a:bodyPr>
+          <a:lstStyle/>
+          <a:p>
+            <a:r>
+              <a:rPr sz="1100" b="1">
+                <a:solidFill>
+                  <a:srgbClr val="4A2040"/>
+                </a:solidFill>
+                <a:latin typeface="Calibri"/>
+              </a:rPr>
+              <a:t>Product</a:t>
+            </a:r>
+          </a:p>
+        </p:txBody>
+      </p:sp>
+      <p:sp>
+        <p:nvSpPr>
+          <p:cNvPr id="14" name="TextBox 13"/>
+          <p:cNvSpPr txBox="1"/>
+          <p:nvPr/>
+        </p:nvSpPr>
+        <p:spPr>
+          <a:xfrm>
+            <a:off x="9250000" y="365760"/>
+            <a:ext cx="1000000" cy="310896"/>
+          </a:xfrm>
+          <a:prstGeom prst="rect">
+            <a:avLst/>
+          </a:prstGeom>
+          <a:noFill/>
+        </p:spPr>
+        <p:txBody>
+          <a:bodyPr wrap="none" lIns="0" tIns="0" rIns="0" bIns="0">
+            <a:spAutoFit/>
+          </a:bodyPr>
+          <a:lstStyle/>
+          <a:p>
+            <a:r>
+              <a:rPr sz="1100" b="1">
+                <a:solidFill>
+                  <a:srgbClr val="4A2040"/>
+                </a:solidFill>
+                <a:latin typeface="Calibri"/>
+              </a:rPr>
+              <a:t>Vision</a:t>
+            </a:r>
+          </a:p>
+        </p:txBody>
+      </p:sp>
+      <p:sp>
+        <p:nvSpPr>
+          <p:cNvPr id="14" name="Rectangle 13"/>
+          <p:cNvSpPr/>
+          <p:nvPr/>
+        </p:nvSpPr>
+        <p:spPr>
+          <a:xfrm>
+            <a:off x="457200" y="1042416"/>
+            <a:ext cx="201168" cy="13716"/>
+          </a:xfrm>
+          <a:prstGeom prst="rect">
+            <a:avLst/>
+          </a:prstGeom>
+          <a:solidFill>
+            <a:srgbClr val="C5A070"/>
+          </a:solidFill>
+          <a:ln>
+            <a:noFill/>
+          </a:ln>
+        </p:spPr>
+        <p:style>
+          <a:lnRef idx="1">
+            <a:schemeClr val="accent1"/>
+          </a:lnRef>
+          <a:fillRef idx="3">
+            <a:schemeClr val="accent1"/>
+          </a:fillRef>
+          <a:effectRef idx="2">
+            <a:schemeClr val="accent1"/>
+          </a:effectRef>
+          <a:fontRef idx="minor">
+            <a:schemeClr val="lt1"/>
+          </a:fontRef>
+        </p:style>
+        <p:txBody>
+          <a:bodyPr rtlCol="0" anchor="ctr"/>
+          <a:lstStyle/>
+          <a:p>
+            <a:pPr algn="ctr"/>
+            <a:endParaRPr/>
+          </a:p>
+        </p:txBody>
+      </p:sp>
+      <p:sp>
+        <p:nvSpPr>
+          <p:cNvPr id="15" name="TextBox 14"/>
+          <p:cNvSpPr txBox="1"/>
+          <p:nvPr/>
+        </p:nvSpPr>
+        <p:spPr>
+          <a:xfrm>
+            <a:off x="731520" y="960120"/>
+            <a:ext cx="9144000" cy="256032"/>
+          </a:xfrm>
+          <a:prstGeom prst="rect">
+            <a:avLst/>
+          </a:prstGeom>
+          <a:noFill/>
+        </p:spPr>
+        <p:txBody>
+          <a:bodyPr wrap="none" lIns="0" tIns="0" rIns="0" bIns="0">
+            <a:spAutoFit/>
+          </a:bodyPr>
+          <a:lstStyle/>
+          <a:p>
+            <a:r>
+              <a:rPr sz="1200" b="1" i="0">
+                <a:solidFill>
+                  <a:srgbClr val="C5A070"/>
+                </a:solidFill>
+                <a:latin typeface="Calibri"/>
+              </a:rPr>
+              <a:t>06  —  COMPETITIVE ADVANTAGE</a:t>
+            </a:r>
+          </a:p>
+        </p:txBody>
+      </p:sp>
+      <p:sp>
+        <p:nvSpPr>
+          <p:cNvPr id="16" name="TextBox 15"/>
+          <p:cNvSpPr txBox="1"/>
+          <p:nvPr/>
+        </p:nvSpPr>
+        <p:spPr>
+          <a:xfrm>
+            <a:off x="457200" y="1207008"/>
+            <a:ext cx="10972800" cy="420000"/>
+          </a:xfrm>
+          <a:prstGeom prst="rect">
+            <a:avLst/>
+          </a:prstGeom>
+          <a:noFill/>
+        </p:spPr>
+        <p:txBody>
+          <a:bodyPr wrap="none" lIns="0" tIns="0" rIns="0" bIns="0">
+            <a:spAutoFit/>
+          </a:bodyPr>
+          <a:lstStyle/>
+          <a:p>
+            <a:r>
+              <a:rPr sz="2500" b="1" i="0">
+                <a:solidFill>
+                  <a:srgbClr val="4A2040"/>
+                </a:solidFill>
+                <a:latin typeface="Georgia"/>
+              </a:rPr>
+              <a:t>Positioning HallHub in the venue management landscape</a:t>
+            </a:r>
+          </a:p>
+        </p:txBody>
+      </p:sp>
+      <p:sp>
+        <p:nvSpPr>
+          <p:cNvPr id="28" name="TextBox 27"/>
+          <p:cNvSpPr txBox="1"/>
+          <p:nvPr/>
+        </p:nvSpPr>
+        <p:spPr>
+          <a:xfrm>
+            <a:off x="640080" y="6510528"/>
+            <a:ext cx="2743200" cy="256032"/>
+          </a:xfrm>
+          <a:prstGeom prst="rect">
+            <a:avLst/>
+          </a:prstGeom>
+          <a:noFill/>
+        </p:spPr>
+        <p:txBody>
+          <a:bodyPr wrap="square">
+            <a:spAutoFit/>
+          </a:bodyPr>
+          <a:lstStyle/>
+          <a:p>
+            <a:pPr algn="l"/>
+            <a:r>
+              <a:rPr sz="1300" b="1">
+                <a:solidFill>
+                  <a:srgbClr val="4A2040"/>
+                </a:solidFill>
+                <a:latin typeface="Georgia"/>
+              </a:rPr>
+              <a:t>HallHub</a:t>
+            </a:r>
+          </a:p>
+        </p:txBody>
+      </p:sp>
+      <p:sp>
+        <p:nvSpPr>
+          <p:cNvPr id="29" name="TextBox 28"/>
+          <p:cNvSpPr txBox="1"/>
+          <p:nvPr/>
+        </p:nvSpPr>
+        <p:spPr>
+          <a:xfrm>
+            <a:off x="10241280" y="6510528"/>
+            <a:ext cx="1280160" cy="256032"/>
+          </a:xfrm>
+          <a:prstGeom prst="rect">
+            <a:avLst/>
+          </a:prstGeom>
+          <a:noFill/>
+        </p:spPr>
+        <p:txBody>
+          <a:bodyPr wrap="none" lIns="0" tIns="0" rIns="0" bIns="0">
+            <a:spAutoFit/>
+          </a:bodyPr>
+          <a:lstStyle/>
+          <a:p>
+            <a:r>
+              <a:rPr sz="1200" b="0" i="0">
+                <a:solidFill>
+                  <a:srgbClr val="6B6570"/>
+                </a:solidFill>
+                <a:latin typeface="Calibri"/>
+              </a:rPr>
+              <a:t>06 / 08</a:t>
+            </a:r>
+          </a:p>
+        </p:txBody>
+      </p:sp>
+      <p:sp>
+        <p:nvSpPr>
+          <p:cNvPr id="17" name="Rounded Rectangle 16"/>
+          <p:cNvSpPr/>
+          <p:nvPr/>
+        </p:nvSpPr>
+        <p:spPr>
+          <a:xfrm>
+            <a:off x="457200" y="1737360"/>
+            <a:ext cx="5532120" cy="3500000"/>
+          </a:xfrm>
+          <a:prstGeom prst="roundRect">
+            <a:avLst>
+              <a:gd name="adj" fmla="val 8000"/>
+            </a:avLst>
+          </a:prstGeom>
+          <a:solidFill>
+            <a:srgbClr val="FFFDFB"/>
+          </a:solidFill>
+          <a:ln w="12700">
+            <a:solidFill>
+              <a:srgbClr val="EAD9C2"/>
+            </a:solidFill>
+          </a:ln>
+        </p:spPr>
+        <p:style>
+          <a:lnRef idx="1">
+            <a:schemeClr val="accent1"/>
+          </a:lnRef>
+          <a:fillRef idx="3">
+            <a:schemeClr val="accent1"/>
+          </a:fillRef>
+          <a:effectRef idx="2">
+            <a:schemeClr val="accent1"/>
+          </a:effectRef>
+          <a:fontRef idx="minor">
+            <a:schemeClr val="lt1"/>
+          </a:fontRef>
+        </p:style>
+        <p:txBody>
+          <a:bodyPr rtlCol="0" anchor="ctr"/>
+          <a:lstStyle/>
+          <a:p>
+            <a:pPr algn="ctr"/>
+            <a:endParaRPr dirty="0"/>
+          </a:p>
+        </p:txBody>
+      </p:sp>
+      <p:sp>
+        <p:nvSpPr>
+          <p:cNvPr id="18" name="Rounded Rectangle 17"/>
+          <p:cNvSpPr/>
+          <p:nvPr/>
+        </p:nvSpPr>
+        <p:spPr>
+          <a:xfrm>
+            <a:off x="749808" y="1917360"/>
+            <a:ext cx="502920" cy="54864"/>
+          </a:xfrm>
+          <a:prstGeom prst="roundRect">
+            <a:avLst>
+              <a:gd name="adj" fmla="val 50000"/>
+            </a:avLst>
+          </a:prstGeom>
+          <a:solidFill>
+            <a:srgbClr val="C5A070"/>
+          </a:solidFill>
+          <a:ln>
+            <a:noFill/>
+          </a:ln>
+        </p:spPr>
+        <p:style>
+          <a:lnRef idx="1">
+            <a:schemeClr val="accent1"/>
+          </a:lnRef>
+          <a:fillRef idx="3">
+            <a:schemeClr val="accent1"/>
+          </a:fillRef>
+          <a:effectRef idx="2">
+            <a:schemeClr val="accent1"/>
+          </a:effectRef>
+          <a:fontRef idx="minor">
+            <a:schemeClr val="lt1"/>
+          </a:fontRef>
+        </p:style>
+        <p:txBody>
+          <a:bodyPr rtlCol="0" anchor="ctr"/>
+          <a:lstStyle/>
+          <a:p>
+            <a:pPr algn="ctr"/>
+            <a:endParaRPr/>
+          </a:p>
+        </p:txBody>
+      </p:sp>
+      <p:sp>
+        <p:nvSpPr>
+          <p:cNvPr id="30" name="TextBox 29"/>
+          <p:cNvSpPr txBox="1"/>
+          <p:nvPr/>
+        </p:nvSpPr>
+        <p:spPr>
+          <a:xfrm>
+            <a:off x="749808" y="2057360"/>
+            <a:ext cx="4900000" cy="260000"/>
+          </a:xfrm>
+          <a:prstGeom prst="rect">
+            <a:avLst/>
+          </a:prstGeom>
+          <a:noFill/>
+        </p:spPr>
+        <p:txBody>
+          <a:bodyPr wrap="none">
+            <a:spAutoFit/>
+          </a:bodyPr>
+          <a:lstStyle/>
+          <a:p>
+            <a:r>
+              <a:rPr sz="1200" b="1" i="0">
+                <a:solidFill>
+                  <a:srgbClr val="C5A070"/>
+                </a:solidFill>
+                <a:latin typeface="Calibri"/>
+              </a:rPr>
+              <a:t>EXISTING ALTERNATIVES</a:t>
+            </a:r>
+          </a:p>
+        </p:txBody>
+      </p:sp>
+      <p:sp>
+        <p:nvSpPr>
+          <p:cNvPr id="31" name="TextBox 30"/>
+          <p:cNvSpPr txBox="1"/>
+          <p:nvPr/>
+        </p:nvSpPr>
+        <p:spPr>
+          <a:xfrm>
+            <a:off x="749808" y="2337360"/>
+            <a:ext cx="4900000" cy="400000"/>
+          </a:xfrm>
+          <a:prstGeom prst="rect">
+            <a:avLst/>
+          </a:prstGeom>
+          <a:noFill/>
+        </p:spPr>
+        <p:txBody>
+          <a:bodyPr wrap="none">
+            <a:spAutoFit/>
+          </a:bodyPr>
+          <a:lstStyle/>
+          <a:p>
+            <a:r>
+              <a:rPr sz="2200" b="1" i="0">
+                <a:solidFill>
+                  <a:srgbClr val="4A2040"/>
+                </a:solidFill>
+                <a:latin typeface="Georgia"/>
+              </a:rPr>
+              <a:t>Current Market Landscape</a:t>
+            </a:r>
+          </a:p>
+        </p:txBody>
+      </p:sp>
+      <p:sp>
+        <p:nvSpPr>
+          <p:cNvPr id="32" name="TextBox 31"/>
+          <p:cNvSpPr txBox="1"/>
+          <p:nvPr/>
+        </p:nvSpPr>
+        <p:spPr>
+          <a:xfrm>
+            <a:off x="749808" y="2837360"/>
+            <a:ext cx="4900000" cy="2200000"/>
+          </a:xfrm>
+          <a:prstGeom prst="rect">
+            <a:avLst/>
+          </a:prstGeom>
+          <a:noFill/>
+        </p:spPr>
+        <p:txBody>
+          <a:bodyPr wrap="none">
+            <a:spAutoFit/>
+          </a:bodyPr>
+          <a:lstStyle/>
+          <a:p>
+            <a:pPr>
+              <a:spcAft>
+                <a:spcPts val="500"/>
+              </a:spcAft>
+            </a:pPr>
+            <a:r>
+              <a:rPr sz="1200" b="0" i="0">
+                <a:solidFill>
+                  <a:srgbClr val="2A1D33"/>
+                </a:solidFill>
+                <a:latin typeface="Calibri"/>
+              </a:rPr>
+              <a:t>•  Individual Hotel Software: Proprietary tools that only serve a single hotel brand</a:t>
+            </a:r>
+          </a:p>
+          <a:p>
+            <a:pPr>
+              <a:spcAft>
+                <a:spcPts val="500"/>
+              </a:spcAft>
+            </a:pPr>
+            <a:r>
+              <a:rPr sz="1200" b="0" i="0">
+                <a:solidFill>
+                  <a:srgbClr val="2A1D33"/>
+                </a:solidFill>
+                <a:latin typeface="Calibri"/>
+              </a:rPr>
+              <a:t>•  Manual Coordination: In-person visits, direct phone calls, and informal chat messaging</a:t>
+            </a:r>
+          </a:p>
+          <a:p>
+            <a:pPr>
+              <a:spcAft>
+                <a:spcPts val="500"/>
+              </a:spcAft>
+            </a:pPr>
+            <a:r>
+              <a:rPr sz="1200" b="0" i="0">
+                <a:solidFill>
+                  <a:srgbClr val="2A1D33"/>
+                </a:solidFill>
+                <a:latin typeface="Calibri"/>
+              </a:rPr>
+              <a:t>•  Fragmented Experience: Customers must contact hotels one by one to compare terms</a:t>
+            </a:r>
+          </a:p>
+          <a:p>
+            <a:pPr>
+              <a:spcAft>
+                <a:spcPts val="500"/>
+              </a:spcAft>
+            </a:pPr>
+            <a:r>
+              <a:rPr sz="1200" b="0" i="0">
+                <a:solidFill>
+                  <a:srgbClr val="2A1D33"/>
+                </a:solidFill>
+                <a:latin typeface="Calibri"/>
+              </a:rPr>
+              <a:t>•  Lack of Verification: Information can be outdated, with no centralized oversight</a:t>
+            </a:r>
+          </a:p>
+          <a:p>
+            <a:pPr>
+              <a:spcAft>
+                <a:spcPts val="500"/>
+              </a:spcAft>
+            </a:pPr>
+            <a:r>
+              <a:rPr sz="1200" b="0" i="0">
+                <a:solidFill>
+                  <a:srgbClr val="2A1D33"/>
+                </a:solidFill>
+                <a:latin typeface="Calibri"/>
+              </a:rPr>
+              <a:t>•  Limited Discovery: Smaller and newer venue halls lack equal exposure to customers</a:t>
+            </a:r>
+          </a:p>
+        </p:txBody>
+      </p:sp>
+      <p:sp>
+        <p:nvSpPr>
+          <p:cNvPr id="17" name="Rounded Rectangle 16"/>
+          <p:cNvSpPr/>
+          <p:nvPr/>
+        </p:nvSpPr>
+        <p:spPr>
+          <a:xfrm>
+            <a:off x="6217920" y="1737360"/>
+            <a:ext cx="5532120" cy="3500000"/>
+          </a:xfrm>
+          <a:prstGeom prst="roundRect">
+            <a:avLst>
+              <a:gd name="adj" fmla="val 8000"/>
+            </a:avLst>
+          </a:prstGeom>
+          <a:solidFill>
+            <a:srgbClr val="FFFDFB"/>
+          </a:solidFill>
+          <a:ln w="12700">
+            <a:solidFill>
+              <a:srgbClr val="EAD9C2"/>
+            </a:solidFill>
+          </a:ln>
+        </p:spPr>
+        <p:style>
+          <a:lnRef idx="1">
+            <a:schemeClr val="accent1"/>
+          </a:lnRef>
+          <a:fillRef idx="3">
+            <a:schemeClr val="accent1"/>
+          </a:fillRef>
+          <a:effectRef idx="2">
+            <a:schemeClr val="accent1"/>
+          </a:effectRef>
+          <a:fontRef idx="minor">
+            <a:schemeClr val="lt1"/>
+          </a:fontRef>
+        </p:style>
+        <p:txBody>
+          <a:bodyPr rtlCol="0" anchor="ctr"/>
+          <a:lstStyle/>
+          <a:p>
+            <a:pPr algn="ctr"/>
+            <a:endParaRPr dirty="0"/>
+          </a:p>
+        </p:txBody>
+      </p:sp>
+      <p:sp>
+        <p:nvSpPr>
+          <p:cNvPr id="18" name="Rounded Rectangle 17"/>
+          <p:cNvSpPr/>
+          <p:nvPr/>
+        </p:nvSpPr>
+        <p:spPr>
+          <a:xfrm>
+            <a:off x="6510528" y="1917360"/>
+            <a:ext cx="502920" cy="54864"/>
+          </a:xfrm>
+          <a:prstGeom prst="roundRect">
+            <a:avLst>
+              <a:gd name="adj" fmla="val 50000"/>
+            </a:avLst>
+          </a:prstGeom>
+          <a:solidFill>
+            <a:srgbClr val="C5A070"/>
+          </a:solidFill>
+          <a:ln>
+            <a:noFill/>
+          </a:ln>
+        </p:spPr>
+        <p:style>
+          <a:lnRef idx="1">
+            <a:schemeClr val="accent1"/>
+          </a:lnRef>
+          <a:fillRef idx="3">
+            <a:schemeClr val="accent1"/>
+          </a:fillRef>
+          <a:effectRef idx="2">
+            <a:schemeClr val="accent1"/>
+          </a:effectRef>
+          <a:fontRef idx="minor">
+            <a:schemeClr val="lt1"/>
+          </a:fontRef>
+        </p:style>
+        <p:txBody>
+          <a:bodyPr rtlCol="0" anchor="ctr"/>
+          <a:lstStyle/>
+          <a:p>
+            <a:pPr algn="ctr"/>
+            <a:endParaRPr/>
+          </a:p>
+        </p:txBody>
+      </p:sp>
+      <p:sp>
+        <p:nvSpPr>
+          <p:cNvPr id="33" name="TextBox 32"/>
+          <p:cNvSpPr txBox="1"/>
+          <p:nvPr/>
+        </p:nvSpPr>
+        <p:spPr>
+          <a:xfrm>
+            <a:off x="6510528" y="2057360"/>
+            <a:ext cx="4900000" cy="260000"/>
+          </a:xfrm>
+          <a:prstGeom prst="rect">
+            <a:avLst/>
+          </a:prstGeom>
+          <a:noFill/>
+        </p:spPr>
+        <p:txBody>
+          <a:bodyPr wrap="none">
+            <a:spAutoFit/>
+          </a:bodyPr>
+          <a:lstStyle/>
+          <a:p>
+            <a:r>
+              <a:rPr sz="1200" b="1" i="0">
+                <a:solidFill>
+                  <a:srgbClr val="C5A070"/>
+                </a:solidFill>
+                <a:latin typeface="Calibri"/>
+              </a:rPr>
+              <a:t>HALLHUB ADVANTAGE</a:t>
+            </a:r>
+          </a:p>
+        </p:txBody>
+      </p:sp>
+      <p:sp>
+        <p:nvSpPr>
+          <p:cNvPr id="34" name="TextBox 33"/>
+          <p:cNvSpPr txBox="1"/>
+          <p:nvPr/>
+        </p:nvSpPr>
+        <p:spPr>
+          <a:xfrm>
+            <a:off x="6510528" y="2337360"/>
+            <a:ext cx="4900000" cy="400000"/>
+          </a:xfrm>
+          <a:prstGeom prst="rect">
+            <a:avLst/>
+          </a:prstGeom>
+          <a:noFill/>
+        </p:spPr>
+        <p:txBody>
+          <a:bodyPr wrap="none">
+            <a:spAutoFit/>
+          </a:bodyPr>
+          <a:lstStyle/>
+          <a:p>
+            <a:r>
+              <a:rPr sz="2200" b="1" i="0">
+                <a:solidFill>
+                  <a:srgbClr val="4A2040"/>
+                </a:solidFill>
+                <a:latin typeface="Georgia"/>
+              </a:rPr>
+              <a:t>A Shared Two-Sided Ecosystem</a:t>
+            </a:r>
+          </a:p>
+        </p:txBody>
+      </p:sp>
+      <p:sp>
+        <p:nvSpPr>
+          <p:cNvPr id="35" name="TextBox 34"/>
+          <p:cNvSpPr txBox="1"/>
+          <p:nvPr/>
+        </p:nvSpPr>
+        <p:spPr>
+          <a:xfrm>
+            <a:off x="6510528" y="2837360"/>
+            <a:ext cx="4900000" cy="2200000"/>
+          </a:xfrm>
+          <a:prstGeom prst="rect">
+            <a:avLst/>
+          </a:prstGeom>
+          <a:noFill/>
+        </p:spPr>
+        <p:txBody>
+          <a:bodyPr wrap="none">
+            <a:spAutoFit/>
+          </a:bodyPr>
+          <a:lstStyle/>
+          <a:p>
+            <a:pPr>
+              <a:spcAft>
+                <a:spcPts val="500"/>
+              </a:spcAft>
+            </a:pPr>
+            <a:r>
+              <a:rPr sz="1200" b="0" i="0">
+                <a:solidFill>
+                  <a:srgbClr val="2A1D33"/>
+                </a:solidFill>
+                <a:latin typeface="Calibri"/>
+              </a:rPr>
+              <a:t>•  Multi-Venue Marketplace: Browse and compare multiple approved hotels in one place</a:t>
+            </a:r>
+          </a:p>
+          <a:p>
+            <a:pPr>
+              <a:spcAft>
+                <a:spcPts val="500"/>
+              </a:spcAft>
+            </a:pPr>
+            <a:r>
+              <a:rPr sz="1200" b="0" i="0">
+                <a:solidFill>
+                  <a:srgbClr val="2A1D33"/>
+                </a:solidFill>
+                <a:latin typeface="Calibri"/>
+              </a:rPr>
+              <a:t>•  Full Venue Management: Hotel owners get comprehensive operational software</a:t>
+            </a:r>
+          </a:p>
+          <a:p>
+            <a:pPr>
+              <a:spcAft>
+                <a:spcPts val="500"/>
+              </a:spcAft>
+            </a:pPr>
+            <a:r>
+              <a:rPr sz="1200" b="0" i="0">
+                <a:solidFill>
+                  <a:srgbClr val="2A1D33"/>
+                </a:solidFill>
+                <a:latin typeface="Calibri"/>
+              </a:rPr>
+              <a:t>•  Admin Trust Verification: Every hotel and hall is vetted before appearing publicly</a:t>
+            </a:r>
+          </a:p>
+          <a:p>
+            <a:pPr>
+              <a:spcAft>
+                <a:spcPts val="500"/>
+              </a:spcAft>
+            </a:pPr>
+            <a:r>
+              <a:rPr sz="1200" b="0" i="0">
+                <a:solidFill>
+                  <a:srgbClr val="2A1D33"/>
+                </a:solidFill>
+                <a:latin typeface="Calibri"/>
+              </a:rPr>
+              <a:t>•  Standardized Booking: Consistent request, scheduling, and confirmation flow</a:t>
+            </a:r>
+          </a:p>
+          <a:p>
+            <a:pPr>
+              <a:spcAft>
+                <a:spcPts val="500"/>
+              </a:spcAft>
+            </a:pPr>
+            <a:r>
+              <a:rPr sz="1200" b="0" i="0">
+                <a:solidFill>
+                  <a:srgbClr val="2A1D33"/>
+                </a:solidFill>
+                <a:latin typeface="Calibri"/>
+              </a:rPr>
+              <a:t>•  Level Playing Field: Quality halls gain visibility regardless of hotel marketing budget</a:t>
+            </a:r>
+          </a:p>
+        </p:txBody>
+      </p:sp>
+      <p:sp>
+        <p:nvSpPr>
+          <p:cNvPr id="23" name="Rounded Rectangle 22"/>
+          <p:cNvSpPr/>
+          <p:nvPr/>
+        </p:nvSpPr>
+        <p:spPr>
+          <a:xfrm>
+            <a:off x="457200" y="5400000"/>
+            <a:ext cx="11292840" cy="750000"/>
+          </a:xfrm>
+          <a:prstGeom prst="roundRect">
+            <a:avLst>
+              <a:gd name="adj" fmla="val 8000"/>
+            </a:avLst>
+          </a:prstGeom>
+          <a:solidFill>
+            <a:srgbClr val="4A2040"/>
+          </a:solidFill>
+          <a:ln>
+            <a:noFill/>
+          </a:ln>
+        </p:spPr>
+        <p:style>
+          <a:lnRef idx="1">
+            <a:schemeClr val="accent1"/>
+          </a:lnRef>
+          <a:fillRef idx="3">
+            <a:schemeClr val="accent1"/>
+          </a:fillRef>
+          <a:effectRef idx="2">
+            <a:schemeClr val="accent1"/>
+          </a:effectRef>
+          <a:fontRef idx="minor">
+            <a:schemeClr val="lt1"/>
+          </a:fontRef>
+        </p:style>
+        <p:txBody>
+          <a:bodyPr rtlCol="0" anchor="ctr"/>
+          <a:lstStyle/>
+          <a:p>
+            <a:pPr algn="ctr"/>
+            <a:endParaRPr/>
+          </a:p>
+        </p:txBody>
+      </p:sp>
+      <p:sp>
+        <p:nvSpPr>
+          <p:cNvPr id="36" name="TextBox 35"/>
+          <p:cNvSpPr txBox="1"/>
+          <p:nvPr/>
+        </p:nvSpPr>
+        <p:spPr>
+          <a:xfrm>
+            <a:off x="457200" y="5500000"/>
+            <a:ext cx="11292840" cy="550000"/>
+          </a:xfrm>
+          <a:prstGeom prst="rect">
+            <a:avLst/>
+          </a:prstGeom>
+          <a:noFill/>
+        </p:spPr>
+        <p:txBody>
+          <a:bodyPr wrap="none">
+            <a:spAutoFit/>
+          </a:bodyPr>
+          <a:lstStyle/>
+          <a:p>
+            <a:pPr algn="ctr">
+              <a:spcAft>
+                <a:spcPts val="200"/>
+              </a:spcAft>
+            </a:pPr>
+            <a:r>
+              <a:rPr sz="1100" b="1" i="0">
+                <a:solidFill>
+                  <a:srgbClr val="C5A070"/>
+                </a:solidFill>
+                <a:latin typeface="Calibri"/>
+              </a:rPr>
+              <a:t>MARKET POSITIONING</a:t>
+            </a:r>
+          </a:p>
+          <a:p>
+            <a:pPr algn="ctr"/>
+            <a:r>
+              <a:rPr sz="1400" b="1" i="0">
+                <a:solidFill>
+                  <a:srgbClr val="FFFFFF"/>
+                </a:solidFill>
+                <a:latin typeface="Georgia"/>
+              </a:rPr>
+              <a:t>“Individual Hotel System → Focuses on one hotel.   HallHub → Connects multiple venues with customers through one platform.”</a:t>
+            </a:r>
+          </a:p>
+        </p:txBody>
+      </p:sp>
+    </p:spTree>
+  </p:cSld>
+  <p:clrMapOvr>
+    <a:masterClrMapping/>
+  </p:clrMapOvr>
+</p:sld>
+</file>
+
+<file path=ppt/slides/slide12.xml><?xml version="1.0" encoding="utf-8"?>
+<p:sld xmlns:a="http://schemas.openxmlformats.org/drawingml/2006/main" xmlns:p="http://schemas.openxmlformats.org/presentationml/2006/main" xmlns:r="http://schemas.openxmlformats.org/officeDocument/2006/relationships">
+  <p:cSld>
+    <p:spTree>
+      <p:nvGrpSpPr>
+        <p:cNvPr id="1" name=""/>
+        <p:cNvGrpSpPr/>
+        <p:nvPr/>
+      </p:nvGrpSpPr>
+      <p:grpSpPr/>
+      <p:sp>
+        <p:nvSpPr>
+          <p:cNvPr id="2" name="Rectangle 1"/>
+          <p:cNvSpPr/>
+          <p:nvPr/>
+        </p:nvSpPr>
+        <p:spPr>
+          <a:xfrm>
+            <a:off x="-15240" y="16439"/>
+            <a:ext cx="12191999" cy="6858000"/>
+          </a:xfrm>
+          <a:prstGeom prst="rect">
+            <a:avLst/>
+          </a:prstGeom>
+          <a:solidFill>
+            <a:srgbClr val="FAF7F9"/>
+          </a:solidFill>
+          <a:ln>
+            <a:noFill/>
+          </a:ln>
+        </p:spPr>
+        <p:style>
+          <a:lnRef idx="1">
+            <a:schemeClr val="accent1"/>
+          </a:lnRef>
+          <a:fillRef idx="3">
+            <a:schemeClr val="accent1"/>
+          </a:fillRef>
+          <a:effectRef idx="2">
+            <a:schemeClr val="accent1"/>
+          </a:effectRef>
+          <a:fontRef idx="minor">
+            <a:schemeClr val="lt1"/>
+          </a:fontRef>
+        </p:style>
+        <p:txBody>
+          <a:bodyPr rtlCol="0" anchor="ctr"/>
+          <a:lstStyle/>
+          <a:p>
+            <a:pPr algn="ctr"/>
+            <a:endParaRPr dirty="0"/>
+          </a:p>
+        </p:txBody>
+      </p:sp>
+      <p:sp>
+        <p:nvSpPr>
+          <p:cNvPr id="3" name="Rounded Rectangle 2"/>
+          <p:cNvSpPr/>
+          <p:nvPr/>
+        </p:nvSpPr>
+        <p:spPr>
+          <a:xfrm>
+            <a:off x="365760" y="256032"/>
+            <a:ext cx="11430000" cy="566928"/>
+          </a:xfrm>
+          <a:prstGeom prst="roundRect">
+            <a:avLst>
+              <a:gd name="adj" fmla="val 50000"/>
+            </a:avLst>
+          </a:prstGeom>
+          <a:solidFill>
+            <a:srgbClr val="FFFFFF"/>
+          </a:solidFill>
+          <a:ln w="12700">
+            <a:solidFill>
+              <a:srgbClr val="D4B37A"/>
+            </a:solidFill>
+          </a:ln>
+        </p:spPr>
+        <p:style>
+          <a:lnRef idx="1">
+            <a:schemeClr val="accent1"/>
+          </a:lnRef>
+          <a:fillRef idx="3">
+            <a:schemeClr val="accent1"/>
+          </a:fillRef>
+          <a:effectRef idx="2">
+            <a:schemeClr val="accent1"/>
+          </a:effectRef>
+          <a:fontRef idx="minor">
+            <a:schemeClr val="lt1"/>
+          </a:fontRef>
+        </p:style>
+        <p:txBody>
+          <a:bodyPr rtlCol="0" anchor="ctr"/>
+          <a:lstStyle/>
+          <a:p>
+            <a:pPr algn="ctr"/>
+            <a:endParaRPr/>
+          </a:p>
+        </p:txBody>
+      </p:sp>
+      <p:sp>
+        <p:nvSpPr>
+          <p:cNvPr id="4" name="Rounded Rectangle 3"/>
+          <p:cNvSpPr/>
+          <p:nvPr/>
+        </p:nvSpPr>
+        <p:spPr>
+          <a:xfrm>
+            <a:off x="457200" y="329184"/>
+            <a:ext cx="1325880" cy="420624"/>
+          </a:xfrm>
+          <a:prstGeom prst="roundRect">
+            <a:avLst>
+              <a:gd name="adj" fmla="val 50000"/>
+            </a:avLst>
+          </a:prstGeom>
+          <a:solidFill>
+            <a:srgbClr val="4A2040"/>
+          </a:solidFill>
+          <a:ln w="12700">
+            <a:solidFill>
+              <a:srgbClr val="D4B37A"/>
+            </a:solidFill>
+          </a:ln>
+        </p:spPr>
+        <p:style>
+          <a:lnRef idx="1">
+            <a:schemeClr val="accent1"/>
+          </a:lnRef>
+          <a:fillRef idx="3">
+            <a:schemeClr val="accent1"/>
+          </a:fillRef>
+          <a:effectRef idx="2">
+            <a:schemeClr val="accent1"/>
+          </a:effectRef>
+          <a:fontRef idx="minor">
+            <a:schemeClr val="lt1"/>
+          </a:fontRef>
+        </p:style>
+        <p:txBody>
+          <a:bodyPr rtlCol="0" anchor="ctr"/>
+          <a:lstStyle/>
+          <a:p>
+            <a:pPr algn="ctr"/>
+            <a:endParaRPr/>
+          </a:p>
+        </p:txBody>
+      </p:sp>
+      <p:sp>
+        <p:nvSpPr>
+          <p:cNvPr id="5" name="TextBox 4"/>
+          <p:cNvSpPr txBox="1"/>
+          <p:nvPr/>
+        </p:nvSpPr>
+        <p:spPr>
+          <a:xfrm>
+            <a:off x="457200" y="384048"/>
+            <a:ext cx="1325880" cy="310896"/>
+          </a:xfrm>
+          <a:prstGeom prst="rect">
+            <a:avLst/>
+          </a:prstGeom>
+          <a:noFill/>
+        </p:spPr>
+        <p:txBody>
+          <a:bodyPr wrap="square">
+            <a:spAutoFit/>
+          </a:bodyPr>
+          <a:lstStyle/>
+          <a:p>
+            <a:pPr algn="ctr"/>
+            <a:r>
+              <a:rPr sz="1300" b="0">
+                <a:solidFill>
+                  <a:srgbClr val="FFFFFF"/>
+                </a:solidFill>
+                <a:latin typeface="Georgia"/>
+              </a:rPr>
+              <a:t>HallHub</a:t>
+            </a:r>
+          </a:p>
+        </p:txBody>
+      </p:sp>
+      <p:sp>
+        <p:nvSpPr>
+          <p:cNvPr id="6" name="TextBox 5"/>
+          <p:cNvSpPr txBox="1"/>
+          <p:nvPr/>
+        </p:nvSpPr>
+        <p:spPr>
+          <a:xfrm>
+            <a:off x="1965960" y="365760"/>
+            <a:ext cx="1000000" cy="310896"/>
+          </a:xfrm>
+          <a:prstGeom prst="rect">
+            <a:avLst/>
+          </a:prstGeom>
+          <a:noFill/>
+        </p:spPr>
+        <p:txBody>
+          <a:bodyPr wrap="none" lIns="0" tIns="0" rIns="0" bIns="0">
+            <a:spAutoFit/>
+          </a:bodyPr>
+          <a:lstStyle/>
+          <a:p>
+            <a:r>
+              <a:rPr sz="1100" b="1">
+                <a:solidFill>
+                  <a:srgbClr val="4A2040"/>
+                </a:solidFill>
+                <a:latin typeface="Calibri"/>
+              </a:rPr>
+              <a:t>HallHub</a:t>
+            </a:r>
+          </a:p>
+        </p:txBody>
+      </p:sp>
+      <p:sp>
+        <p:nvSpPr>
+          <p:cNvPr id="7" name="TextBox 6"/>
+          <p:cNvSpPr txBox="1"/>
+          <p:nvPr/>
+        </p:nvSpPr>
+        <p:spPr>
+          <a:xfrm>
+            <a:off x="3000000" y="365760"/>
+            <a:ext cx="1000000" cy="310896"/>
+          </a:xfrm>
+          <a:prstGeom prst="rect">
+            <a:avLst/>
+          </a:prstGeom>
+          <a:noFill/>
+        </p:spPr>
+        <p:txBody>
+          <a:bodyPr wrap="none" lIns="0" tIns="0" rIns="0" bIns="0">
+            <a:spAutoFit/>
+          </a:bodyPr>
+          <a:lstStyle/>
+          <a:p>
+            <a:r>
+              <a:rPr sz="1100" b="1">
+                <a:solidFill>
+                  <a:srgbClr val="4A2040"/>
+                </a:solidFill>
+                <a:latin typeface="Calibri"/>
+              </a:rPr>
+              <a:t>Problem</a:t>
+            </a:r>
+          </a:p>
+        </p:txBody>
+      </p:sp>
+      <p:sp>
+        <p:nvSpPr>
+          <p:cNvPr id="8" name="TextBox 7"/>
+          <p:cNvSpPr txBox="1"/>
+          <p:nvPr/>
+        </p:nvSpPr>
+        <p:spPr>
+          <a:xfrm>
+            <a:off x="4050000" y="365760"/>
+            <a:ext cx="1000000" cy="310896"/>
+          </a:xfrm>
+          <a:prstGeom prst="rect">
+            <a:avLst/>
+          </a:prstGeom>
+          <a:noFill/>
+        </p:spPr>
+        <p:txBody>
+          <a:bodyPr wrap="none" lIns="0" tIns="0" rIns="0" bIns="0">
+            <a:spAutoFit/>
+          </a:bodyPr>
+          <a:lstStyle/>
+          <a:p>
+            <a:r>
+              <a:rPr sz="1100" b="1">
+                <a:solidFill>
+                  <a:srgbClr val="4A2040"/>
+                </a:solidFill>
+                <a:latin typeface="Calibri"/>
+              </a:rPr>
+              <a:t>Values</a:t>
+            </a:r>
+          </a:p>
+        </p:txBody>
+      </p:sp>
+      <p:sp>
+        <p:nvSpPr>
+          <p:cNvPr id="9" name="TextBox 8"/>
+          <p:cNvSpPr txBox="1"/>
+          <p:nvPr/>
+        </p:nvSpPr>
+        <p:spPr>
+          <a:xfrm>
+            <a:off x="5000000" y="365760"/>
+            <a:ext cx="1000000" cy="310896"/>
+          </a:xfrm>
+          <a:prstGeom prst="rect">
+            <a:avLst/>
+          </a:prstGeom>
+          <a:noFill/>
+        </p:spPr>
+        <p:txBody>
+          <a:bodyPr wrap="none" lIns="0" tIns="0" rIns="0" bIns="0">
+            <a:spAutoFit/>
+          </a:bodyPr>
+          <a:lstStyle/>
+          <a:p>
+            <a:r>
+              <a:rPr sz="1100" b="1">
+                <a:solidFill>
+                  <a:srgbClr val="4A2040"/>
+                </a:solidFill>
+                <a:latin typeface="Calibri"/>
+              </a:rPr>
+              <a:t>Market</a:t>
+            </a:r>
+          </a:p>
+        </p:txBody>
+      </p:sp>
+      <p:sp>
+        <p:nvSpPr>
+          <p:cNvPr id="10" name="TextBox 9"/>
+          <p:cNvSpPr txBox="1"/>
+          <p:nvPr/>
+        </p:nvSpPr>
+        <p:spPr>
+          <a:xfrm>
+            <a:off x="5950000" y="365760"/>
+            <a:ext cx="1000000" cy="310896"/>
+          </a:xfrm>
+          <a:prstGeom prst="rect">
+            <a:avLst/>
+          </a:prstGeom>
+          <a:noFill/>
+        </p:spPr>
+        <p:txBody>
+          <a:bodyPr wrap="none" lIns="0" tIns="0" rIns="0" bIns="0">
+            <a:spAutoFit/>
+          </a:bodyPr>
+          <a:lstStyle/>
+          <a:p>
+            <a:r>
+              <a:rPr sz="1100" b="1">
+                <a:solidFill>
+                  <a:srgbClr val="4A2040"/>
+                </a:solidFill>
+                <a:latin typeface="Calibri"/>
+              </a:rPr>
+              <a:t>Revenue</a:t>
+            </a:r>
+          </a:p>
+        </p:txBody>
+      </p:sp>
+      <p:sp>
+        <p:nvSpPr>
+          <p:cNvPr id="11" name="TextBox 10"/>
+          <p:cNvSpPr txBox="1"/>
+          <p:nvPr/>
+        </p:nvSpPr>
+        <p:spPr>
+          <a:xfrm>
+            <a:off x="7000000" y="365760"/>
+            <a:ext cx="1000000" cy="310896"/>
+          </a:xfrm>
+          <a:prstGeom prst="rect">
+            <a:avLst/>
+          </a:prstGeom>
+          <a:noFill/>
+        </p:spPr>
+        <p:txBody>
+          <a:bodyPr wrap="none" lIns="0" tIns="0" rIns="0" bIns="0">
+            <a:spAutoFit/>
+          </a:bodyPr>
+          <a:lstStyle/>
+          <a:p>
+            <a:r>
+              <a:rPr sz="1100" b="1">
+                <a:solidFill>
+                  <a:srgbClr val="4A2040"/>
+                </a:solidFill>
+                <a:latin typeface="Calibri"/>
+              </a:rPr>
+              <a:t>Advantage</a:t>
+            </a:r>
+          </a:p>
+        </p:txBody>
+      </p:sp>
+      <p:sp>
+        <p:nvSpPr>
+          <p:cNvPr id="12" name="TextBox 11"/>
+          <p:cNvSpPr txBox="1"/>
+          <p:nvPr/>
+        </p:nvSpPr>
+        <p:spPr>
+          <a:xfrm>
+            <a:off x="8150000" y="365760"/>
+            <a:ext cx="1000000" cy="310896"/>
+          </a:xfrm>
+          <a:prstGeom prst="rect">
+            <a:avLst/>
+          </a:prstGeom>
+          <a:noFill/>
+        </p:spPr>
+        <p:txBody>
+          <a:bodyPr wrap="none" lIns="0" tIns="0" rIns="0" bIns="0">
+            <a:spAutoFit/>
+          </a:bodyPr>
+          <a:lstStyle/>
+          <a:p>
+            <a:r>
+              <a:rPr sz="1100" b="1">
+                <a:solidFill>
+                  <a:srgbClr val="7A3A6A"/>
+                </a:solidFill>
+                <a:latin typeface="Calibri"/>
+              </a:rPr>
+              <a:t>Product</a:t>
+            </a:r>
+          </a:p>
+        </p:txBody>
+      </p:sp>
+      <p:sp>
+        <p:nvSpPr>
+          <p:cNvPr id="13" name="Rectangle 12"/>
+          <p:cNvSpPr/>
+          <p:nvPr/>
+        </p:nvSpPr>
+        <p:spPr>
+          <a:xfrm>
+            <a:off x="8190000" y="676656"/>
+            <a:ext cx="520000" cy="16459"/>
+          </a:xfrm>
+          <a:prstGeom prst="rect">
+            <a:avLst/>
+          </a:prstGeom>
+          <a:solidFill>
+            <a:srgbClr val="4A2040"/>
+          </a:solidFill>
+          <a:ln>
+            <a:noFill/>
+          </a:ln>
+        </p:spPr>
+        <p:style>
+          <a:lnRef idx="1">
+            <a:schemeClr val="accent1"/>
+          </a:lnRef>
+          <a:fillRef idx="3">
+            <a:schemeClr val="accent1"/>
+          </a:fillRef>
+          <a:effectRef idx="2">
+            <a:schemeClr val="accent1"/>
+          </a:effectRef>
+          <a:fontRef idx="minor">
+            <a:schemeClr val="lt1"/>
+          </a:fontRef>
+        </p:style>
+        <p:txBody>
+          <a:bodyPr rtlCol="0" anchor="ctr"/>
+          <a:lstStyle/>
+          <a:p>
+            <a:pPr algn="ctr"/>
+          </a:p>
+        </p:txBody>
+      </p:sp>
+      <p:sp>
+        <p:nvSpPr>
+          <p:cNvPr id="14" name="TextBox 13"/>
+          <p:cNvSpPr txBox="1"/>
+          <p:nvPr/>
+        </p:nvSpPr>
+        <p:spPr>
+          <a:xfrm>
+            <a:off x="9250000" y="365760"/>
+            <a:ext cx="1000000" cy="310896"/>
+          </a:xfrm>
+          <a:prstGeom prst="rect">
+            <a:avLst/>
+          </a:prstGeom>
+          <a:noFill/>
+        </p:spPr>
+        <p:txBody>
+          <a:bodyPr wrap="none" lIns="0" tIns="0" rIns="0" bIns="0">
+            <a:spAutoFit/>
+          </a:bodyPr>
+          <a:lstStyle/>
+          <a:p>
+            <a:r>
+              <a:rPr sz="1100" b="1">
+                <a:solidFill>
+                  <a:srgbClr val="4A2040"/>
+                </a:solidFill>
+                <a:latin typeface="Calibri"/>
+              </a:rPr>
+              <a:t>Vision</a:t>
+            </a:r>
+          </a:p>
+        </p:txBody>
+      </p:sp>
+      <p:sp>
+        <p:nvSpPr>
+          <p:cNvPr id="14" name="Rectangle 13"/>
+          <p:cNvSpPr/>
+          <p:nvPr/>
+        </p:nvSpPr>
+        <p:spPr>
+          <a:xfrm>
+            <a:off x="457200" y="1042416"/>
+            <a:ext cx="201168" cy="13716"/>
+          </a:xfrm>
+          <a:prstGeom prst="rect">
+            <a:avLst/>
+          </a:prstGeom>
+          <a:solidFill>
+            <a:srgbClr val="C5A070"/>
+          </a:solidFill>
+          <a:ln>
+            <a:noFill/>
+          </a:ln>
+        </p:spPr>
+        <p:style>
+          <a:lnRef idx="1">
+            <a:schemeClr val="accent1"/>
+          </a:lnRef>
+          <a:fillRef idx="3">
+            <a:schemeClr val="accent1"/>
+          </a:fillRef>
+          <a:effectRef idx="2">
+            <a:schemeClr val="accent1"/>
+          </a:effectRef>
+          <a:fontRef idx="minor">
+            <a:schemeClr val="lt1"/>
+          </a:fontRef>
+        </p:style>
+        <p:txBody>
+          <a:bodyPr rtlCol="0" anchor="ctr"/>
+          <a:lstStyle/>
+          <a:p>
+            <a:pPr algn="ctr"/>
+            <a:endParaRPr/>
+          </a:p>
+        </p:txBody>
+      </p:sp>
+      <p:sp>
+        <p:nvSpPr>
+          <p:cNvPr id="15" name="TextBox 14"/>
+          <p:cNvSpPr txBox="1"/>
+          <p:nvPr/>
+        </p:nvSpPr>
+        <p:spPr>
+          <a:xfrm>
+            <a:off x="731520" y="960120"/>
+            <a:ext cx="9144000" cy="256032"/>
+          </a:xfrm>
+          <a:prstGeom prst="rect">
+            <a:avLst/>
+          </a:prstGeom>
+          <a:noFill/>
+        </p:spPr>
+        <p:txBody>
+          <a:bodyPr wrap="none" lIns="0" tIns="0" rIns="0" bIns="0">
+            <a:spAutoFit/>
+          </a:bodyPr>
+          <a:lstStyle/>
+          <a:p>
+            <a:r>
+              <a:rPr sz="1200" b="1" i="0">
+                <a:solidFill>
+                  <a:srgbClr val="C5A070"/>
+                </a:solidFill>
+                <a:latin typeface="Calibri"/>
+              </a:rPr>
+              <a:t>07  —  PRODUCT OVERVIEW</a:t>
+            </a:r>
+          </a:p>
+        </p:txBody>
+      </p:sp>
+      <p:sp>
+        <p:nvSpPr>
+          <p:cNvPr id="16" name="TextBox 15"/>
+          <p:cNvSpPr txBox="1"/>
+          <p:nvPr/>
+        </p:nvSpPr>
+        <p:spPr>
+          <a:xfrm>
+            <a:off x="457200" y="1207008"/>
+            <a:ext cx="10972800" cy="420000"/>
+          </a:xfrm>
+          <a:prstGeom prst="rect">
+            <a:avLst/>
+          </a:prstGeom>
+          <a:noFill/>
+        </p:spPr>
+        <p:txBody>
+          <a:bodyPr wrap="none" lIns="0" tIns="0" rIns="0" bIns="0">
+            <a:spAutoFit/>
+          </a:bodyPr>
+          <a:lstStyle/>
+          <a:p>
+            <a:r>
+              <a:rPr sz="2500" b="1" i="0">
+                <a:solidFill>
+                  <a:srgbClr val="4A2040"/>
+                </a:solidFill>
+                <a:latin typeface="Georgia"/>
+              </a:rPr>
+              <a:t>How HallHub works: from venue discovery to confirmation</a:t>
+            </a:r>
+          </a:p>
+        </p:txBody>
+      </p:sp>
+      <p:sp>
+        <p:nvSpPr>
+          <p:cNvPr id="28" name="TextBox 27"/>
+          <p:cNvSpPr txBox="1"/>
+          <p:nvPr/>
+        </p:nvSpPr>
+        <p:spPr>
+          <a:xfrm>
+            <a:off x="640080" y="6510528"/>
+            <a:ext cx="2743200" cy="256032"/>
+          </a:xfrm>
+          <a:prstGeom prst="rect">
+            <a:avLst/>
+          </a:prstGeom>
+          <a:noFill/>
+        </p:spPr>
+        <p:txBody>
+          <a:bodyPr wrap="square">
+            <a:spAutoFit/>
+          </a:bodyPr>
+          <a:lstStyle/>
+          <a:p>
+            <a:pPr algn="l"/>
+            <a:r>
+              <a:rPr sz="1300" b="1">
+                <a:solidFill>
+                  <a:srgbClr val="4A2040"/>
+                </a:solidFill>
+                <a:latin typeface="Georgia"/>
+              </a:rPr>
+              <a:t>HallHub</a:t>
+            </a:r>
+          </a:p>
+        </p:txBody>
+      </p:sp>
+      <p:sp>
+        <p:nvSpPr>
+          <p:cNvPr id="29" name="TextBox 28"/>
+          <p:cNvSpPr txBox="1"/>
+          <p:nvPr/>
+        </p:nvSpPr>
+        <p:spPr>
+          <a:xfrm>
+            <a:off x="10241280" y="6510528"/>
+            <a:ext cx="1280160" cy="256032"/>
+          </a:xfrm>
+          <a:prstGeom prst="rect">
+            <a:avLst/>
+          </a:prstGeom>
+          <a:noFill/>
+        </p:spPr>
+        <p:txBody>
+          <a:bodyPr wrap="none" lIns="0" tIns="0" rIns="0" bIns="0">
+            <a:spAutoFit/>
+          </a:bodyPr>
+          <a:lstStyle/>
+          <a:p>
+            <a:r>
+              <a:rPr sz="1200" b="0" i="0">
+                <a:solidFill>
+                  <a:srgbClr val="6B6570"/>
+                </a:solidFill>
+                <a:latin typeface="Calibri"/>
+              </a:rPr>
+              <a:t>07 / 08</a:t>
+            </a:r>
+          </a:p>
+        </p:txBody>
+      </p:sp>
+      <p:sp>
+        <p:nvSpPr>
+          <p:cNvPr id="17" name="Rounded Rectangle 16"/>
+          <p:cNvSpPr/>
+          <p:nvPr/>
+        </p:nvSpPr>
+        <p:spPr>
+          <a:xfrm>
+            <a:off x="457200" y="1737360"/>
+            <a:ext cx="4900000" cy="4434840"/>
+          </a:xfrm>
+          <a:prstGeom prst="roundRect">
+            <a:avLst>
+              <a:gd name="adj" fmla="val 8000"/>
+            </a:avLst>
+          </a:prstGeom>
+          <a:solidFill>
+            <a:srgbClr val="FFFDFB"/>
+          </a:solidFill>
+          <a:ln w="12700">
+            <a:solidFill>
+              <a:srgbClr val="EAD9C2"/>
+            </a:solidFill>
+          </a:ln>
+        </p:spPr>
+        <p:style>
+          <a:lnRef idx="1">
+            <a:schemeClr val="accent1"/>
+          </a:lnRef>
+          <a:fillRef idx="3">
+            <a:schemeClr val="accent1"/>
+          </a:fillRef>
+          <a:effectRef idx="2">
+            <a:schemeClr val="accent1"/>
+          </a:effectRef>
+          <a:fontRef idx="minor">
+            <a:schemeClr val="lt1"/>
+          </a:fontRef>
+        </p:style>
+        <p:txBody>
+          <a:bodyPr rtlCol="0" anchor="ctr"/>
+          <a:lstStyle/>
+          <a:p>
+            <a:pPr algn="ctr"/>
+            <a:endParaRPr dirty="0"/>
+          </a:p>
+        </p:txBody>
+      </p:sp>
+      <p:sp>
+        <p:nvSpPr>
+          <p:cNvPr id="18" name="Rounded Rectangle 17"/>
+          <p:cNvSpPr/>
+          <p:nvPr/>
+        </p:nvSpPr>
+        <p:spPr>
+          <a:xfrm>
+            <a:off x="749808" y="1917360"/>
+            <a:ext cx="502920" cy="54864"/>
+          </a:xfrm>
+          <a:prstGeom prst="roundRect">
+            <a:avLst>
+              <a:gd name="adj" fmla="val 50000"/>
+            </a:avLst>
+          </a:prstGeom>
+          <a:solidFill>
+            <a:srgbClr val="C5A070"/>
+          </a:solidFill>
+          <a:ln>
+            <a:noFill/>
+          </a:ln>
+        </p:spPr>
+        <p:style>
+          <a:lnRef idx="1">
+            <a:schemeClr val="accent1"/>
+          </a:lnRef>
+          <a:fillRef idx="3">
+            <a:schemeClr val="accent1"/>
+          </a:fillRef>
+          <a:effectRef idx="2">
+            <a:schemeClr val="accent1"/>
+          </a:effectRef>
+          <a:fontRef idx="minor">
+            <a:schemeClr val="lt1"/>
+          </a:fontRef>
+        </p:style>
+        <p:txBody>
+          <a:bodyPr rtlCol="0" anchor="ctr"/>
+          <a:lstStyle/>
+          <a:p>
+            <a:pPr algn="ctr"/>
+            <a:endParaRPr/>
+          </a:p>
+        </p:txBody>
+      </p:sp>
+      <p:sp>
+        <p:nvSpPr>
+          <p:cNvPr id="30" name="TextBox 29"/>
+          <p:cNvSpPr txBox="1"/>
+          <p:nvPr/>
+        </p:nvSpPr>
+        <p:spPr>
+          <a:xfrm>
+            <a:off x="749808" y="2057360"/>
+            <a:ext cx="4400000" cy="260000"/>
+          </a:xfrm>
+          <a:prstGeom prst="rect">
+            <a:avLst/>
+          </a:prstGeom>
+          <a:noFill/>
+        </p:spPr>
+        <p:txBody>
+          <a:bodyPr wrap="none">
+            <a:spAutoFit/>
+          </a:bodyPr>
+          <a:lstStyle/>
+          <a:p>
+            <a:r>
+              <a:rPr sz="1200" b="1" i="0">
+                <a:solidFill>
+                  <a:srgbClr val="C5A070"/>
+                </a:solidFill>
+                <a:latin typeface="Calibri"/>
+              </a:rPr>
+              <a:t>USER JOURNEY &amp; WORKFLOW</a:t>
+            </a:r>
+          </a:p>
+        </p:txBody>
+      </p:sp>
+      <p:sp>
+        <p:nvSpPr>
+          <p:cNvPr id="31" name="TextBox 30"/>
+          <p:cNvSpPr txBox="1"/>
+          <p:nvPr/>
+        </p:nvSpPr>
+        <p:spPr>
+          <a:xfrm>
+            <a:off x="749808" y="2337360"/>
+            <a:ext cx="4400000" cy="400000"/>
+          </a:xfrm>
+          <a:prstGeom prst="rect">
+            <a:avLst/>
+          </a:prstGeom>
+          <a:noFill/>
+        </p:spPr>
+        <p:txBody>
+          <a:bodyPr wrap="none">
+            <a:spAutoFit/>
+          </a:bodyPr>
+          <a:lstStyle/>
+          <a:p>
+            <a:r>
+              <a:rPr sz="2000" b="1" i="0">
+                <a:solidFill>
+                  <a:srgbClr val="4A2040"/>
+                </a:solidFill>
+                <a:latin typeface="Georgia"/>
+              </a:rPr>
+              <a:t>Step-by-Step Booking Lifecycle</a:t>
+            </a:r>
+          </a:p>
+        </p:txBody>
+      </p:sp>
+      <p:sp>
+        <p:nvSpPr>
+          <p:cNvPr id="32" name="TextBox 31"/>
+          <p:cNvSpPr txBox="1"/>
+          <p:nvPr/>
+        </p:nvSpPr>
+        <p:spPr>
+          <a:xfrm>
+            <a:off x="749808" y="2787360"/>
+            <a:ext cx="4400000" cy="3100000"/>
+          </a:xfrm>
+          <a:prstGeom prst="rect">
+            <a:avLst/>
+          </a:prstGeom>
+          <a:noFill/>
+        </p:spPr>
+        <p:txBody>
+          <a:bodyPr wrap="none">
+            <a:spAutoFit/>
+          </a:bodyPr>
+          <a:lstStyle/>
+          <a:p>
+            <a:pPr>
+              <a:spcAft>
+                <a:spcPts val="400"/>
+              </a:spcAft>
+            </a:pPr>
+            <a:r>
+              <a:rPr sz="1100" b="0" i="0">
+                <a:solidFill>
+                  <a:srgbClr val="2A1D33"/>
+                </a:solidFill>
+                <a:latin typeface="Calibri"/>
+              </a:rPr>
+              <a:t>1. Search &amp; Discover Venues
+    Browse verified hotels, filter by guest capacity, amenities &amp; price.</a:t>
+            </a:r>
+          </a:p>
+          <a:p>
+            <a:pPr>
+              <a:spcAft>
+                <a:spcPts val="400"/>
+              </a:spcAft>
+            </a:pPr>
+            <a:r>
+              <a:rPr sz="1100" b="0" i="0">
+                <a:solidFill>
+                  <a:srgbClr val="2A1D33"/>
+                </a:solidFill>
+                <a:latin typeface="Calibri"/>
+              </a:rPr>
+              <a:t>2. View Hall Details &amp; Real-Time Availability
+    Inspect photos, check event calendar availability, and venue rules.</a:t>
+            </a:r>
+          </a:p>
+          <a:p>
+            <a:pPr>
+              <a:spcAft>
+                <a:spcPts val="400"/>
+              </a:spcAft>
+            </a:pPr>
+            <a:r>
+              <a:rPr sz="1100" b="0" i="0">
+                <a:solidFill>
+                  <a:srgbClr val="2A1D33"/>
+                </a:solidFill>
+                <a:latin typeface="Calibri"/>
+              </a:rPr>
+              <a:t>3. Submit Booking Request
+    Customer submits event date, guest count, and special requirements.</a:t>
+            </a:r>
+          </a:p>
+          <a:p>
+            <a:pPr>
+              <a:spcAft>
+                <a:spcPts val="400"/>
+              </a:spcAft>
+            </a:pPr>
+            <a:r>
+              <a:rPr sz="1100" b="0" i="0">
+                <a:solidFill>
+                  <a:srgbClr val="2A1D33"/>
+                </a:solidFill>
+                <a:latin typeface="Calibri"/>
+              </a:rPr>
+              <a:t>4. Hotel Owner Reviews Request
+    Accepts or rejects the booking request with instant status update.</a:t>
+            </a:r>
+          </a:p>
+          <a:p>
+            <a:pPr>
+              <a:spcAft>
+                <a:spcPts val="400"/>
+              </a:spcAft>
+            </a:pPr>
+            <a:r>
+              <a:rPr sz="1100" b="0" i="0">
+                <a:solidFill>
+                  <a:srgbClr val="2A1D33"/>
+                </a:solidFill>
+                <a:latin typeface="Calibri"/>
+              </a:rPr>
+              <a:t>5. Schedule Inspection Visit
+    Coordinate an in-person hall meetup with time &amp; location notes.</a:t>
+            </a:r>
+          </a:p>
+          <a:p>
+            <a:pPr>
+              <a:spcAft>
+                <a:spcPts val="400"/>
+              </a:spcAft>
+            </a:pPr>
+            <a:r>
+              <a:rPr sz="1100" b="0" i="0">
+                <a:solidFill>
+                  <a:srgbClr val="2A1D33"/>
+                </a:solidFill>
+                <a:latin typeface="Calibri"/>
+              </a:rPr>
+              <a:t>6. Finalize &amp; Confirm Booking
+    Owner records deposit collected &amp; generates official PDF invoice.</a:t>
+            </a:r>
+          </a:p>
+        </p:txBody>
+      </p:sp>
+      <p:pic>
+        <p:nvPicPr>
+          <p:cNvPr id="33" name="Picture 32" descr="01-public-home.png"/>
+          <p:cNvPicPr>
+            <a:picLocks noChangeAspect="1"/>
+          </p:cNvPicPr>
+          <p:nvPr/>
+        </p:nvPicPr>
+        <p:blipFill>
+          <a:blip r:embed="rId2"/>
+          <a:stretch>
+            <a:fillRect/>
+          </a:stretch>
+        </p:blipFill>
+        <p:spPr>
+          <a:xfrm>
+            <a:off x="5600000" y="1737360"/>
+            <a:ext cx="6150000" cy="1650000"/>
+          </a:xfrm>
+          <a:prstGeom prst="rect">
+            <a:avLst/>
+          </a:prstGeom>
+        </p:spPr>
+      </p:pic>
+      <p:pic>
+        <p:nvPicPr>
+          <p:cNvPr id="34" name="Picture 33" descr="17-owner-bookings.png"/>
+          <p:cNvPicPr>
+            <a:picLocks noChangeAspect="1"/>
+          </p:cNvPicPr>
+          <p:nvPr/>
+        </p:nvPicPr>
+        <p:blipFill>
+          <a:blip r:embed="rId3"/>
+          <a:stretch>
+            <a:fillRect/>
+          </a:stretch>
+        </p:blipFill>
+        <p:spPr>
+          <a:xfrm>
+            <a:off x="5600000" y="3500000"/>
+            <a:ext cx="6150000" cy="1650000"/>
+          </a:xfrm>
+          <a:prstGeom prst="rect">
+            <a:avLst/>
+          </a:prstGeom>
+        </p:spPr>
+      </p:pic>
+      <p:sp>
+        <p:nvSpPr>
+          <p:cNvPr id="23" name="Rounded Rectangle 22"/>
+          <p:cNvSpPr/>
+          <p:nvPr/>
+        </p:nvSpPr>
+        <p:spPr>
+          <a:xfrm>
+            <a:off x="5600000" y="5270000"/>
+            <a:ext cx="6150000" cy="900000"/>
+          </a:xfrm>
+          <a:prstGeom prst="roundRect">
+            <a:avLst>
+              <a:gd name="adj" fmla="val 8000"/>
+            </a:avLst>
+          </a:prstGeom>
+          <a:solidFill>
+            <a:srgbClr val="4A2040"/>
+          </a:solidFill>
+          <a:ln>
+            <a:noFill/>
+          </a:ln>
+        </p:spPr>
+        <p:style>
+          <a:lnRef idx="1">
+            <a:schemeClr val="accent1"/>
+          </a:lnRef>
+          <a:fillRef idx="3">
+            <a:schemeClr val="accent1"/>
+          </a:fillRef>
+          <a:effectRef idx="2">
+            <a:schemeClr val="accent1"/>
+          </a:effectRef>
+          <a:fontRef idx="minor">
+            <a:schemeClr val="lt1"/>
+          </a:fontRef>
+        </p:style>
+        <p:txBody>
+          <a:bodyPr rtlCol="0" anchor="ctr"/>
+          <a:lstStyle/>
+          <a:p>
+            <a:pPr algn="ctr"/>
+            <a:endParaRPr/>
+          </a:p>
+        </p:txBody>
+      </p:sp>
+      <p:sp>
+        <p:nvSpPr>
+          <p:cNvPr id="35" name="TextBox 34"/>
+          <p:cNvSpPr txBox="1"/>
+          <p:nvPr/>
+        </p:nvSpPr>
+        <p:spPr>
+          <a:xfrm>
+            <a:off x="5750000" y="5350000"/>
+            <a:ext cx="5850000" cy="740000"/>
+          </a:xfrm>
+          <a:prstGeom prst="rect">
+            <a:avLst/>
+          </a:prstGeom>
+          <a:noFill/>
+        </p:spPr>
+        <p:txBody>
+          <a:bodyPr wrap="none">
+            <a:spAutoFit/>
+          </a:bodyPr>
+          <a:lstStyle/>
+          <a:p>
+            <a:pPr algn="ctr">
+              <a:spcAft>
+                <a:spcPts val="200"/>
+              </a:spcAft>
+            </a:pPr>
+            <a:r>
+              <a:rPr sz="1100" b="1" i="0">
+                <a:solidFill>
+                  <a:srgbClr val="C5A070"/>
+                </a:solidFill>
+                <a:latin typeface="Calibri"/>
+              </a:rPr>
+              <a:t>THREE INTEGRATED PLATFORM ROLES</a:t>
+            </a:r>
+          </a:p>
+          <a:p>
+            <a:pPr algn="ctr"/>
+            <a:r>
+              <a:rPr sz="1200" b="1" i="0">
+                <a:solidFill>
+                  <a:srgbClr val="FFFFFF"/>
+                </a:solidFill>
+                <a:latin typeface="Georgia"/>
+              </a:rPr>
+              <a:t>Customer (Browse &amp; Book)  |  Hotel Owner (Manage &amp; Confirm)  |  Admin (Vetting &amp; Oversight)</a:t>
+            </a:r>
+          </a:p>
+        </p:txBody>
+      </p:sp>
+    </p:spTree>
+  </p:cSld>
+  <p:clrMapOvr>
+    <a:masterClrMapping/>
+  </p:clrMapOvr>
+</p:sld>
+</file>
+
+<file path=ppt/slides/slide13.xml><?xml version="1.0" encoding="utf-8"?>
+<p:sld xmlns:a="http://schemas.openxmlformats.org/drawingml/2006/main" xmlns:p="http://schemas.openxmlformats.org/presentationml/2006/main" xmlns:r="http://schemas.openxmlformats.org/officeDocument/2006/relationships">
+  <p:cSld>
+    <p:spTree>
+      <p:nvGrpSpPr>
+        <p:cNvPr id="1" name=""/>
+        <p:cNvGrpSpPr/>
+        <p:nvPr/>
+      </p:nvGrpSpPr>
+      <p:grpSpPr/>
+      <p:pic>
+        <p:nvPicPr>
+          <p:cNvPr id="2" name="Picture 1" descr="_warm_bg.jpg"/>
+          <p:cNvPicPr>
+            <a:picLocks noChangeAspect="1"/>
+          </p:cNvPicPr>
+          <p:nvPr/>
+        </p:nvPicPr>
+        <p:blipFill>
+          <a:blip r:embed="rId2"/>
+          <a:stretch>
+            <a:fillRect/>
+          </a:stretch>
+        </p:blipFill>
+        <p:spPr>
+          <a:xfrm>
+            <a:off x="0" y="0"/>
+            <a:ext cx="12191999" cy="6858000"/>
+          </a:xfrm>
+          <a:prstGeom prst="rect">
+            <a:avLst/>
+          </a:prstGeom>
+        </p:spPr>
+      </p:pic>
+      <p:sp>
+        <p:nvSpPr>
+          <p:cNvPr id="3" name="Rounded Rectangle 2"/>
+          <p:cNvSpPr/>
+          <p:nvPr/>
+        </p:nvSpPr>
+        <p:spPr>
+          <a:xfrm>
+            <a:off x="365760" y="256032"/>
+            <a:ext cx="11430000" cy="566928"/>
+          </a:xfrm>
+          <a:prstGeom prst="roundRect">
+            <a:avLst>
+              <a:gd name="adj" fmla="val 50000"/>
+            </a:avLst>
+          </a:prstGeom>
+          <a:solidFill>
+            <a:srgbClr val="FFFFFF"/>
+          </a:solidFill>
+          <a:ln w="12700">
+            <a:solidFill>
+              <a:srgbClr val="D4B37A"/>
+            </a:solidFill>
+          </a:ln>
+        </p:spPr>
+        <p:style>
+          <a:lnRef idx="1">
+            <a:schemeClr val="accent1"/>
+          </a:lnRef>
+          <a:fillRef idx="3">
+            <a:schemeClr val="accent1"/>
+          </a:fillRef>
+          <a:effectRef idx="2">
+            <a:schemeClr val="accent1"/>
+          </a:effectRef>
+          <a:fontRef idx="minor">
+            <a:schemeClr val="lt1"/>
+          </a:fontRef>
+        </p:style>
+        <p:txBody>
+          <a:bodyPr rtlCol="0" anchor="ctr"/>
+          <a:lstStyle/>
+          <a:p>
+            <a:pPr algn="ctr"/>
+            <a:endParaRPr/>
+          </a:p>
+        </p:txBody>
+      </p:sp>
+      <p:sp>
+        <p:nvSpPr>
+          <p:cNvPr id="4" name="Rounded Rectangle 3"/>
+          <p:cNvSpPr/>
+          <p:nvPr/>
+        </p:nvSpPr>
+        <p:spPr>
+          <a:xfrm>
+            <a:off x="457200" y="329184"/>
+            <a:ext cx="1325880" cy="420624"/>
+          </a:xfrm>
+          <a:prstGeom prst="roundRect">
+            <a:avLst>
+              <a:gd name="adj" fmla="val 50000"/>
+            </a:avLst>
+          </a:prstGeom>
+          <a:solidFill>
+            <a:srgbClr val="4A2040"/>
+          </a:solidFill>
+          <a:ln w="12700">
+            <a:solidFill>
+              <a:srgbClr val="D4B37A"/>
+            </a:solidFill>
+          </a:ln>
+        </p:spPr>
+        <p:style>
+          <a:lnRef idx="1">
+            <a:schemeClr val="accent1"/>
+          </a:lnRef>
+          <a:fillRef idx="3">
+            <a:schemeClr val="accent1"/>
+          </a:fillRef>
+          <a:effectRef idx="2">
+            <a:schemeClr val="accent1"/>
+          </a:effectRef>
+          <a:fontRef idx="minor">
+            <a:schemeClr val="lt1"/>
+          </a:fontRef>
+        </p:style>
+        <p:txBody>
+          <a:bodyPr rtlCol="0" anchor="ctr"/>
+          <a:lstStyle/>
+          <a:p>
+            <a:pPr algn="ctr"/>
+            <a:endParaRPr/>
+          </a:p>
+        </p:txBody>
+      </p:sp>
+      <p:sp>
+        <p:nvSpPr>
+          <p:cNvPr id="5" name="TextBox 4"/>
+          <p:cNvSpPr txBox="1"/>
+          <p:nvPr/>
+        </p:nvSpPr>
+        <p:spPr>
+          <a:xfrm>
+            <a:off x="457200" y="384048"/>
+            <a:ext cx="1325880" cy="310896"/>
+          </a:xfrm>
+          <a:prstGeom prst="rect">
+            <a:avLst/>
+          </a:prstGeom>
+          <a:noFill/>
+        </p:spPr>
+        <p:txBody>
+          <a:bodyPr wrap="square">
+            <a:spAutoFit/>
+          </a:bodyPr>
+          <a:lstStyle/>
+          <a:p>
+            <a:pPr algn="ctr"/>
+            <a:r>
+              <a:rPr sz="1300" b="0">
+                <a:solidFill>
+                  <a:srgbClr val="FFFFFF"/>
+                </a:solidFill>
+                <a:latin typeface="Georgia"/>
+              </a:rPr>
+              <a:t>HallHub</a:t>
+            </a:r>
+          </a:p>
+        </p:txBody>
+      </p:sp>
+      <p:sp>
+        <p:nvSpPr>
+          <p:cNvPr id="6" name="TextBox 5"/>
+          <p:cNvSpPr txBox="1"/>
+          <p:nvPr/>
+        </p:nvSpPr>
+        <p:spPr>
+          <a:xfrm>
+            <a:off x="1965960" y="365760"/>
+            <a:ext cx="1051560" cy="310896"/>
+          </a:xfrm>
+          <a:prstGeom prst="rect">
+            <a:avLst/>
+          </a:prstGeom>
+          <a:noFill/>
+        </p:spPr>
+        <p:txBody>
+          <a:bodyPr wrap="square">
+            <a:spAutoFit/>
+          </a:bodyPr>
+          <a:lstStyle/>
+          <a:p>
+            <a:pPr algn="ctr"/>
+            <a:r>
+              <a:rPr sz="1200" b="1">
+                <a:solidFill>
+                  <a:srgbClr val="4A2040"/>
+                </a:solidFill>
+                <a:latin typeface="Calibri"/>
+              </a:rPr>
+              <a:t>Problem</a:t>
+            </a:r>
+          </a:p>
+        </p:txBody>
+      </p:sp>
+      <p:sp>
+        <p:nvSpPr>
+          <p:cNvPr id="7" name="TextBox 6"/>
+          <p:cNvSpPr txBox="1"/>
+          <p:nvPr/>
+        </p:nvSpPr>
+        <p:spPr>
+          <a:xfrm>
+            <a:off x="3127248" y="365760"/>
+            <a:ext cx="1097280" cy="310896"/>
+          </a:xfrm>
+          <a:prstGeom prst="rect">
+            <a:avLst/>
+          </a:prstGeom>
+          <a:noFill/>
+        </p:spPr>
+        <p:txBody>
+          <a:bodyPr wrap="square">
+            <a:spAutoFit/>
+          </a:bodyPr>
+          <a:lstStyle/>
+          <a:p>
+            <a:pPr algn="ctr"/>
+            <a:r>
+              <a:rPr sz="1200" b="1">
+                <a:solidFill>
+                  <a:srgbClr val="4A2040"/>
+                </a:solidFill>
+                <a:latin typeface="Calibri"/>
+              </a:rPr>
+              <a:t>Values</a:t>
+            </a:r>
+          </a:p>
+        </p:txBody>
+      </p:sp>
+      <p:sp>
+        <p:nvSpPr>
+          <p:cNvPr id="8" name="TextBox 7"/>
+          <p:cNvSpPr txBox="1"/>
+          <p:nvPr/>
+        </p:nvSpPr>
+        <p:spPr>
+          <a:xfrm>
+            <a:off x="4334256" y="365760"/>
+            <a:ext cx="914400" cy="310896"/>
+          </a:xfrm>
+          <a:prstGeom prst="rect">
+            <a:avLst/>
+          </a:prstGeom>
+          <a:noFill/>
+        </p:spPr>
+        <p:txBody>
+          <a:bodyPr wrap="square">
+            <a:spAutoFit/>
+          </a:bodyPr>
+          <a:lstStyle/>
+          <a:p>
+            <a:pPr algn="ctr"/>
+            <a:r>
+              <a:rPr sz="1200" b="1">
+                <a:solidFill>
+                  <a:srgbClr val="4A2040"/>
+                </a:solidFill>
+                <a:latin typeface="Calibri"/>
+              </a:rPr>
+              <a:t>Market</a:t>
+            </a:r>
+          </a:p>
+        </p:txBody>
+      </p:sp>
+      <p:sp>
+        <p:nvSpPr>
+          <p:cNvPr id="9" name="TextBox 8"/>
+          <p:cNvSpPr txBox="1"/>
+          <p:nvPr/>
+        </p:nvSpPr>
+        <p:spPr>
+          <a:xfrm>
+            <a:off x="5358384" y="365760"/>
+            <a:ext cx="868680" cy="310896"/>
+          </a:xfrm>
+          <a:prstGeom prst="rect">
+            <a:avLst/>
+          </a:prstGeom>
+          <a:noFill/>
+        </p:spPr>
+        <p:txBody>
+          <a:bodyPr wrap="square">
+            <a:spAutoFit/>
+          </a:bodyPr>
+          <a:lstStyle/>
+          <a:p>
+            <a:pPr algn="ctr"/>
+            <a:r>
+              <a:rPr sz="1200" b="1">
+                <a:solidFill>
+                  <a:srgbClr val="4A2040"/>
+                </a:solidFill>
+                <a:latin typeface="Calibri"/>
+              </a:rPr>
+              <a:t>Revenue</a:t>
+            </a:r>
+          </a:p>
+        </p:txBody>
+      </p:sp>
+      <p:sp>
+        <p:nvSpPr>
+          <p:cNvPr id="10" name="TextBox 9"/>
+          <p:cNvSpPr txBox="1"/>
+          <p:nvPr/>
+        </p:nvSpPr>
+        <p:spPr>
+          <a:xfrm>
+            <a:off x="6336792" y="365760"/>
+            <a:ext cx="1325880" cy="310896"/>
+          </a:xfrm>
+          <a:prstGeom prst="rect">
+            <a:avLst/>
+          </a:prstGeom>
+          <a:noFill/>
+        </p:spPr>
+        <p:txBody>
+          <a:bodyPr wrap="square">
+            <a:spAutoFit/>
+          </a:bodyPr>
+          <a:lstStyle/>
+          <a:p>
+            <a:pPr algn="ctr"/>
+            <a:r>
+              <a:rPr sz="1200" b="1">
+                <a:solidFill>
+                  <a:srgbClr val="4A2040"/>
+                </a:solidFill>
+                <a:latin typeface="Calibri"/>
+              </a:rPr>
+              <a:t>Advantage</a:t>
+            </a:r>
+          </a:p>
+        </p:txBody>
+      </p:sp>
+      <p:sp>
+        <p:nvSpPr>
+          <p:cNvPr id="11" name="TextBox 10"/>
+          <p:cNvSpPr txBox="1"/>
+          <p:nvPr/>
+        </p:nvSpPr>
+        <p:spPr>
+          <a:xfrm>
+            <a:off x="7772400" y="365760"/>
+            <a:ext cx="822960" cy="310896"/>
+          </a:xfrm>
+          <a:prstGeom prst="rect">
+            <a:avLst/>
+          </a:prstGeom>
+          <a:noFill/>
+        </p:spPr>
+        <p:txBody>
+          <a:bodyPr wrap="square">
+            <a:spAutoFit/>
+          </a:bodyPr>
+          <a:lstStyle/>
+          <a:p>
+            <a:pPr algn="ctr"/>
+            <a:r>
+              <a:rPr sz="1200" b="1">
+                <a:solidFill>
+                  <a:srgbClr val="4A2040"/>
+                </a:solidFill>
+                <a:latin typeface="Calibri"/>
+              </a:rPr>
+              <a:t>Product</a:t>
+            </a:r>
+          </a:p>
+        </p:txBody>
+      </p:sp>
+      <p:sp>
+        <p:nvSpPr>
+          <p:cNvPr id="12" name="TextBox 11"/>
+          <p:cNvSpPr txBox="1"/>
+          <p:nvPr/>
+        </p:nvSpPr>
+        <p:spPr>
+          <a:xfrm>
+            <a:off x="8705088" y="365760"/>
+            <a:ext cx="1097280" cy="310896"/>
+          </a:xfrm>
+          <a:prstGeom prst="rect">
+            <a:avLst/>
+          </a:prstGeom>
+          <a:noFill/>
+        </p:spPr>
+        <p:txBody>
+          <a:bodyPr wrap="square">
+            <a:spAutoFit/>
+          </a:bodyPr>
+          <a:lstStyle/>
+          <a:p>
+            <a:pPr algn="ctr"/>
+            <a:r>
+              <a:rPr sz="1200" b="1">
+                <a:solidFill>
+                  <a:srgbClr val="7A3A6A"/>
+                </a:solidFill>
+                <a:latin typeface="Calibri"/>
+              </a:rPr>
+              <a:t>Vision</a:t>
+            </a:r>
+          </a:p>
+        </p:txBody>
+      </p:sp>
+      <p:sp>
+        <p:nvSpPr>
+          <p:cNvPr id="13" name="Rectangle 12"/>
+          <p:cNvSpPr/>
+          <p:nvPr/>
+        </p:nvSpPr>
+        <p:spPr>
+          <a:xfrm>
+            <a:off x="9290000" y="676656"/>
+            <a:ext cx="520000" cy="16459"/>
+          </a:xfrm>
+          <a:prstGeom prst="rect">
+            <a:avLst/>
+          </a:prstGeom>
+          <a:solidFill>
+            <a:srgbClr val="7A3A6A"/>
+          </a:solidFill>
+          <a:ln>
+            <a:noFill/>
+          </a:ln>
+        </p:spPr>
+        <p:style>
+          <a:lnRef idx="1">
+            <a:schemeClr val="accent1"/>
+          </a:lnRef>
+          <a:fillRef idx="3">
+            <a:schemeClr val="accent1"/>
+          </a:fillRef>
+          <a:effectRef idx="2">
+            <a:schemeClr val="accent1"/>
+          </a:effectRef>
+          <a:fontRef idx="minor">
+            <a:schemeClr val="lt1"/>
+          </a:fontRef>
+        </p:style>
+        <p:txBody>
+          <a:bodyPr rtlCol="0" anchor="ctr"/>
+          <a:lstStyle/>
+          <a:p>
+            <a:pPr algn="ctr"/>
+            <a:endParaRPr/>
+          </a:p>
+        </p:txBody>
+      </p:sp>
+      <p:sp>
+        <p:nvSpPr>
+          <p:cNvPr id="14" name="Oval 13"/>
+          <p:cNvSpPr/>
+          <p:nvPr/>
+        </p:nvSpPr>
+        <p:spPr>
+          <a:xfrm>
+            <a:off x="10561320" y="1097280"/>
+            <a:ext cx="960120" cy="960120"/>
+          </a:xfrm>
+          <a:prstGeom prst="ellipse">
+            <a:avLst/>
+          </a:prstGeom>
+          <a:noFill/>
+          <a:ln w="22225">
+            <a:solidFill>
+              <a:srgbClr val="4A2040"/>
+            </a:solidFill>
+          </a:ln>
+        </p:spPr>
+        <p:style>
+          <a:lnRef idx="1">
+            <a:schemeClr val="accent1"/>
+          </a:lnRef>
+          <a:fillRef idx="3">
+            <a:schemeClr val="accent1"/>
+          </a:fillRef>
+          <a:effectRef idx="2">
+            <a:schemeClr val="accent1"/>
+          </a:effectRef>
+          <a:fontRef idx="minor">
+            <a:schemeClr val="lt1"/>
+          </a:fontRef>
+        </p:style>
+        <p:txBody>
+          <a:bodyPr rtlCol="0" anchor="ctr"/>
+          <a:lstStyle/>
+          <a:p>
+            <a:pPr algn="ctr"/>
+            <a:endParaRPr/>
+          </a:p>
+        </p:txBody>
+      </p:sp>
+      <p:sp>
+        <p:nvSpPr>
+          <p:cNvPr id="15" name="Oval 14"/>
+          <p:cNvSpPr/>
+          <p:nvPr/>
+        </p:nvSpPr>
+        <p:spPr>
+          <a:xfrm>
+            <a:off x="10351008" y="1371600"/>
+            <a:ext cx="1371600" cy="411480"/>
+          </a:xfrm>
+          <a:prstGeom prst="ellipse">
+            <a:avLst/>
+          </a:prstGeom>
+          <a:noFill/>
+          <a:ln w="19050">
+            <a:solidFill>
+              <a:srgbClr val="C5A070"/>
+            </a:solidFill>
+          </a:ln>
+        </p:spPr>
+        <p:style>
+          <a:lnRef idx="1">
+            <a:schemeClr val="accent1"/>
+          </a:lnRef>
+          <a:fillRef idx="3">
+            <a:schemeClr val="accent1"/>
+          </a:fillRef>
+          <a:effectRef idx="2">
+            <a:schemeClr val="accent1"/>
+          </a:effectRef>
+          <a:fontRef idx="minor">
+            <a:schemeClr val="lt1"/>
+          </a:fontRef>
+        </p:style>
+        <p:txBody>
+          <a:bodyPr rtlCol="0" anchor="ctr"/>
+          <a:lstStyle/>
+          <a:p>
+            <a:pPr algn="ctr"/>
+            <a:endParaRPr/>
+          </a:p>
+        </p:txBody>
+      </p:sp>
+      <p:sp>
+        <p:nvSpPr>
+          <p:cNvPr id="20" name="10-Point Star 19"/>
+          <p:cNvSpPr/>
+          <p:nvPr/>
+        </p:nvSpPr>
+        <p:spPr>
+          <a:xfrm>
+            <a:off x="640080" y="5806440"/>
+            <a:ext cx="384048" cy="384048"/>
+          </a:xfrm>
+          <a:prstGeom prst="star10">
+            <a:avLst/>
+          </a:prstGeom>
+          <a:solidFill>
+            <a:srgbClr val="4A2040"/>
+          </a:solidFill>
+          <a:ln>
+            <a:noFill/>
+          </a:ln>
+        </p:spPr>
+        <p:style>
+          <a:lnRef idx="1">
+            <a:schemeClr val="accent1"/>
+          </a:lnRef>
+          <a:fillRef idx="3">
+            <a:schemeClr val="accent1"/>
+          </a:fillRef>
+          <a:effectRef idx="2">
+            <a:schemeClr val="accent1"/>
+          </a:effectRef>
+          <a:fontRef idx="minor">
+            <a:schemeClr val="lt1"/>
+          </a:fontRef>
+        </p:style>
+        <p:txBody>
+          <a:bodyPr rtlCol="0" anchor="ctr"/>
+          <a:lstStyle/>
+          <a:p>
+            <a:pPr algn="ctr"/>
+            <a:endParaRPr/>
+          </a:p>
+        </p:txBody>
+      </p:sp>
+      <p:sp>
+        <p:nvSpPr>
+          <p:cNvPr id="21" name="TextBox 20"/>
+          <p:cNvSpPr txBox="1"/>
+          <p:nvPr/>
+        </p:nvSpPr>
+        <p:spPr>
+          <a:xfrm>
+            <a:off x="640080" y="6510528"/>
+            <a:ext cx="2743200" cy="256032"/>
+          </a:xfrm>
+          <a:prstGeom prst="rect">
+            <a:avLst/>
+          </a:prstGeom>
+          <a:noFill/>
+        </p:spPr>
+        <p:txBody>
+          <a:bodyPr wrap="square">
+            <a:spAutoFit/>
+          </a:bodyPr>
+          <a:lstStyle/>
+          <a:p>
+            <a:pPr algn="l"/>
+            <a:r>
+              <a:rPr sz="1300" b="1">
+                <a:solidFill>
+                  <a:srgbClr val="4A2040"/>
+                </a:solidFill>
+                <a:latin typeface="Georgia"/>
+              </a:rPr>
+              <a:t>HallHub</a:t>
+            </a:r>
+          </a:p>
+        </p:txBody>
+      </p:sp>
+      <p:sp>
+        <p:nvSpPr>
+          <p:cNvPr id="17" name="Rounded Rectangle 16"/>
+          <p:cNvSpPr/>
+          <p:nvPr/>
+        </p:nvSpPr>
+        <p:spPr>
+          <a:xfrm>
+            <a:off x="640080" y="1600000"/>
+            <a:ext cx="5400000" cy="2850000"/>
+          </a:xfrm>
+          <a:prstGeom prst="roundRect">
+            <a:avLst>
+              <a:gd name="adj" fmla="val 8000"/>
+            </a:avLst>
+          </a:prstGeom>
+          <a:solidFill>
+            <a:srgbClr val="FFFDFB"/>
+          </a:solidFill>
+          <a:ln w="12700">
+            <a:solidFill>
+              <a:srgbClr val="EAD9C2"/>
+            </a:solidFill>
+          </a:ln>
+        </p:spPr>
+        <p:style>
+          <a:lnRef idx="1">
+            <a:schemeClr val="accent1"/>
+          </a:lnRef>
+          <a:fillRef idx="3">
+            <a:schemeClr val="accent1"/>
+          </a:fillRef>
+          <a:effectRef idx="2">
+            <a:schemeClr val="accent1"/>
+          </a:effectRef>
+          <a:fontRef idx="minor">
+            <a:schemeClr val="lt1"/>
+          </a:fontRef>
+        </p:style>
+        <p:txBody>
+          <a:bodyPr rtlCol="0" anchor="ctr"/>
+          <a:lstStyle/>
+          <a:p>
+            <a:pPr algn="ctr"/>
+            <a:endParaRPr dirty="0"/>
+          </a:p>
+        </p:txBody>
+      </p:sp>
+      <p:sp>
+        <p:nvSpPr>
+          <p:cNvPr id="18" name="Rounded Rectangle 17"/>
+          <p:cNvSpPr/>
+          <p:nvPr/>
+        </p:nvSpPr>
+        <p:spPr>
+          <a:xfrm>
+            <a:off x="900000" y="1780000"/>
+            <a:ext cx="502920" cy="54864"/>
+          </a:xfrm>
+          <a:prstGeom prst="roundRect">
+            <a:avLst>
+              <a:gd name="adj" fmla="val 50000"/>
+            </a:avLst>
+          </a:prstGeom>
+          <a:solidFill>
+            <a:srgbClr val="C5A070"/>
+          </a:solidFill>
+          <a:ln>
+            <a:noFill/>
+          </a:ln>
+        </p:spPr>
+        <p:style>
+          <a:lnRef idx="1">
+            <a:schemeClr val="accent1"/>
+          </a:lnRef>
+          <a:fillRef idx="3">
+            <a:schemeClr val="accent1"/>
+          </a:fillRef>
+          <a:effectRef idx="2">
+            <a:schemeClr val="accent1"/>
+          </a:effectRef>
+          <a:fontRef idx="minor">
+            <a:schemeClr val="lt1"/>
+          </a:fontRef>
+        </p:style>
+        <p:txBody>
+          <a:bodyPr rtlCol="0" anchor="ctr"/>
+          <a:lstStyle/>
+          <a:p>
+            <a:pPr algn="ctr"/>
+            <a:endParaRPr/>
+          </a:p>
+        </p:txBody>
+      </p:sp>
+      <p:sp>
+        <p:nvSpPr>
+          <p:cNvPr id="22" name="TextBox 21"/>
+          <p:cNvSpPr txBox="1"/>
+          <p:nvPr/>
+        </p:nvSpPr>
+        <p:spPr>
+          <a:xfrm>
+            <a:off x="900000" y="1920000"/>
+            <a:ext cx="4800000" cy="260000"/>
+          </a:xfrm>
+          <a:prstGeom prst="rect">
+            <a:avLst/>
+          </a:prstGeom>
+          <a:noFill/>
+        </p:spPr>
+        <p:txBody>
+          <a:bodyPr wrap="none">
+            <a:spAutoFit/>
+          </a:bodyPr>
+          <a:lstStyle/>
+          <a:p>
+            <a:r>
+              <a:rPr sz="1200" b="1" i="0">
+                <a:solidFill>
+                  <a:srgbClr val="C5A070"/>
+                </a:solidFill>
+                <a:latin typeface="Calibri"/>
+              </a:rPr>
+              <a:t>CURRENT HALLHUB (DEPLOYED)</a:t>
+            </a:r>
+          </a:p>
+        </p:txBody>
+      </p:sp>
+      <p:sp>
+        <p:nvSpPr>
+          <p:cNvPr id="23" name="TextBox 22"/>
+          <p:cNvSpPr txBox="1"/>
+          <p:nvPr/>
+        </p:nvSpPr>
+        <p:spPr>
+          <a:xfrm>
+            <a:off x="900000" y="2200000"/>
+            <a:ext cx="4800000" cy="400000"/>
+          </a:xfrm>
+          <a:prstGeom prst="rect">
+            <a:avLst/>
+          </a:prstGeom>
+          <a:noFill/>
+        </p:spPr>
+        <p:txBody>
+          <a:bodyPr wrap="none">
+            <a:spAutoFit/>
+          </a:bodyPr>
+          <a:lstStyle/>
+          <a:p>
+            <a:r>
+              <a:rPr sz="2000" b="1" i="0">
+                <a:solidFill>
+                  <a:srgbClr val="4A2040"/>
+                </a:solidFill>
+                <a:latin typeface="Georgia"/>
+              </a:rPr>
+              <a:t>Core Operational Platform</a:t>
+            </a:r>
+          </a:p>
+        </p:txBody>
+      </p:sp>
+      <p:sp>
+        <p:nvSpPr>
+          <p:cNvPr id="24" name="TextBox 23"/>
+          <p:cNvSpPr txBox="1"/>
+          <p:nvPr/>
+        </p:nvSpPr>
+        <p:spPr>
+          <a:xfrm>
+            <a:off x="900000" y="2650000"/>
+            <a:ext cx="4800000" cy="1600000"/>
+          </a:xfrm>
+          <a:prstGeom prst="rect">
+            <a:avLst/>
+          </a:prstGeom>
+          <a:noFill/>
+        </p:spPr>
+        <p:txBody>
+          <a:bodyPr wrap="none">
+            <a:spAutoFit/>
+          </a:bodyPr>
+          <a:lstStyle/>
+          <a:p>
+            <a:pPr>
+              <a:spcAft>
+                <a:spcPts val="300"/>
+              </a:spcAft>
+            </a:pPr>
+            <a:r>
+              <a:rPr sz="1100" b="0" i="0">
+                <a:solidFill>
+                  <a:srgbClr val="2A1D33"/>
+                </a:solidFill>
+                <a:latin typeface="Calibri"/>
+              </a:rPr>
+              <a:t>•  Venue discovery with search, capacity &amp; price filters</a:t>
+            </a:r>
+          </a:p>
+          <a:p>
+            <a:pPr>
+              <a:spcAft>
+                <a:spcPts val="300"/>
+              </a:spcAft>
+            </a:pPr>
+            <a:r>
+              <a:rPr sz="1100" b="0" i="0">
+                <a:solidFill>
+                  <a:srgbClr val="2A1D33"/>
+                </a:solidFill>
+                <a:latin typeface="Calibri"/>
+              </a:rPr>
+              <a:t>•  End-to-end booking lifecycle &amp; appointment scheduling</a:t>
+            </a:r>
+          </a:p>
+          <a:p>
+            <a:pPr>
+              <a:spcAft>
+                <a:spcPts val="300"/>
+              </a:spcAft>
+            </a:pPr>
+            <a:r>
+              <a:rPr sz="1100" b="0" i="0">
+                <a:solidFill>
+                  <a:srgbClr val="2A1D33"/>
+                </a:solidFill>
+                <a:latin typeface="Calibri"/>
+              </a:rPr>
+              <a:t>•  Customer, Hotel Owner, and Administrator portal accounts</a:t>
+            </a:r>
+          </a:p>
+          <a:p>
+            <a:pPr>
+              <a:spcAft>
+                <a:spcPts val="300"/>
+              </a:spcAft>
+            </a:pPr>
+            <a:r>
+              <a:rPr sz="1100" b="0" i="0">
+                <a:solidFill>
+                  <a:srgbClr val="2A1D33"/>
+                </a:solidFill>
+                <a:latin typeface="Calibri"/>
+              </a:rPr>
+              <a:t>•  Automated double-booking prevention &amp; PDF invoice generation</a:t>
+            </a:r>
+          </a:p>
+          <a:p>
+            <a:pPr>
+              <a:spcAft>
+                <a:spcPts val="300"/>
+              </a:spcAft>
+            </a:pPr>
+            <a:r>
+              <a:rPr sz="1100" b="0" i="0">
+                <a:solidFill>
+                  <a:srgbClr val="2A1D33"/>
+                </a:solidFill>
+                <a:latin typeface="Calibri"/>
+              </a:rPr>
+              <a:t>•  Operational &amp; revenue analytics dashboards</a:t>
+            </a:r>
+          </a:p>
+          <a:p>
+            <a:pPr>
+              <a:spcAft>
+                <a:spcPts val="300"/>
+              </a:spcAft>
+            </a:pPr>
+            <a:r>
+              <a:rPr sz="1100" b="0" i="0">
+                <a:solidFill>
+                  <a:srgbClr val="2A1D33"/>
+                </a:solidFill>
+                <a:latin typeface="Calibri"/>
+              </a:rPr>
+              <a:t>•  HallHub Plus premium visibility subscription model</a:t>
+            </a:r>
+          </a:p>
+        </p:txBody>
+      </p:sp>
+      <p:sp>
+        <p:nvSpPr>
+          <p:cNvPr id="23" name="Rounded Rectangle 22"/>
+          <p:cNvSpPr/>
+          <p:nvPr/>
+        </p:nvSpPr>
+        <p:spPr>
+          <a:xfrm>
+            <a:off x="6200000" y="1600000"/>
+            <a:ext cx="5400000" cy="2850000"/>
+          </a:xfrm>
+          <a:prstGeom prst="roundRect">
+            <a:avLst>
+              <a:gd name="adj" fmla="val 8000"/>
+            </a:avLst>
+          </a:prstGeom>
+          <a:solidFill>
+            <a:srgbClr val="4A2040"/>
+          </a:solidFill>
+          <a:ln>
+            <a:noFill/>
+          </a:ln>
+        </p:spPr>
+        <p:style>
+          <a:lnRef idx="1">
+            <a:schemeClr val="accent1"/>
+          </a:lnRef>
+          <a:fillRef idx="3">
+            <a:schemeClr val="accent1"/>
+          </a:fillRef>
+          <a:effectRef idx="2">
+            <a:schemeClr val="accent1"/>
+          </a:effectRef>
+          <a:fontRef idx="minor">
+            <a:schemeClr val="lt1"/>
+          </a:fontRef>
+        </p:style>
+        <p:txBody>
+          <a:bodyPr rtlCol="0" anchor="ctr"/>
+          <a:lstStyle/>
+          <a:p>
+            <a:pPr algn="ctr"/>
+            <a:endParaRPr/>
+          </a:p>
+        </p:txBody>
+      </p:sp>
+      <p:sp>
+        <p:nvSpPr>
+          <p:cNvPr id="25" name="TextBox 24"/>
+          <p:cNvSpPr txBox="1"/>
+          <p:nvPr/>
+        </p:nvSpPr>
+        <p:spPr>
+          <a:xfrm>
+            <a:off x="6450000" y="1920000"/>
+            <a:ext cx="4800000" cy="260000"/>
+          </a:xfrm>
+          <a:prstGeom prst="rect">
+            <a:avLst/>
+          </a:prstGeom>
+          <a:noFill/>
+        </p:spPr>
+        <p:txBody>
+          <a:bodyPr wrap="none">
+            <a:spAutoFit/>
+          </a:bodyPr>
+          <a:lstStyle/>
+          <a:p>
+            <a:r>
+              <a:rPr sz="1200" b="1" i="0">
+                <a:solidFill>
+                  <a:srgbClr val="C5A070"/>
+                </a:solidFill>
+                <a:latin typeface="Calibri"/>
+              </a:rPr>
+              <a:t>FUTURE HALLHUB (ROADMAP)</a:t>
+            </a:r>
+          </a:p>
+        </p:txBody>
+      </p:sp>
+      <p:sp>
+        <p:nvSpPr>
+          <p:cNvPr id="26" name="TextBox 25"/>
+          <p:cNvSpPr txBox="1"/>
+          <p:nvPr/>
+        </p:nvSpPr>
+        <p:spPr>
+          <a:xfrm>
+            <a:off x="6450000" y="2200000"/>
+            <a:ext cx="4800000" cy="400000"/>
+          </a:xfrm>
+          <a:prstGeom prst="rect">
+            <a:avLst/>
+          </a:prstGeom>
+          <a:noFill/>
+        </p:spPr>
+        <p:txBody>
+          <a:bodyPr wrap="none">
+            <a:spAutoFit/>
+          </a:bodyPr>
+          <a:lstStyle/>
+          <a:p>
+            <a:r>
+              <a:rPr sz="2000" b="1" i="0">
+                <a:solidFill>
+                  <a:srgbClr val="FFFFFF"/>
+                </a:solidFill>
+                <a:latin typeface="Georgia"/>
+              </a:rPr>
+              <a:t>Full Event Planning Ecosystem</a:t>
+            </a:r>
+          </a:p>
+        </p:txBody>
+      </p:sp>
+      <p:sp>
+        <p:nvSpPr>
+          <p:cNvPr id="27" name="TextBox 26"/>
+          <p:cNvSpPr txBox="1"/>
+          <p:nvPr/>
+        </p:nvSpPr>
+        <p:spPr>
+          <a:xfrm>
+            <a:off x="6450000" y="2650000"/>
+            <a:ext cx="4800000" cy="1600000"/>
+          </a:xfrm>
+          <a:prstGeom prst="rect">
+            <a:avLst/>
+          </a:prstGeom>
+          <a:noFill/>
+        </p:spPr>
+        <p:txBody>
+          <a:bodyPr wrap="none">
+            <a:spAutoFit/>
+          </a:bodyPr>
+          <a:lstStyle/>
+          <a:p>
+            <a:pPr>
+              <a:spcAft>
+                <a:spcPts val="300"/>
+              </a:spcAft>
+            </a:pPr>
+            <a:r>
+              <a:rPr sz="1100" b="0" i="0">
+                <a:solidFill>
+                  <a:srgbClr val="FFFFFF"/>
+                </a:solidFill>
+                <a:latin typeface="Calibri"/>
+              </a:rPr>
+              <a:t>•  Integrated online payment processing (mobile money &amp; cards)</a:t>
+            </a:r>
+          </a:p>
+          <a:p>
+            <a:pPr>
+              <a:spcAft>
+                <a:spcPts val="300"/>
+              </a:spcAft>
+            </a:pPr>
+            <a:r>
+              <a:rPr sz="1100" b="0" i="0">
+                <a:solidFill>
+                  <a:srgbClr val="FFFFFF"/>
+                </a:solidFill>
+                <a:latin typeface="Calibri"/>
+              </a:rPr>
+              <a:t>•  Transactional booking commission model (e.g. 5% fee)</a:t>
+            </a:r>
+          </a:p>
+          <a:p>
+            <a:pPr>
+              <a:spcAft>
+                <a:spcPts val="300"/>
+              </a:spcAft>
+            </a:pPr>
+            <a:r>
+              <a:rPr sz="1100" b="0" i="0">
+                <a:solidFill>
+                  <a:srgbClr val="FFFFFF"/>
+                </a:solidFill>
+                <a:latin typeface="Calibri"/>
+              </a:rPr>
+              <a:t>•  Third-party event service advertising directory</a:t>
+            </a:r>
+          </a:p>
+          <a:p>
+            <a:pPr>
+              <a:spcAft>
+                <a:spcPts val="300"/>
+              </a:spcAft>
+            </a:pPr>
+            <a:r>
+              <a:rPr sz="1100" b="0" i="0">
+                <a:solidFill>
+                  <a:srgbClr val="FFFFFF"/>
+                </a:solidFill>
+                <a:latin typeface="Calibri"/>
+              </a:rPr>
+              <a:t>•  Photographers, decorators, caterers, DJs &amp; makeup artists</a:t>
+            </a:r>
+          </a:p>
+          <a:p>
+            <a:pPr>
+              <a:spcAft>
+                <a:spcPts val="300"/>
+              </a:spcAft>
+            </a:pPr>
+            <a:r>
+              <a:rPr sz="1100" b="0" i="0">
+                <a:solidFill>
+                  <a:srgbClr val="FFFFFF"/>
+                </a:solidFill>
+                <a:latin typeface="Calibri"/>
+              </a:rPr>
+              <a:t>•  Cross-city expansion across Somaliland and regional hubs</a:t>
+            </a:r>
+          </a:p>
+          <a:p>
+            <a:pPr>
+              <a:spcAft>
+                <a:spcPts val="300"/>
+              </a:spcAft>
+            </a:pPr>
+            <a:r>
+              <a:rPr sz="1100" b="0" i="0">
+                <a:solidFill>
+                  <a:srgbClr val="FFFFFF"/>
+                </a:solidFill>
+                <a:latin typeface="Calibri"/>
+              </a:rPr>
+              <a:t>•  Evolution into an all-in-one digital event marketplace</a:t>
+            </a:r>
+          </a:p>
+        </p:txBody>
+      </p:sp>
+      <p:sp>
+        <p:nvSpPr>
+          <p:cNvPr id="17" name="Rounded Rectangle 16"/>
+          <p:cNvSpPr/>
+          <p:nvPr/>
+        </p:nvSpPr>
+        <p:spPr>
+          <a:xfrm>
+            <a:off x="640080" y="4650000"/>
+            <a:ext cx="10959920" cy="1500000"/>
+          </a:xfrm>
+          <a:prstGeom prst="roundRect">
+            <a:avLst>
+              <a:gd name="adj" fmla="val 8000"/>
+            </a:avLst>
+          </a:prstGeom>
+          <a:solidFill>
+            <a:srgbClr val="FFFDFB"/>
+          </a:solidFill>
+          <a:ln w="12700">
+            <a:solidFill>
+              <a:srgbClr val="EAD9C2"/>
+            </a:solidFill>
+          </a:ln>
+        </p:spPr>
+        <p:style>
+          <a:lnRef idx="1">
+            <a:schemeClr val="accent1"/>
+          </a:lnRef>
+          <a:fillRef idx="3">
+            <a:schemeClr val="accent1"/>
+          </a:fillRef>
+          <a:effectRef idx="2">
+            <a:schemeClr val="accent1"/>
+          </a:effectRef>
+          <a:fontRef idx="minor">
+            <a:schemeClr val="lt1"/>
+          </a:fontRef>
+        </p:style>
+        <p:txBody>
+          <a:bodyPr rtlCol="0" anchor="ctr"/>
+          <a:lstStyle/>
+          <a:p>
+            <a:pPr algn="ctr"/>
+            <a:endParaRPr dirty="0"/>
+          </a:p>
+        </p:txBody>
+      </p:sp>
+      <p:sp>
+        <p:nvSpPr>
+          <p:cNvPr id="18" name="Rounded Rectangle 17"/>
+          <p:cNvSpPr/>
+          <p:nvPr/>
+        </p:nvSpPr>
+        <p:spPr>
+          <a:xfrm>
+            <a:off x="900000" y="4810000"/>
+            <a:ext cx="502920" cy="54864"/>
+          </a:xfrm>
+          <a:prstGeom prst="roundRect">
+            <a:avLst>
+              <a:gd name="adj" fmla="val 50000"/>
+            </a:avLst>
+          </a:prstGeom>
+          <a:solidFill>
+            <a:srgbClr val="C5A070"/>
+          </a:solidFill>
+          <a:ln>
+            <a:noFill/>
+          </a:ln>
+        </p:spPr>
+        <p:style>
+          <a:lnRef idx="1">
+            <a:schemeClr val="accent1"/>
+          </a:lnRef>
+          <a:fillRef idx="3">
+            <a:schemeClr val="accent1"/>
+          </a:fillRef>
+          <a:effectRef idx="2">
+            <a:schemeClr val="accent1"/>
+          </a:effectRef>
+          <a:fontRef idx="minor">
+            <a:schemeClr val="lt1"/>
+          </a:fontRef>
+        </p:style>
+        <p:txBody>
+          <a:bodyPr rtlCol="0" anchor="ctr"/>
+          <a:lstStyle/>
+          <a:p>
+            <a:pPr algn="ctr"/>
+            <a:endParaRPr/>
+          </a:p>
+        </p:txBody>
+      </p:sp>
+      <p:sp>
+        <p:nvSpPr>
+          <p:cNvPr id="28" name="TextBox 27"/>
+          <p:cNvSpPr txBox="1"/>
+          <p:nvPr/>
+        </p:nvSpPr>
+        <p:spPr>
+          <a:xfrm>
+            <a:off x="900000" y="4930000"/>
+            <a:ext cx="10459920" cy="1150000"/>
+          </a:xfrm>
+          <a:prstGeom prst="rect">
+            <a:avLst/>
+          </a:prstGeom>
+          <a:noFill/>
+        </p:spPr>
+        <p:txBody>
+          <a:bodyPr wrap="none">
+            <a:spAutoFit/>
+          </a:bodyPr>
+          <a:lstStyle/>
+          <a:p>
+            <a:pPr algn="ctr">
+              <a:spcAft>
+                <a:spcPts val="800"/>
+              </a:spcAft>
+            </a:pPr>
+            <a:r>
+              <a:rPr sz="1500" b="1" i="0">
+                <a:solidFill>
+                  <a:srgbClr val="4A2040"/>
+                </a:solidFill>
+                <a:latin typeface="Georgia"/>
+              </a:rPr>
+              <a:t>“HallHub aims to evolve from a venue booking platform into a complete digital ecosystem for planning and managing events.”</a:t>
+            </a:r>
+          </a:p>
+          <a:p>
+            <a:pPr algn="ctr"/>
+            <a:r>
+              <a:rPr sz="2000" b="1" i="0">
+                <a:solidFill>
+                  <a:srgbClr val="C5A070"/>
+                </a:solidFill>
+                <a:latin typeface="Georgia"/>
+              </a:rPr>
+              <a:t>HallHub — Find Your Venue. Plan Your Event.</a:t>
+            </a:r>
+          </a:p>
+        </p:txBody>
+      </p:sp>
+      <p:sp>
+        <p:nvSpPr>
+          <p:cNvPr id="29" name="TextBox 28"/>
+          <p:cNvSpPr txBox="1"/>
+          <p:nvPr/>
+        </p:nvSpPr>
+        <p:spPr>
+          <a:xfrm>
+            <a:off x="10241280" y="6510528"/>
+            <a:ext cx="1280160" cy="256032"/>
+          </a:xfrm>
+          <a:prstGeom prst="rect">
+            <a:avLst/>
+          </a:prstGeom>
+          <a:noFill/>
+        </p:spPr>
+        <p:txBody>
+          <a:bodyPr wrap="none" lIns="0" tIns="0" rIns="0" bIns="0">
+            <a:spAutoFit/>
+          </a:bodyPr>
+          <a:lstStyle/>
+          <a:p>
+            <a:r>
+              <a:rPr sz="1200" b="0" i="0">
+                <a:solidFill>
+                  <a:srgbClr val="6B6570"/>
+                </a:solidFill>
+                <a:latin typeface="Calibri"/>
+              </a:rPr>
+              <a:t>08 / 08</a:t>
             </a:r>
           </a:p>
         </p:txBody>
@@ -4115,7 +9160,7 @@
                 </a:solidFill>
                 <a:latin typeface="Calibri"/>
               </a:rPr>
-              <a:t>Solution</a:t>
+              <a:t>Problem</a:t>
             </a:r>
           </a:p>
         </p:txBody>
@@ -4194,7 +9239,7 @@
                 </a:solidFill>
                 <a:latin typeface="Calibri"/>
               </a:rPr>
-              <a:t>Types</a:t>
+              <a:t>Values</a:t>
             </a:r>
           </a:p>
         </p:txBody>
@@ -4229,7 +9274,7 @@
                 </a:solidFill>
                 <a:latin typeface="Calibri"/>
               </a:rPr>
-              <a:t>Next</a:t>
+              <a:t>Market</a:t>
             </a:r>
           </a:p>
         </p:txBody>
@@ -4264,7 +9309,7 @@
                 </a:solidFill>
                 <a:latin typeface="Calibri"/>
               </a:rPr>
-              <a:t>Technology</a:t>
+              <a:t>Revenue</a:t>
             </a:r>
           </a:p>
         </p:txBody>
@@ -4299,7 +9344,7 @@
                 </a:solidFill>
                 <a:latin typeface="Calibri"/>
               </a:rPr>
-              <a:t>Team</a:t>
+              <a:t>Advantage</a:t>
             </a:r>
           </a:p>
         </p:txBody>
@@ -4334,7 +9379,7 @@
                 </a:solidFill>
                 <a:latin typeface="Calibri"/>
               </a:rPr>
-              <a:t>Discover</a:t>
+              <a:t>Product</a:t>
             </a:r>
           </a:p>
         </p:txBody>
@@ -4413,7 +9458,7 @@
                 </a:solidFill>
                 <a:latin typeface="Calibri"/>
               </a:rPr>
-              <a:t>02  —  PROBLEM  &amp;  SOLUTION</a:t>
+              <a:t>02  —  PROBLEM &amp; SOLUTION</a:t>
             </a:r>
           </a:p>
         </p:txBody>
@@ -4448,7 +9493,7 @@
                 </a:solidFill>
                 <a:latin typeface="Georgia"/>
               </a:rPr>
-              <a:t>One search instead of many hotel visits</a:t>
+              <a:t>Bridging the gap between venues and event organizers</a:t>
             </a:r>
           </a:p>
         </p:txBody>
@@ -4612,7 +9657,7 @@
                 </a:solidFill>
                 <a:latin typeface="Georgia"/>
               </a:rPr>
-              <a:t>Finding a hall takes too long</a:t>
+              <a:t>Manual, fragmented venue booking</a:t>
             </a:r>
           </a:p>
         </p:txBody>
@@ -4647,7 +9692,7 @@
                 </a:solidFill>
                 <a:latin typeface="Calibri"/>
               </a:rPr>
-              <a:t>People usually visit or contact different hotels just to learn simple details before they can even decide.</a:t>
+              <a:t>Finding an event hall currently requires visiting multiple hotels, making endless phone calls, and dealing with manual paper coordination.</a:t>
             </a:r>
           </a:p>
         </p:txBody>
@@ -4680,13 +9725,13 @@
               </a:spcAft>
             </a:pPr>
             <a:r>
-              <a:rPr sz="1300" dirty="0">
+              <a:rPr sz="1200" b="0" i="0">
                 <a:solidFill>
                   <a:srgbClr val="2A1D33"/>
                 </a:solidFill>
                 <a:latin typeface="Calibri"/>
               </a:rPr>
-              <a:t>•  Availability on the desired date and time</a:t>
+              <a:t>•  Finding suitable event halls is difficult and time-consuming</a:t>
             </a:r>
           </a:p>
           <a:p>
@@ -4696,13 +9741,13 @@
               </a:spcAft>
             </a:pPr>
             <a:r>
-              <a:rPr sz="1300" dirty="0">
+              <a:rPr sz="1200" b="0" i="0">
                 <a:solidFill>
                   <a:srgbClr val="2A1D33"/>
                 </a:solidFill>
                 <a:latin typeface="Calibri"/>
               </a:rPr>
-              <a:t>•  Hall capacity</a:t>
+              <a:t>•  Customers lack centralized details on pricing, capacity &amp; amenities</a:t>
             </a:r>
           </a:p>
           <a:p>
@@ -4712,13 +9757,13 @@
               </a:spcAft>
             </a:pPr>
             <a:r>
-              <a:rPr sz="1300" dirty="0">
+              <a:rPr sz="1200" b="0" i="0">
                 <a:solidFill>
                   <a:srgbClr val="2A1D33"/>
                 </a:solidFill>
                 <a:latin typeface="Calibri"/>
               </a:rPr>
-              <a:t>•  Price</a:t>
+              <a:t>•  Checking real-time venue availability requires multiple visits</a:t>
             </a:r>
           </a:p>
           <a:p>
@@ -4728,13 +9773,29 @@
               </a:spcAft>
             </a:pPr>
             <a:r>
-              <a:rPr sz="1300" dirty="0">
+              <a:rPr sz="1200" b="0" i="0">
                 <a:solidFill>
                   <a:srgbClr val="2A1D33"/>
                 </a:solidFill>
                 <a:latin typeface="Calibri"/>
               </a:rPr>
-              <a:t>•  Facilities and amenities</a:t>
+              <a:t>•  Traditional booking processes are manual, slow, and inefficient</a:t>
+            </a:r>
+          </a:p>
+          <a:p>
+            <a:pPr>
+              <a:spcAft>
+                <a:spcPts val="500"/>
+              </a:spcAft>
+            </a:pPr>
+            <a:r>
+              <a:rPr sz="1200" b="0" i="0">
+                <a:solidFill>
+                  <a:srgbClr val="2A1D33"/>
+                </a:solidFill>
+                <a:latin typeface="Calibri"/>
+              </a:rPr>
+              <a:t>•  Hotel owners lack modern digital tools to manage halls &amp; schedules</a:t>
             </a:r>
           </a:p>
         </p:txBody>
@@ -4850,7 +9911,7 @@
                 </a:solidFill>
                 <a:latin typeface="Georgia"/>
               </a:rPr>
-              <a:t>HallHub puts it in one place</a:t>
+              <a:t>Unified venue booking &amp; management</a:t>
             </a:r>
           </a:p>
         </p:txBody>
@@ -4885,7 +9946,7 @@
                 </a:solidFill>
                 <a:latin typeface="Calibri"/>
               </a:rPr>
-              <a:t>Customers can search venues, view hall details, check availability, compare options, and submit a booking request without visiting the hotel first.</a:t>
+              <a:t>HallHub connects customers directly with approved hotels while providing hotel owners with tools to manage halls, bookings, appointments &amp; reports.</a:t>
             </a:r>
           </a:p>
         </p:txBody>
@@ -4918,13 +9979,13 @@
               </a:spcAft>
             </a:pPr>
             <a:r>
-              <a:rPr sz="1300" dirty="0">
+              <a:rPr sz="1200" b="0" i="0">
                 <a:solidFill>
                   <a:srgbClr val="C5A070"/>
                 </a:solidFill>
                 <a:latin typeface="Calibri"/>
               </a:rPr>
-              <a:t>•  Search and compare approved halls</a:t>
+              <a:t>•  One centralized platform for venue discovery and comparison</a:t>
             </a:r>
           </a:p>
           <a:p>
@@ -4934,13 +9995,13 @@
               </a:spcAft>
             </a:pPr>
             <a:r>
-              <a:rPr sz="1300" dirty="0">
+              <a:rPr sz="1200" b="0" i="0">
                 <a:solidFill>
                   <a:srgbClr val="C5A070"/>
                 </a:solidFill>
                 <a:latin typeface="Calibri"/>
               </a:rPr>
-              <a:t>•  See capacity, price, and facilities</a:t>
+              <a:t>•  Real-time hall details, pricing, capacities, amenities &amp; photos</a:t>
             </a:r>
           </a:p>
           <a:p>
@@ -4950,13 +10011,45 @@
               </a:spcAft>
             </a:pPr>
             <a:r>
-              <a:rPr sz="1300" dirty="0">
+              <a:rPr sz="1200" b="0" i="0">
                 <a:solidFill>
                   <a:srgbClr val="C5A070"/>
                 </a:solidFill>
                 <a:latin typeface="Calibri"/>
               </a:rPr>
-              <a:t>•  Request a booking online</a:t>
+              <a:t>•  Streamlined booking requests with date-conflict prevention</a:t>
+            </a:r>
+          </a:p>
+          <a:p>
+            <a:pPr>
+              <a:spcAft>
+                <a:spcPts val="500"/>
+              </a:spcAft>
+            </a:pPr>
+            <a:r>
+              <a:rPr sz="1200" b="0" i="0">
+                <a:solidFill>
+                  <a:srgbClr val="C5A070"/>
+                </a:solidFill>
+                <a:latin typeface="Calibri"/>
+              </a:rPr>
+              <a:t>•  On-site inspection appointment scheduling before finalization</a:t>
+            </a:r>
+          </a:p>
+          <a:p>
+            <a:pPr>
+              <a:spcAft>
+                <a:spcPts val="500"/>
+              </a:spcAft>
+            </a:pPr>
+            <a:r>
+              <a:rPr sz="1200" b="0" i="0">
+                <a:solidFill>
+                  <a:srgbClr val="C5A070"/>
+                </a:solidFill>
+                <a:latin typeface="Calibri"/>
+              </a:rPr>
+              <a:t>•  Dedicated owner portal for managing halls, bookings &amp; reports</a:t>
             </a:r>
           </a:p>
         </p:txBody>
@@ -5026,7 +10119,7 @@
                 </a:solidFill>
                 <a:latin typeface="Calibri"/>
               </a:rPr>
-              <a:t>02 / 07</a:t>
+              <a:t>02 / 08</a:t>
             </a:r>
           </a:p>
         </p:txBody>
@@ -11885,6 +16978,2786 @@
                 <a:latin typeface="Calibri"/>
               </a:rPr>
               <a:t>07 / 07</a:t>
+            </a:r>
+          </a:p>
+        </p:txBody>
+      </p:sp>
+    </p:spTree>
+  </p:cSld>
+  <p:clrMapOvr>
+    <a:masterClrMapping/>
+  </p:clrMapOvr>
+</p:sld>
+</file>
+
+<file path=ppt/slides/slide8.xml><?xml version="1.0" encoding="utf-8"?>
+<p:sld xmlns:a="http://schemas.openxmlformats.org/drawingml/2006/main" xmlns:p="http://schemas.openxmlformats.org/presentationml/2006/main" xmlns:r="http://schemas.openxmlformats.org/officeDocument/2006/relationships">
+  <p:cSld>
+    <p:spTree>
+      <p:nvGrpSpPr>
+        <p:cNvPr id="1" name=""/>
+        <p:cNvGrpSpPr/>
+        <p:nvPr/>
+      </p:nvGrpSpPr>
+      <p:grpSpPr/>
+      <p:sp>
+        <p:nvSpPr>
+          <p:cNvPr id="2" name="Rectangle 1"/>
+          <p:cNvSpPr/>
+          <p:nvPr/>
+        </p:nvSpPr>
+        <p:spPr>
+          <a:xfrm>
+            <a:off x="-15240" y="16439"/>
+            <a:ext cx="12191999" cy="6858000"/>
+          </a:xfrm>
+          <a:prstGeom prst="rect">
+            <a:avLst/>
+          </a:prstGeom>
+          <a:solidFill>
+            <a:srgbClr val="FAF7F9"/>
+          </a:solidFill>
+          <a:ln>
+            <a:noFill/>
+          </a:ln>
+        </p:spPr>
+        <p:style>
+          <a:lnRef idx="1">
+            <a:schemeClr val="accent1"/>
+          </a:lnRef>
+          <a:fillRef idx="3">
+            <a:schemeClr val="accent1"/>
+          </a:fillRef>
+          <a:effectRef idx="2">
+            <a:schemeClr val="accent1"/>
+          </a:effectRef>
+          <a:fontRef idx="minor">
+            <a:schemeClr val="lt1"/>
+          </a:fontRef>
+        </p:style>
+        <p:txBody>
+          <a:bodyPr rtlCol="0" anchor="ctr"/>
+          <a:lstStyle/>
+          <a:p>
+            <a:pPr algn="ctr"/>
+            <a:endParaRPr dirty="0"/>
+          </a:p>
+        </p:txBody>
+      </p:sp>
+      <p:sp>
+        <p:nvSpPr>
+          <p:cNvPr id="3" name="Rounded Rectangle 2"/>
+          <p:cNvSpPr/>
+          <p:nvPr/>
+        </p:nvSpPr>
+        <p:spPr>
+          <a:xfrm>
+            <a:off x="365760" y="256032"/>
+            <a:ext cx="11430000" cy="566928"/>
+          </a:xfrm>
+          <a:prstGeom prst="roundRect">
+            <a:avLst>
+              <a:gd name="adj" fmla="val 50000"/>
+            </a:avLst>
+          </a:prstGeom>
+          <a:solidFill>
+            <a:srgbClr val="FFFFFF"/>
+          </a:solidFill>
+          <a:ln w="12700">
+            <a:solidFill>
+              <a:srgbClr val="D4B37A"/>
+            </a:solidFill>
+          </a:ln>
+        </p:spPr>
+        <p:style>
+          <a:lnRef idx="1">
+            <a:schemeClr val="accent1"/>
+          </a:lnRef>
+          <a:fillRef idx="3">
+            <a:schemeClr val="accent1"/>
+          </a:fillRef>
+          <a:effectRef idx="2">
+            <a:schemeClr val="accent1"/>
+          </a:effectRef>
+          <a:fontRef idx="minor">
+            <a:schemeClr val="lt1"/>
+          </a:fontRef>
+        </p:style>
+        <p:txBody>
+          <a:bodyPr rtlCol="0" anchor="ctr"/>
+          <a:lstStyle/>
+          <a:p>
+            <a:pPr algn="ctr"/>
+            <a:endParaRPr/>
+          </a:p>
+        </p:txBody>
+      </p:sp>
+      <p:sp>
+        <p:nvSpPr>
+          <p:cNvPr id="4" name="Rounded Rectangle 3"/>
+          <p:cNvSpPr/>
+          <p:nvPr/>
+        </p:nvSpPr>
+        <p:spPr>
+          <a:xfrm>
+            <a:off x="457200" y="329184"/>
+            <a:ext cx="1325880" cy="420624"/>
+          </a:xfrm>
+          <a:prstGeom prst="roundRect">
+            <a:avLst>
+              <a:gd name="adj" fmla="val 50000"/>
+            </a:avLst>
+          </a:prstGeom>
+          <a:solidFill>
+            <a:srgbClr val="4A2040"/>
+          </a:solidFill>
+          <a:ln w="12700">
+            <a:solidFill>
+              <a:srgbClr val="D4B37A"/>
+            </a:solidFill>
+          </a:ln>
+        </p:spPr>
+        <p:style>
+          <a:lnRef idx="1">
+            <a:schemeClr val="accent1"/>
+          </a:lnRef>
+          <a:fillRef idx="3">
+            <a:schemeClr val="accent1"/>
+          </a:fillRef>
+          <a:effectRef idx="2">
+            <a:schemeClr val="accent1"/>
+          </a:effectRef>
+          <a:fontRef idx="minor">
+            <a:schemeClr val="lt1"/>
+          </a:fontRef>
+        </p:style>
+        <p:txBody>
+          <a:bodyPr rtlCol="0" anchor="ctr"/>
+          <a:lstStyle/>
+          <a:p>
+            <a:pPr algn="ctr"/>
+            <a:endParaRPr/>
+          </a:p>
+        </p:txBody>
+      </p:sp>
+      <p:sp>
+        <p:nvSpPr>
+          <p:cNvPr id="5" name="TextBox 4"/>
+          <p:cNvSpPr txBox="1"/>
+          <p:nvPr/>
+        </p:nvSpPr>
+        <p:spPr>
+          <a:xfrm>
+            <a:off x="457200" y="384048"/>
+            <a:ext cx="1325880" cy="310896"/>
+          </a:xfrm>
+          <a:prstGeom prst="rect">
+            <a:avLst/>
+          </a:prstGeom>
+          <a:noFill/>
+        </p:spPr>
+        <p:txBody>
+          <a:bodyPr wrap="square">
+            <a:spAutoFit/>
+          </a:bodyPr>
+          <a:lstStyle/>
+          <a:p>
+            <a:pPr algn="ctr"/>
+            <a:r>
+              <a:rPr sz="1300" b="0">
+                <a:solidFill>
+                  <a:srgbClr val="FFFFFF"/>
+                </a:solidFill>
+                <a:latin typeface="Georgia"/>
+              </a:rPr>
+              <a:t>HallHub</a:t>
+            </a:r>
+          </a:p>
+        </p:txBody>
+      </p:sp>
+      <p:sp>
+        <p:nvSpPr>
+          <p:cNvPr id="6" name="TextBox 5"/>
+          <p:cNvSpPr txBox="1"/>
+          <p:nvPr/>
+        </p:nvSpPr>
+        <p:spPr>
+          <a:xfrm>
+            <a:off x="1965960" y="365760"/>
+            <a:ext cx="1000000" cy="310896"/>
+          </a:xfrm>
+          <a:prstGeom prst="rect">
+            <a:avLst/>
+          </a:prstGeom>
+          <a:noFill/>
+        </p:spPr>
+        <p:txBody>
+          <a:bodyPr wrap="none" lIns="0" tIns="0" rIns="0" bIns="0">
+            <a:spAutoFit/>
+          </a:bodyPr>
+          <a:lstStyle/>
+          <a:p>
+            <a:r>
+              <a:rPr sz="1100" b="1">
+                <a:solidFill>
+                  <a:srgbClr val="4A2040"/>
+                </a:solidFill>
+                <a:latin typeface="Calibri"/>
+              </a:rPr>
+              <a:t>HallHub</a:t>
+            </a:r>
+          </a:p>
+        </p:txBody>
+      </p:sp>
+      <p:sp>
+        <p:nvSpPr>
+          <p:cNvPr id="7" name="TextBox 6"/>
+          <p:cNvSpPr txBox="1"/>
+          <p:nvPr/>
+        </p:nvSpPr>
+        <p:spPr>
+          <a:xfrm>
+            <a:off x="3000000" y="365760"/>
+            <a:ext cx="1000000" cy="310896"/>
+          </a:xfrm>
+          <a:prstGeom prst="rect">
+            <a:avLst/>
+          </a:prstGeom>
+          <a:noFill/>
+        </p:spPr>
+        <p:txBody>
+          <a:bodyPr wrap="none" lIns="0" tIns="0" rIns="0" bIns="0">
+            <a:spAutoFit/>
+          </a:bodyPr>
+          <a:lstStyle/>
+          <a:p>
+            <a:r>
+              <a:rPr sz="1100" b="1">
+                <a:solidFill>
+                  <a:srgbClr val="4A2040"/>
+                </a:solidFill>
+                <a:latin typeface="Calibri"/>
+              </a:rPr>
+              <a:t>Problem</a:t>
+            </a:r>
+          </a:p>
+        </p:txBody>
+      </p:sp>
+      <p:sp>
+        <p:nvSpPr>
+          <p:cNvPr id="8" name="TextBox 7"/>
+          <p:cNvSpPr txBox="1"/>
+          <p:nvPr/>
+        </p:nvSpPr>
+        <p:spPr>
+          <a:xfrm>
+            <a:off x="4050000" y="365760"/>
+            <a:ext cx="1000000" cy="310896"/>
+          </a:xfrm>
+          <a:prstGeom prst="rect">
+            <a:avLst/>
+          </a:prstGeom>
+          <a:noFill/>
+        </p:spPr>
+        <p:txBody>
+          <a:bodyPr wrap="none" lIns="0" tIns="0" rIns="0" bIns="0">
+            <a:spAutoFit/>
+          </a:bodyPr>
+          <a:lstStyle/>
+          <a:p>
+            <a:r>
+              <a:rPr sz="1100" b="1">
+                <a:solidFill>
+                  <a:srgbClr val="7A3A6A"/>
+                </a:solidFill>
+                <a:latin typeface="Calibri"/>
+              </a:rPr>
+              <a:t>Values</a:t>
+            </a:r>
+          </a:p>
+        </p:txBody>
+      </p:sp>
+      <p:sp>
+        <p:nvSpPr>
+          <p:cNvPr id="9" name="Rectangle 8"/>
+          <p:cNvSpPr/>
+          <p:nvPr/>
+        </p:nvSpPr>
+        <p:spPr>
+          <a:xfrm>
+            <a:off x="4090000" y="676656"/>
+            <a:ext cx="520000" cy="16459"/>
+          </a:xfrm>
+          <a:prstGeom prst="rect">
+            <a:avLst/>
+          </a:prstGeom>
+          <a:solidFill>
+            <a:srgbClr val="4A2040"/>
+          </a:solidFill>
+          <a:ln>
+            <a:noFill/>
+          </a:ln>
+        </p:spPr>
+        <p:style>
+          <a:lnRef idx="1">
+            <a:schemeClr val="accent1"/>
+          </a:lnRef>
+          <a:fillRef idx="3">
+            <a:schemeClr val="accent1"/>
+          </a:fillRef>
+          <a:effectRef idx="2">
+            <a:schemeClr val="accent1"/>
+          </a:effectRef>
+          <a:fontRef idx="minor">
+            <a:schemeClr val="lt1"/>
+          </a:fontRef>
+        </p:style>
+        <p:txBody>
+          <a:bodyPr rtlCol="0" anchor="ctr"/>
+          <a:lstStyle/>
+          <a:p>
+            <a:pPr algn="ctr"/>
+          </a:p>
+        </p:txBody>
+      </p:sp>
+      <p:sp>
+        <p:nvSpPr>
+          <p:cNvPr id="10" name="TextBox 9"/>
+          <p:cNvSpPr txBox="1"/>
+          <p:nvPr/>
+        </p:nvSpPr>
+        <p:spPr>
+          <a:xfrm>
+            <a:off x="5000000" y="365760"/>
+            <a:ext cx="1000000" cy="310896"/>
+          </a:xfrm>
+          <a:prstGeom prst="rect">
+            <a:avLst/>
+          </a:prstGeom>
+          <a:noFill/>
+        </p:spPr>
+        <p:txBody>
+          <a:bodyPr wrap="none" lIns="0" tIns="0" rIns="0" bIns="0">
+            <a:spAutoFit/>
+          </a:bodyPr>
+          <a:lstStyle/>
+          <a:p>
+            <a:r>
+              <a:rPr sz="1100" b="1">
+                <a:solidFill>
+                  <a:srgbClr val="4A2040"/>
+                </a:solidFill>
+                <a:latin typeface="Calibri"/>
+              </a:rPr>
+              <a:t>Market</a:t>
+            </a:r>
+          </a:p>
+        </p:txBody>
+      </p:sp>
+      <p:sp>
+        <p:nvSpPr>
+          <p:cNvPr id="11" name="TextBox 10"/>
+          <p:cNvSpPr txBox="1"/>
+          <p:nvPr/>
+        </p:nvSpPr>
+        <p:spPr>
+          <a:xfrm>
+            <a:off x="5950000" y="365760"/>
+            <a:ext cx="1000000" cy="310896"/>
+          </a:xfrm>
+          <a:prstGeom prst="rect">
+            <a:avLst/>
+          </a:prstGeom>
+          <a:noFill/>
+        </p:spPr>
+        <p:txBody>
+          <a:bodyPr wrap="none" lIns="0" tIns="0" rIns="0" bIns="0">
+            <a:spAutoFit/>
+          </a:bodyPr>
+          <a:lstStyle/>
+          <a:p>
+            <a:r>
+              <a:rPr sz="1100" b="1">
+                <a:solidFill>
+                  <a:srgbClr val="4A2040"/>
+                </a:solidFill>
+                <a:latin typeface="Calibri"/>
+              </a:rPr>
+              <a:t>Revenue</a:t>
+            </a:r>
+          </a:p>
+        </p:txBody>
+      </p:sp>
+      <p:sp>
+        <p:nvSpPr>
+          <p:cNvPr id="12" name="TextBox 11"/>
+          <p:cNvSpPr txBox="1"/>
+          <p:nvPr/>
+        </p:nvSpPr>
+        <p:spPr>
+          <a:xfrm>
+            <a:off x="7000000" y="365760"/>
+            <a:ext cx="1000000" cy="310896"/>
+          </a:xfrm>
+          <a:prstGeom prst="rect">
+            <a:avLst/>
+          </a:prstGeom>
+          <a:noFill/>
+        </p:spPr>
+        <p:txBody>
+          <a:bodyPr wrap="none" lIns="0" tIns="0" rIns="0" bIns="0">
+            <a:spAutoFit/>
+          </a:bodyPr>
+          <a:lstStyle/>
+          <a:p>
+            <a:r>
+              <a:rPr sz="1100" b="1">
+                <a:solidFill>
+                  <a:srgbClr val="4A2040"/>
+                </a:solidFill>
+                <a:latin typeface="Calibri"/>
+              </a:rPr>
+              <a:t>Advantage</a:t>
+            </a:r>
+          </a:p>
+        </p:txBody>
+      </p:sp>
+      <p:sp>
+        <p:nvSpPr>
+          <p:cNvPr id="13" name="TextBox 12"/>
+          <p:cNvSpPr txBox="1"/>
+          <p:nvPr/>
+        </p:nvSpPr>
+        <p:spPr>
+          <a:xfrm>
+            <a:off x="8150000" y="365760"/>
+            <a:ext cx="1000000" cy="310896"/>
+          </a:xfrm>
+          <a:prstGeom prst="rect">
+            <a:avLst/>
+          </a:prstGeom>
+          <a:noFill/>
+        </p:spPr>
+        <p:txBody>
+          <a:bodyPr wrap="none" lIns="0" tIns="0" rIns="0" bIns="0">
+            <a:spAutoFit/>
+          </a:bodyPr>
+          <a:lstStyle/>
+          <a:p>
+            <a:r>
+              <a:rPr sz="1100" b="1">
+                <a:solidFill>
+                  <a:srgbClr val="4A2040"/>
+                </a:solidFill>
+                <a:latin typeface="Calibri"/>
+              </a:rPr>
+              <a:t>Product</a:t>
+            </a:r>
+          </a:p>
+        </p:txBody>
+      </p:sp>
+      <p:sp>
+        <p:nvSpPr>
+          <p:cNvPr id="14" name="TextBox 13"/>
+          <p:cNvSpPr txBox="1"/>
+          <p:nvPr/>
+        </p:nvSpPr>
+        <p:spPr>
+          <a:xfrm>
+            <a:off x="9250000" y="365760"/>
+            <a:ext cx="1000000" cy="310896"/>
+          </a:xfrm>
+          <a:prstGeom prst="rect">
+            <a:avLst/>
+          </a:prstGeom>
+          <a:noFill/>
+        </p:spPr>
+        <p:txBody>
+          <a:bodyPr wrap="none" lIns="0" tIns="0" rIns="0" bIns="0">
+            <a:spAutoFit/>
+          </a:bodyPr>
+          <a:lstStyle/>
+          <a:p>
+            <a:r>
+              <a:rPr sz="1100" b="1">
+                <a:solidFill>
+                  <a:srgbClr val="4A2040"/>
+                </a:solidFill>
+                <a:latin typeface="Calibri"/>
+              </a:rPr>
+              <a:t>Vision</a:t>
+            </a:r>
+          </a:p>
+        </p:txBody>
+      </p:sp>
+      <p:sp>
+        <p:nvSpPr>
+          <p:cNvPr id="14" name="Rectangle 13"/>
+          <p:cNvSpPr/>
+          <p:nvPr/>
+        </p:nvSpPr>
+        <p:spPr>
+          <a:xfrm>
+            <a:off x="457200" y="1042416"/>
+            <a:ext cx="201168" cy="13716"/>
+          </a:xfrm>
+          <a:prstGeom prst="rect">
+            <a:avLst/>
+          </a:prstGeom>
+          <a:solidFill>
+            <a:srgbClr val="C5A070"/>
+          </a:solidFill>
+          <a:ln>
+            <a:noFill/>
+          </a:ln>
+        </p:spPr>
+        <p:style>
+          <a:lnRef idx="1">
+            <a:schemeClr val="accent1"/>
+          </a:lnRef>
+          <a:fillRef idx="3">
+            <a:schemeClr val="accent1"/>
+          </a:fillRef>
+          <a:effectRef idx="2">
+            <a:schemeClr val="accent1"/>
+          </a:effectRef>
+          <a:fontRef idx="minor">
+            <a:schemeClr val="lt1"/>
+          </a:fontRef>
+        </p:style>
+        <p:txBody>
+          <a:bodyPr rtlCol="0" anchor="ctr"/>
+          <a:lstStyle/>
+          <a:p>
+            <a:pPr algn="ctr"/>
+            <a:endParaRPr/>
+          </a:p>
+        </p:txBody>
+      </p:sp>
+      <p:sp>
+        <p:nvSpPr>
+          <p:cNvPr id="15" name="TextBox 14"/>
+          <p:cNvSpPr txBox="1"/>
+          <p:nvPr/>
+        </p:nvSpPr>
+        <p:spPr>
+          <a:xfrm>
+            <a:off x="731520" y="960120"/>
+            <a:ext cx="9144000" cy="256032"/>
+          </a:xfrm>
+          <a:prstGeom prst="rect">
+            <a:avLst/>
+          </a:prstGeom>
+          <a:noFill/>
+        </p:spPr>
+        <p:txBody>
+          <a:bodyPr wrap="none" lIns="0" tIns="0" rIns="0" bIns="0">
+            <a:spAutoFit/>
+          </a:bodyPr>
+          <a:lstStyle/>
+          <a:p>
+            <a:r>
+              <a:rPr sz="1200" b="1" i="0">
+                <a:solidFill>
+                  <a:srgbClr val="C5A070"/>
+                </a:solidFill>
+                <a:latin typeface="Calibri"/>
+              </a:rPr>
+              <a:t>03  —  VALUE PROPOSITION</a:t>
+            </a:r>
+          </a:p>
+        </p:txBody>
+      </p:sp>
+      <p:sp>
+        <p:nvSpPr>
+          <p:cNvPr id="16" name="TextBox 15"/>
+          <p:cNvSpPr txBox="1"/>
+          <p:nvPr/>
+        </p:nvSpPr>
+        <p:spPr>
+          <a:xfrm>
+            <a:off x="457200" y="1207008"/>
+            <a:ext cx="10972800" cy="420000"/>
+          </a:xfrm>
+          <a:prstGeom prst="rect">
+            <a:avLst/>
+          </a:prstGeom>
+          <a:noFill/>
+        </p:spPr>
+        <p:txBody>
+          <a:bodyPr wrap="none" lIns="0" tIns="0" rIns="0" bIns="0">
+            <a:spAutoFit/>
+          </a:bodyPr>
+          <a:lstStyle/>
+          <a:p>
+            <a:r>
+              <a:rPr sz="2500" b="1" i="0">
+                <a:solidFill>
+                  <a:srgbClr val="4A2040"/>
+                </a:solidFill>
+                <a:latin typeface="Georgia"/>
+              </a:rPr>
+              <a:t>Delivering value for both customers and venue owners</a:t>
+            </a:r>
+          </a:p>
+        </p:txBody>
+      </p:sp>
+      <p:sp>
+        <p:nvSpPr>
+          <p:cNvPr id="28" name="TextBox 27"/>
+          <p:cNvSpPr txBox="1"/>
+          <p:nvPr/>
+        </p:nvSpPr>
+        <p:spPr>
+          <a:xfrm>
+            <a:off x="640080" y="6510528"/>
+            <a:ext cx="2743200" cy="256032"/>
+          </a:xfrm>
+          <a:prstGeom prst="rect">
+            <a:avLst/>
+          </a:prstGeom>
+          <a:noFill/>
+        </p:spPr>
+        <p:txBody>
+          <a:bodyPr wrap="square">
+            <a:spAutoFit/>
+          </a:bodyPr>
+          <a:lstStyle/>
+          <a:p>
+            <a:pPr algn="l"/>
+            <a:r>
+              <a:rPr sz="1300" b="1">
+                <a:solidFill>
+                  <a:srgbClr val="4A2040"/>
+                </a:solidFill>
+                <a:latin typeface="Georgia"/>
+              </a:rPr>
+              <a:t>HallHub</a:t>
+            </a:r>
+          </a:p>
+        </p:txBody>
+      </p:sp>
+      <p:sp>
+        <p:nvSpPr>
+          <p:cNvPr id="29" name="TextBox 28"/>
+          <p:cNvSpPr txBox="1"/>
+          <p:nvPr/>
+        </p:nvSpPr>
+        <p:spPr>
+          <a:xfrm>
+            <a:off x="10241280" y="6510528"/>
+            <a:ext cx="1280160" cy="256032"/>
+          </a:xfrm>
+          <a:prstGeom prst="rect">
+            <a:avLst/>
+          </a:prstGeom>
+          <a:noFill/>
+        </p:spPr>
+        <p:txBody>
+          <a:bodyPr wrap="none" lIns="0" tIns="0" rIns="0" bIns="0">
+            <a:spAutoFit/>
+          </a:bodyPr>
+          <a:lstStyle/>
+          <a:p>
+            <a:r>
+              <a:rPr sz="1200" b="0" i="0">
+                <a:solidFill>
+                  <a:srgbClr val="6B6570"/>
+                </a:solidFill>
+                <a:latin typeface="Calibri"/>
+              </a:rPr>
+              <a:t>03 / 08</a:t>
+            </a:r>
+          </a:p>
+        </p:txBody>
+      </p:sp>
+      <p:sp>
+        <p:nvSpPr>
+          <p:cNvPr id="17" name="Rounded Rectangle 16"/>
+          <p:cNvSpPr/>
+          <p:nvPr/>
+        </p:nvSpPr>
+        <p:spPr>
+          <a:xfrm>
+            <a:off x="457200" y="1737360"/>
+            <a:ext cx="5532120" cy="3500000"/>
+          </a:xfrm>
+          <a:prstGeom prst="roundRect">
+            <a:avLst>
+              <a:gd name="adj" fmla="val 8000"/>
+            </a:avLst>
+          </a:prstGeom>
+          <a:solidFill>
+            <a:srgbClr val="FFFDFB"/>
+          </a:solidFill>
+          <a:ln w="12700">
+            <a:solidFill>
+              <a:srgbClr val="EAD9C2"/>
+            </a:solidFill>
+          </a:ln>
+        </p:spPr>
+        <p:style>
+          <a:lnRef idx="1">
+            <a:schemeClr val="accent1"/>
+          </a:lnRef>
+          <a:fillRef idx="3">
+            <a:schemeClr val="accent1"/>
+          </a:fillRef>
+          <a:effectRef idx="2">
+            <a:schemeClr val="accent1"/>
+          </a:effectRef>
+          <a:fontRef idx="minor">
+            <a:schemeClr val="lt1"/>
+          </a:fontRef>
+        </p:style>
+        <p:txBody>
+          <a:bodyPr rtlCol="0" anchor="ctr"/>
+          <a:lstStyle/>
+          <a:p>
+            <a:pPr algn="ctr"/>
+            <a:endParaRPr dirty="0"/>
+          </a:p>
+        </p:txBody>
+      </p:sp>
+      <p:sp>
+        <p:nvSpPr>
+          <p:cNvPr id="18" name="Rounded Rectangle 17"/>
+          <p:cNvSpPr/>
+          <p:nvPr/>
+        </p:nvSpPr>
+        <p:spPr>
+          <a:xfrm>
+            <a:off x="749808" y="1917360"/>
+            <a:ext cx="502920" cy="54864"/>
+          </a:xfrm>
+          <a:prstGeom prst="roundRect">
+            <a:avLst>
+              <a:gd name="adj" fmla="val 50000"/>
+            </a:avLst>
+          </a:prstGeom>
+          <a:solidFill>
+            <a:srgbClr val="C5A070"/>
+          </a:solidFill>
+          <a:ln>
+            <a:noFill/>
+          </a:ln>
+        </p:spPr>
+        <p:style>
+          <a:lnRef idx="1">
+            <a:schemeClr val="accent1"/>
+          </a:lnRef>
+          <a:fillRef idx="3">
+            <a:schemeClr val="accent1"/>
+          </a:fillRef>
+          <a:effectRef idx="2">
+            <a:schemeClr val="accent1"/>
+          </a:effectRef>
+          <a:fontRef idx="minor">
+            <a:schemeClr val="lt1"/>
+          </a:fontRef>
+        </p:style>
+        <p:txBody>
+          <a:bodyPr rtlCol="0" anchor="ctr"/>
+          <a:lstStyle/>
+          <a:p>
+            <a:pPr algn="ctr"/>
+            <a:endParaRPr/>
+          </a:p>
+        </p:txBody>
+      </p:sp>
+      <p:sp>
+        <p:nvSpPr>
+          <p:cNvPr id="30" name="TextBox 29"/>
+          <p:cNvSpPr txBox="1"/>
+          <p:nvPr/>
+        </p:nvSpPr>
+        <p:spPr>
+          <a:xfrm>
+            <a:off x="749808" y="2057360"/>
+            <a:ext cx="4900000" cy="260000"/>
+          </a:xfrm>
+          <a:prstGeom prst="rect">
+            <a:avLst/>
+          </a:prstGeom>
+          <a:noFill/>
+        </p:spPr>
+        <p:txBody>
+          <a:bodyPr wrap="none">
+            <a:spAutoFit/>
+          </a:bodyPr>
+          <a:lstStyle/>
+          <a:p>
+            <a:r>
+              <a:rPr sz="1200" b="1" i="0">
+                <a:solidFill>
+                  <a:srgbClr val="C5A070"/>
+                </a:solidFill>
+                <a:latin typeface="Calibri"/>
+              </a:rPr>
+              <a:t>FOR CUSTOMERS</a:t>
+            </a:r>
+          </a:p>
+        </p:txBody>
+      </p:sp>
+      <p:sp>
+        <p:nvSpPr>
+          <p:cNvPr id="31" name="TextBox 30"/>
+          <p:cNvSpPr txBox="1"/>
+          <p:nvPr/>
+        </p:nvSpPr>
+        <p:spPr>
+          <a:xfrm>
+            <a:off x="749808" y="2337360"/>
+            <a:ext cx="4900000" cy="400000"/>
+          </a:xfrm>
+          <a:prstGeom prst="rect">
+            <a:avLst/>
+          </a:prstGeom>
+          <a:noFill/>
+        </p:spPr>
+        <p:txBody>
+          <a:bodyPr wrap="none">
+            <a:spAutoFit/>
+          </a:bodyPr>
+          <a:lstStyle/>
+          <a:p>
+            <a:r>
+              <a:rPr sz="2200" b="1" i="0">
+                <a:solidFill>
+                  <a:srgbClr val="4A2040"/>
+                </a:solidFill>
+                <a:latin typeface="Georgia"/>
+              </a:rPr>
+              <a:t>Effortless Venue Discovery</a:t>
+            </a:r>
+          </a:p>
+        </p:txBody>
+      </p:sp>
+      <p:sp>
+        <p:nvSpPr>
+          <p:cNvPr id="32" name="TextBox 31"/>
+          <p:cNvSpPr txBox="1"/>
+          <p:nvPr/>
+        </p:nvSpPr>
+        <p:spPr>
+          <a:xfrm>
+            <a:off x="749808" y="2837360"/>
+            <a:ext cx="4900000" cy="2200000"/>
+          </a:xfrm>
+          <a:prstGeom prst="rect">
+            <a:avLst/>
+          </a:prstGeom>
+          <a:noFill/>
+        </p:spPr>
+        <p:txBody>
+          <a:bodyPr wrap="none">
+            <a:spAutoFit/>
+          </a:bodyPr>
+          <a:lstStyle/>
+          <a:p>
+            <a:pPr>
+              <a:spcAft>
+                <a:spcPts val="400"/>
+              </a:spcAft>
+            </a:pPr>
+            <a:r>
+              <a:rPr sz="1200" b="0" i="0">
+                <a:solidFill>
+                  <a:srgbClr val="2A1D33"/>
+                </a:solidFill>
+                <a:latin typeface="Calibri"/>
+              </a:rPr>
+              <a:t>•  Discover multiple verified halls in one centralized platform</a:t>
+            </a:r>
+          </a:p>
+          <a:p>
+            <a:pPr>
+              <a:spcAft>
+                <a:spcPts val="400"/>
+              </a:spcAft>
+            </a:pPr>
+            <a:r>
+              <a:rPr sz="1200" b="0" i="0">
+                <a:solidFill>
+                  <a:srgbClr val="2A1D33"/>
+                </a:solidFill>
+                <a:latin typeface="Calibri"/>
+              </a:rPr>
+              <a:t>•  Search &amp; filter based on capacity, budget, amenities &amp; location</a:t>
+            </a:r>
+          </a:p>
+          <a:p>
+            <a:pPr>
+              <a:spcAft>
+                <a:spcPts val="400"/>
+              </a:spcAft>
+            </a:pPr>
+            <a:r>
+              <a:rPr sz="1200" b="0" i="0">
+                <a:solidFill>
+                  <a:srgbClr val="2A1D33"/>
+                </a:solidFill>
+                <a:latin typeface="Calibri"/>
+              </a:rPr>
+              <a:t>•  View transparent hall details, pricing, photos &amp; availability</a:t>
+            </a:r>
+          </a:p>
+          <a:p>
+            <a:pPr>
+              <a:spcAft>
+                <a:spcPts val="400"/>
+              </a:spcAft>
+            </a:pPr>
+            <a:r>
+              <a:rPr sz="1200" b="0" i="0">
+                <a:solidFill>
+                  <a:srgbClr val="2A1D33"/>
+                </a:solidFill>
+                <a:latin typeface="Calibri"/>
+              </a:rPr>
+              <a:t>•  Submit and track booking requests with date-conflict protection</a:t>
+            </a:r>
+          </a:p>
+          <a:p>
+            <a:pPr>
+              <a:spcAft>
+                <a:spcPts val="400"/>
+              </a:spcAft>
+            </a:pPr>
+            <a:r>
+              <a:rPr sz="1200" b="0" i="0">
+                <a:solidFill>
+                  <a:srgbClr val="2A1D33"/>
+                </a:solidFill>
+                <a:latin typeface="Calibri"/>
+              </a:rPr>
+              <a:t>•  Schedule in-person inspection appointments before confirmation</a:t>
+            </a:r>
+          </a:p>
+          <a:p>
+            <a:pPr>
+              <a:spcAft>
+                <a:spcPts val="400"/>
+              </a:spcAft>
+            </a:pPr>
+            <a:r>
+              <a:rPr sz="1200" b="0" i="0">
+                <a:solidFill>
+                  <a:srgbClr val="2A1D33"/>
+                </a:solidFill>
+                <a:latin typeface="Calibri"/>
+              </a:rPr>
+              <a:t>•  Significantly reduces the time, cost, and effort to find a venue</a:t>
+            </a:r>
+          </a:p>
+        </p:txBody>
+      </p:sp>
+      <p:sp>
+        <p:nvSpPr>
+          <p:cNvPr id="17" name="Rounded Rectangle 16"/>
+          <p:cNvSpPr/>
+          <p:nvPr/>
+        </p:nvSpPr>
+        <p:spPr>
+          <a:xfrm>
+            <a:off x="6217920" y="1737360"/>
+            <a:ext cx="5532120" cy="3500000"/>
+          </a:xfrm>
+          <a:prstGeom prst="roundRect">
+            <a:avLst>
+              <a:gd name="adj" fmla="val 8000"/>
+            </a:avLst>
+          </a:prstGeom>
+          <a:solidFill>
+            <a:srgbClr val="FFFDFB"/>
+          </a:solidFill>
+          <a:ln w="12700">
+            <a:solidFill>
+              <a:srgbClr val="EAD9C2"/>
+            </a:solidFill>
+          </a:ln>
+        </p:spPr>
+        <p:style>
+          <a:lnRef idx="1">
+            <a:schemeClr val="accent1"/>
+          </a:lnRef>
+          <a:fillRef idx="3">
+            <a:schemeClr val="accent1"/>
+          </a:fillRef>
+          <a:effectRef idx="2">
+            <a:schemeClr val="accent1"/>
+          </a:effectRef>
+          <a:fontRef idx="minor">
+            <a:schemeClr val="lt1"/>
+          </a:fontRef>
+        </p:style>
+        <p:txBody>
+          <a:bodyPr rtlCol="0" anchor="ctr"/>
+          <a:lstStyle/>
+          <a:p>
+            <a:pPr algn="ctr"/>
+            <a:endParaRPr dirty="0"/>
+          </a:p>
+        </p:txBody>
+      </p:sp>
+      <p:sp>
+        <p:nvSpPr>
+          <p:cNvPr id="18" name="Rounded Rectangle 17"/>
+          <p:cNvSpPr/>
+          <p:nvPr/>
+        </p:nvSpPr>
+        <p:spPr>
+          <a:xfrm>
+            <a:off x="6510528" y="1917360"/>
+            <a:ext cx="502920" cy="54864"/>
+          </a:xfrm>
+          <a:prstGeom prst="roundRect">
+            <a:avLst>
+              <a:gd name="adj" fmla="val 50000"/>
+            </a:avLst>
+          </a:prstGeom>
+          <a:solidFill>
+            <a:srgbClr val="C5A070"/>
+          </a:solidFill>
+          <a:ln>
+            <a:noFill/>
+          </a:ln>
+        </p:spPr>
+        <p:style>
+          <a:lnRef idx="1">
+            <a:schemeClr val="accent1"/>
+          </a:lnRef>
+          <a:fillRef idx="3">
+            <a:schemeClr val="accent1"/>
+          </a:fillRef>
+          <a:effectRef idx="2">
+            <a:schemeClr val="accent1"/>
+          </a:effectRef>
+          <a:fontRef idx="minor">
+            <a:schemeClr val="lt1"/>
+          </a:fontRef>
+        </p:style>
+        <p:txBody>
+          <a:bodyPr rtlCol="0" anchor="ctr"/>
+          <a:lstStyle/>
+          <a:p>
+            <a:pPr algn="ctr"/>
+            <a:endParaRPr/>
+          </a:p>
+        </p:txBody>
+      </p:sp>
+      <p:sp>
+        <p:nvSpPr>
+          <p:cNvPr id="33" name="TextBox 32"/>
+          <p:cNvSpPr txBox="1"/>
+          <p:nvPr/>
+        </p:nvSpPr>
+        <p:spPr>
+          <a:xfrm>
+            <a:off x="6510528" y="2057360"/>
+            <a:ext cx="4900000" cy="260000"/>
+          </a:xfrm>
+          <a:prstGeom prst="rect">
+            <a:avLst/>
+          </a:prstGeom>
+          <a:noFill/>
+        </p:spPr>
+        <p:txBody>
+          <a:bodyPr wrap="none">
+            <a:spAutoFit/>
+          </a:bodyPr>
+          <a:lstStyle/>
+          <a:p>
+            <a:r>
+              <a:rPr sz="1200" b="1" i="0">
+                <a:solidFill>
+                  <a:srgbClr val="C5A070"/>
+                </a:solidFill>
+                <a:latin typeface="Calibri"/>
+              </a:rPr>
+              <a:t>FOR HOTEL OWNERS</a:t>
+            </a:r>
+          </a:p>
+        </p:txBody>
+      </p:sp>
+      <p:sp>
+        <p:nvSpPr>
+          <p:cNvPr id="34" name="TextBox 33"/>
+          <p:cNvSpPr txBox="1"/>
+          <p:nvPr/>
+        </p:nvSpPr>
+        <p:spPr>
+          <a:xfrm>
+            <a:off x="6510528" y="2337360"/>
+            <a:ext cx="4900000" cy="400000"/>
+          </a:xfrm>
+          <a:prstGeom prst="rect">
+            <a:avLst/>
+          </a:prstGeom>
+          <a:noFill/>
+        </p:spPr>
+        <p:txBody>
+          <a:bodyPr wrap="none">
+            <a:spAutoFit/>
+          </a:bodyPr>
+          <a:lstStyle/>
+          <a:p>
+            <a:r>
+              <a:rPr sz="2200" b="1" i="0">
+                <a:solidFill>
+                  <a:srgbClr val="4A2040"/>
+                </a:solidFill>
+                <a:latin typeface="Georgia"/>
+              </a:rPr>
+              <a:t>End-to-End Venue Management</a:t>
+            </a:r>
+          </a:p>
+        </p:txBody>
+      </p:sp>
+      <p:sp>
+        <p:nvSpPr>
+          <p:cNvPr id="35" name="TextBox 34"/>
+          <p:cNvSpPr txBox="1"/>
+          <p:nvPr/>
+        </p:nvSpPr>
+        <p:spPr>
+          <a:xfrm>
+            <a:off x="6510528" y="2837360"/>
+            <a:ext cx="4900000" cy="2200000"/>
+          </a:xfrm>
+          <a:prstGeom prst="rect">
+            <a:avLst/>
+          </a:prstGeom>
+          <a:noFill/>
+        </p:spPr>
+        <p:txBody>
+          <a:bodyPr wrap="none">
+            <a:spAutoFit/>
+          </a:bodyPr>
+          <a:lstStyle/>
+          <a:p>
+            <a:pPr>
+              <a:spcAft>
+                <a:spcPts val="400"/>
+              </a:spcAft>
+            </a:pPr>
+            <a:r>
+              <a:rPr sz="1200" b="0" i="0">
+                <a:solidFill>
+                  <a:srgbClr val="2A1D33"/>
+                </a:solidFill>
+                <a:latin typeface="Calibri"/>
+              </a:rPr>
+              <a:t>•  Manage hotel profile, multiple halls, pricing &amp; photo galleries</a:t>
+            </a:r>
+          </a:p>
+          <a:p>
+            <a:pPr>
+              <a:spcAft>
+                <a:spcPts val="400"/>
+              </a:spcAft>
+            </a:pPr>
+            <a:r>
+              <a:rPr sz="1200" b="0" i="0">
+                <a:solidFill>
+                  <a:srgbClr val="2A1D33"/>
+                </a:solidFill>
+                <a:latin typeface="Calibri"/>
+              </a:rPr>
+              <a:t>•  Review and manage all incoming bookings from one dashboard</a:t>
+            </a:r>
+          </a:p>
+          <a:p>
+            <a:pPr>
+              <a:spcAft>
+                <a:spcPts val="400"/>
+              </a:spcAft>
+            </a:pPr>
+            <a:r>
+              <a:rPr sz="1200" b="0" i="0">
+                <a:solidFill>
+                  <a:srgbClr val="2A1D33"/>
+                </a:solidFill>
+                <a:latin typeface="Calibri"/>
+              </a:rPr>
+              <a:t>•  Accept, reject, confirm, and manage customer booking requests</a:t>
+            </a:r>
+          </a:p>
+          <a:p>
+            <a:pPr>
+              <a:spcAft>
+                <a:spcPts val="400"/>
+              </a:spcAft>
+            </a:pPr>
+            <a:r>
+              <a:rPr sz="1200" b="0" i="0">
+                <a:solidFill>
+                  <a:srgbClr val="2A1D33"/>
+                </a:solidFill>
+                <a:latin typeface="Calibri"/>
+              </a:rPr>
+              <a:t>•  Schedule customer inspection visits and save meetup notes</a:t>
+            </a:r>
+          </a:p>
+          <a:p>
+            <a:pPr>
+              <a:spcAft>
+                <a:spcPts val="400"/>
+              </a:spcAft>
+            </a:pPr>
+            <a:r>
+              <a:rPr sz="1200" b="0" i="0">
+                <a:solidFill>
+                  <a:srgbClr val="2A1D33"/>
+                </a:solidFill>
+                <a:latin typeface="Calibri"/>
+              </a:rPr>
+              <a:t>•  Automated calendar locking prevents accidental double-bookings</a:t>
+            </a:r>
+          </a:p>
+          <a:p>
+            <a:pPr>
+              <a:spcAft>
+                <a:spcPts val="400"/>
+              </a:spcAft>
+            </a:pPr>
+            <a:r>
+              <a:rPr sz="1200" b="0" i="0">
+                <a:solidFill>
+                  <a:srgbClr val="2A1D33"/>
+                </a:solidFill>
+                <a:latin typeface="Calibri"/>
+              </a:rPr>
+              <a:t>•  Access operational analytics, revenue summaries, and reports</a:t>
+            </a:r>
+          </a:p>
+        </p:txBody>
+      </p:sp>
+      <p:sp>
+        <p:nvSpPr>
+          <p:cNvPr id="23" name="Rounded Rectangle 22"/>
+          <p:cNvSpPr/>
+          <p:nvPr/>
+        </p:nvSpPr>
+        <p:spPr>
+          <a:xfrm>
+            <a:off x="457200" y="5400000"/>
+            <a:ext cx="11292840" cy="750000"/>
+          </a:xfrm>
+          <a:prstGeom prst="roundRect">
+            <a:avLst>
+              <a:gd name="adj" fmla="val 8000"/>
+            </a:avLst>
+          </a:prstGeom>
+          <a:solidFill>
+            <a:srgbClr val="4A2040"/>
+          </a:solidFill>
+          <a:ln>
+            <a:noFill/>
+          </a:ln>
+        </p:spPr>
+        <p:style>
+          <a:lnRef idx="1">
+            <a:schemeClr val="accent1"/>
+          </a:lnRef>
+          <a:fillRef idx="3">
+            <a:schemeClr val="accent1"/>
+          </a:fillRef>
+          <a:effectRef idx="2">
+            <a:schemeClr val="accent1"/>
+          </a:effectRef>
+          <a:fontRef idx="minor">
+            <a:schemeClr val="lt1"/>
+          </a:fontRef>
+        </p:style>
+        <p:txBody>
+          <a:bodyPr rtlCol="0" anchor="ctr"/>
+          <a:lstStyle/>
+          <a:p>
+            <a:pPr algn="ctr"/>
+            <a:endParaRPr/>
+          </a:p>
+        </p:txBody>
+      </p:sp>
+      <p:sp>
+        <p:nvSpPr>
+          <p:cNvPr id="36" name="TextBox 35"/>
+          <p:cNvSpPr txBox="1"/>
+          <p:nvPr/>
+        </p:nvSpPr>
+        <p:spPr>
+          <a:xfrm>
+            <a:off x="457200" y="5500000"/>
+            <a:ext cx="11292840" cy="550000"/>
+          </a:xfrm>
+          <a:prstGeom prst="rect">
+            <a:avLst/>
+          </a:prstGeom>
+          <a:noFill/>
+        </p:spPr>
+        <p:txBody>
+          <a:bodyPr wrap="none">
+            <a:spAutoFit/>
+          </a:bodyPr>
+          <a:lstStyle/>
+          <a:p>
+            <a:pPr algn="ctr">
+              <a:spcAft>
+                <a:spcPts val="200"/>
+              </a:spcAft>
+            </a:pPr>
+            <a:r>
+              <a:rPr sz="1100" b="1" i="0">
+                <a:solidFill>
+                  <a:srgbClr val="C5A070"/>
+                </a:solidFill>
+                <a:latin typeface="Calibri"/>
+              </a:rPr>
+              <a:t>CORE DIFFERENTIATOR</a:t>
+            </a:r>
+          </a:p>
+          <a:p>
+            <a:pPr algn="ctr"/>
+            <a:r>
+              <a:rPr sz="1600" b="1" i="0">
+                <a:solidFill>
+                  <a:srgbClr val="FFFFFF"/>
+                </a:solidFill>
+                <a:latin typeface="Georgia"/>
+              </a:rPr>
+              <a:t>“HallHub connects venue discovery and venue management in one platform.”</a:t>
+            </a:r>
+          </a:p>
+        </p:txBody>
+      </p:sp>
+    </p:spTree>
+  </p:cSld>
+  <p:clrMapOvr>
+    <a:masterClrMapping/>
+  </p:clrMapOvr>
+</p:sld>
+</file>
+
+<file path=ppt/slides/slide9.xml><?xml version="1.0" encoding="utf-8"?>
+<p:sld xmlns:a="http://schemas.openxmlformats.org/drawingml/2006/main" xmlns:p="http://schemas.openxmlformats.org/presentationml/2006/main" xmlns:r="http://schemas.openxmlformats.org/officeDocument/2006/relationships">
+  <p:cSld>
+    <p:spTree>
+      <p:nvGrpSpPr>
+        <p:cNvPr id="1" name=""/>
+        <p:cNvGrpSpPr/>
+        <p:nvPr/>
+      </p:nvGrpSpPr>
+      <p:grpSpPr/>
+      <p:sp>
+        <p:nvSpPr>
+          <p:cNvPr id="2" name="Rectangle 1"/>
+          <p:cNvSpPr/>
+          <p:nvPr/>
+        </p:nvSpPr>
+        <p:spPr>
+          <a:xfrm>
+            <a:off x="-15240" y="16439"/>
+            <a:ext cx="12191999" cy="6858000"/>
+          </a:xfrm>
+          <a:prstGeom prst="rect">
+            <a:avLst/>
+          </a:prstGeom>
+          <a:solidFill>
+            <a:srgbClr val="FAF7F9"/>
+          </a:solidFill>
+          <a:ln>
+            <a:noFill/>
+          </a:ln>
+        </p:spPr>
+        <p:style>
+          <a:lnRef idx="1">
+            <a:schemeClr val="accent1"/>
+          </a:lnRef>
+          <a:fillRef idx="3">
+            <a:schemeClr val="accent1"/>
+          </a:fillRef>
+          <a:effectRef idx="2">
+            <a:schemeClr val="accent1"/>
+          </a:effectRef>
+          <a:fontRef idx="minor">
+            <a:schemeClr val="lt1"/>
+          </a:fontRef>
+        </p:style>
+        <p:txBody>
+          <a:bodyPr rtlCol="0" anchor="ctr"/>
+          <a:lstStyle/>
+          <a:p>
+            <a:pPr algn="ctr"/>
+            <a:endParaRPr dirty="0"/>
+          </a:p>
+        </p:txBody>
+      </p:sp>
+      <p:sp>
+        <p:nvSpPr>
+          <p:cNvPr id="3" name="Rounded Rectangle 2"/>
+          <p:cNvSpPr/>
+          <p:nvPr/>
+        </p:nvSpPr>
+        <p:spPr>
+          <a:xfrm>
+            <a:off x="365760" y="256032"/>
+            <a:ext cx="11430000" cy="566928"/>
+          </a:xfrm>
+          <a:prstGeom prst="roundRect">
+            <a:avLst>
+              <a:gd name="adj" fmla="val 50000"/>
+            </a:avLst>
+          </a:prstGeom>
+          <a:solidFill>
+            <a:srgbClr val="FFFFFF"/>
+          </a:solidFill>
+          <a:ln w="12700">
+            <a:solidFill>
+              <a:srgbClr val="D4B37A"/>
+            </a:solidFill>
+          </a:ln>
+        </p:spPr>
+        <p:style>
+          <a:lnRef idx="1">
+            <a:schemeClr val="accent1"/>
+          </a:lnRef>
+          <a:fillRef idx="3">
+            <a:schemeClr val="accent1"/>
+          </a:fillRef>
+          <a:effectRef idx="2">
+            <a:schemeClr val="accent1"/>
+          </a:effectRef>
+          <a:fontRef idx="minor">
+            <a:schemeClr val="lt1"/>
+          </a:fontRef>
+        </p:style>
+        <p:txBody>
+          <a:bodyPr rtlCol="0" anchor="ctr"/>
+          <a:lstStyle/>
+          <a:p>
+            <a:pPr algn="ctr"/>
+            <a:endParaRPr/>
+          </a:p>
+        </p:txBody>
+      </p:sp>
+      <p:sp>
+        <p:nvSpPr>
+          <p:cNvPr id="4" name="Rounded Rectangle 3"/>
+          <p:cNvSpPr/>
+          <p:nvPr/>
+        </p:nvSpPr>
+        <p:spPr>
+          <a:xfrm>
+            <a:off x="457200" y="329184"/>
+            <a:ext cx="1325880" cy="420624"/>
+          </a:xfrm>
+          <a:prstGeom prst="roundRect">
+            <a:avLst>
+              <a:gd name="adj" fmla="val 50000"/>
+            </a:avLst>
+          </a:prstGeom>
+          <a:solidFill>
+            <a:srgbClr val="4A2040"/>
+          </a:solidFill>
+          <a:ln w="12700">
+            <a:solidFill>
+              <a:srgbClr val="D4B37A"/>
+            </a:solidFill>
+          </a:ln>
+        </p:spPr>
+        <p:style>
+          <a:lnRef idx="1">
+            <a:schemeClr val="accent1"/>
+          </a:lnRef>
+          <a:fillRef idx="3">
+            <a:schemeClr val="accent1"/>
+          </a:fillRef>
+          <a:effectRef idx="2">
+            <a:schemeClr val="accent1"/>
+          </a:effectRef>
+          <a:fontRef idx="minor">
+            <a:schemeClr val="lt1"/>
+          </a:fontRef>
+        </p:style>
+        <p:txBody>
+          <a:bodyPr rtlCol="0" anchor="ctr"/>
+          <a:lstStyle/>
+          <a:p>
+            <a:pPr algn="ctr"/>
+            <a:endParaRPr/>
+          </a:p>
+        </p:txBody>
+      </p:sp>
+      <p:sp>
+        <p:nvSpPr>
+          <p:cNvPr id="5" name="TextBox 4"/>
+          <p:cNvSpPr txBox="1"/>
+          <p:nvPr/>
+        </p:nvSpPr>
+        <p:spPr>
+          <a:xfrm>
+            <a:off x="457200" y="384048"/>
+            <a:ext cx="1325880" cy="310896"/>
+          </a:xfrm>
+          <a:prstGeom prst="rect">
+            <a:avLst/>
+          </a:prstGeom>
+          <a:noFill/>
+        </p:spPr>
+        <p:txBody>
+          <a:bodyPr wrap="square">
+            <a:spAutoFit/>
+          </a:bodyPr>
+          <a:lstStyle/>
+          <a:p>
+            <a:pPr algn="ctr"/>
+            <a:r>
+              <a:rPr sz="1300" b="0">
+                <a:solidFill>
+                  <a:srgbClr val="FFFFFF"/>
+                </a:solidFill>
+                <a:latin typeface="Georgia"/>
+              </a:rPr>
+              <a:t>HallHub</a:t>
+            </a:r>
+          </a:p>
+        </p:txBody>
+      </p:sp>
+      <p:sp>
+        <p:nvSpPr>
+          <p:cNvPr id="6" name="TextBox 5"/>
+          <p:cNvSpPr txBox="1"/>
+          <p:nvPr/>
+        </p:nvSpPr>
+        <p:spPr>
+          <a:xfrm>
+            <a:off x="1965960" y="365760"/>
+            <a:ext cx="1000000" cy="310896"/>
+          </a:xfrm>
+          <a:prstGeom prst="rect">
+            <a:avLst/>
+          </a:prstGeom>
+          <a:noFill/>
+        </p:spPr>
+        <p:txBody>
+          <a:bodyPr wrap="none" lIns="0" tIns="0" rIns="0" bIns="0">
+            <a:spAutoFit/>
+          </a:bodyPr>
+          <a:lstStyle/>
+          <a:p>
+            <a:r>
+              <a:rPr sz="1100" b="1">
+                <a:solidFill>
+                  <a:srgbClr val="4A2040"/>
+                </a:solidFill>
+                <a:latin typeface="Calibri"/>
+              </a:rPr>
+              <a:t>HallHub</a:t>
+            </a:r>
+          </a:p>
+        </p:txBody>
+      </p:sp>
+      <p:sp>
+        <p:nvSpPr>
+          <p:cNvPr id="7" name="TextBox 6"/>
+          <p:cNvSpPr txBox="1"/>
+          <p:nvPr/>
+        </p:nvSpPr>
+        <p:spPr>
+          <a:xfrm>
+            <a:off x="3000000" y="365760"/>
+            <a:ext cx="1000000" cy="310896"/>
+          </a:xfrm>
+          <a:prstGeom prst="rect">
+            <a:avLst/>
+          </a:prstGeom>
+          <a:noFill/>
+        </p:spPr>
+        <p:txBody>
+          <a:bodyPr wrap="none" lIns="0" tIns="0" rIns="0" bIns="0">
+            <a:spAutoFit/>
+          </a:bodyPr>
+          <a:lstStyle/>
+          <a:p>
+            <a:r>
+              <a:rPr sz="1100" b="1">
+                <a:solidFill>
+                  <a:srgbClr val="4A2040"/>
+                </a:solidFill>
+                <a:latin typeface="Calibri"/>
+              </a:rPr>
+              <a:t>Problem</a:t>
+            </a:r>
+          </a:p>
+        </p:txBody>
+      </p:sp>
+      <p:sp>
+        <p:nvSpPr>
+          <p:cNvPr id="8" name="TextBox 7"/>
+          <p:cNvSpPr txBox="1"/>
+          <p:nvPr/>
+        </p:nvSpPr>
+        <p:spPr>
+          <a:xfrm>
+            <a:off x="4050000" y="365760"/>
+            <a:ext cx="1000000" cy="310896"/>
+          </a:xfrm>
+          <a:prstGeom prst="rect">
+            <a:avLst/>
+          </a:prstGeom>
+          <a:noFill/>
+        </p:spPr>
+        <p:txBody>
+          <a:bodyPr wrap="none" lIns="0" tIns="0" rIns="0" bIns="0">
+            <a:spAutoFit/>
+          </a:bodyPr>
+          <a:lstStyle/>
+          <a:p>
+            <a:r>
+              <a:rPr sz="1100" b="1">
+                <a:solidFill>
+                  <a:srgbClr val="4A2040"/>
+                </a:solidFill>
+                <a:latin typeface="Calibri"/>
+              </a:rPr>
+              <a:t>Values</a:t>
+            </a:r>
+          </a:p>
+        </p:txBody>
+      </p:sp>
+      <p:sp>
+        <p:nvSpPr>
+          <p:cNvPr id="9" name="TextBox 8"/>
+          <p:cNvSpPr txBox="1"/>
+          <p:nvPr/>
+        </p:nvSpPr>
+        <p:spPr>
+          <a:xfrm>
+            <a:off x="5000000" y="365760"/>
+            <a:ext cx="1000000" cy="310896"/>
+          </a:xfrm>
+          <a:prstGeom prst="rect">
+            <a:avLst/>
+          </a:prstGeom>
+          <a:noFill/>
+        </p:spPr>
+        <p:txBody>
+          <a:bodyPr wrap="none" lIns="0" tIns="0" rIns="0" bIns="0">
+            <a:spAutoFit/>
+          </a:bodyPr>
+          <a:lstStyle/>
+          <a:p>
+            <a:r>
+              <a:rPr sz="1100" b="1">
+                <a:solidFill>
+                  <a:srgbClr val="7A3A6A"/>
+                </a:solidFill>
+                <a:latin typeface="Calibri"/>
+              </a:rPr>
+              <a:t>Market</a:t>
+            </a:r>
+          </a:p>
+        </p:txBody>
+      </p:sp>
+      <p:sp>
+        <p:nvSpPr>
+          <p:cNvPr id="10" name="Rectangle 9"/>
+          <p:cNvSpPr/>
+          <p:nvPr/>
+        </p:nvSpPr>
+        <p:spPr>
+          <a:xfrm>
+            <a:off x="5040000" y="676656"/>
+            <a:ext cx="520000" cy="16459"/>
+          </a:xfrm>
+          <a:prstGeom prst="rect">
+            <a:avLst/>
+          </a:prstGeom>
+          <a:solidFill>
+            <a:srgbClr val="4A2040"/>
+          </a:solidFill>
+          <a:ln>
+            <a:noFill/>
+          </a:ln>
+        </p:spPr>
+        <p:style>
+          <a:lnRef idx="1">
+            <a:schemeClr val="accent1"/>
+          </a:lnRef>
+          <a:fillRef idx="3">
+            <a:schemeClr val="accent1"/>
+          </a:fillRef>
+          <a:effectRef idx="2">
+            <a:schemeClr val="accent1"/>
+          </a:effectRef>
+          <a:fontRef idx="minor">
+            <a:schemeClr val="lt1"/>
+          </a:fontRef>
+        </p:style>
+        <p:txBody>
+          <a:bodyPr rtlCol="0" anchor="ctr"/>
+          <a:lstStyle/>
+          <a:p>
+            <a:pPr algn="ctr"/>
+          </a:p>
+        </p:txBody>
+      </p:sp>
+      <p:sp>
+        <p:nvSpPr>
+          <p:cNvPr id="11" name="TextBox 10"/>
+          <p:cNvSpPr txBox="1"/>
+          <p:nvPr/>
+        </p:nvSpPr>
+        <p:spPr>
+          <a:xfrm>
+            <a:off x="5950000" y="365760"/>
+            <a:ext cx="1000000" cy="310896"/>
+          </a:xfrm>
+          <a:prstGeom prst="rect">
+            <a:avLst/>
+          </a:prstGeom>
+          <a:noFill/>
+        </p:spPr>
+        <p:txBody>
+          <a:bodyPr wrap="none" lIns="0" tIns="0" rIns="0" bIns="0">
+            <a:spAutoFit/>
+          </a:bodyPr>
+          <a:lstStyle/>
+          <a:p>
+            <a:r>
+              <a:rPr sz="1100" b="1">
+                <a:solidFill>
+                  <a:srgbClr val="4A2040"/>
+                </a:solidFill>
+                <a:latin typeface="Calibri"/>
+              </a:rPr>
+              <a:t>Revenue</a:t>
+            </a:r>
+          </a:p>
+        </p:txBody>
+      </p:sp>
+      <p:sp>
+        <p:nvSpPr>
+          <p:cNvPr id="12" name="TextBox 11"/>
+          <p:cNvSpPr txBox="1"/>
+          <p:nvPr/>
+        </p:nvSpPr>
+        <p:spPr>
+          <a:xfrm>
+            <a:off x="7000000" y="365760"/>
+            <a:ext cx="1000000" cy="310896"/>
+          </a:xfrm>
+          <a:prstGeom prst="rect">
+            <a:avLst/>
+          </a:prstGeom>
+          <a:noFill/>
+        </p:spPr>
+        <p:txBody>
+          <a:bodyPr wrap="none" lIns="0" tIns="0" rIns="0" bIns="0">
+            <a:spAutoFit/>
+          </a:bodyPr>
+          <a:lstStyle/>
+          <a:p>
+            <a:r>
+              <a:rPr sz="1100" b="1">
+                <a:solidFill>
+                  <a:srgbClr val="4A2040"/>
+                </a:solidFill>
+                <a:latin typeface="Calibri"/>
+              </a:rPr>
+              <a:t>Advantage</a:t>
+            </a:r>
+          </a:p>
+        </p:txBody>
+      </p:sp>
+      <p:sp>
+        <p:nvSpPr>
+          <p:cNvPr id="13" name="TextBox 12"/>
+          <p:cNvSpPr txBox="1"/>
+          <p:nvPr/>
+        </p:nvSpPr>
+        <p:spPr>
+          <a:xfrm>
+            <a:off x="8150000" y="365760"/>
+            <a:ext cx="1000000" cy="310896"/>
+          </a:xfrm>
+          <a:prstGeom prst="rect">
+            <a:avLst/>
+          </a:prstGeom>
+          <a:noFill/>
+        </p:spPr>
+        <p:txBody>
+          <a:bodyPr wrap="none" lIns="0" tIns="0" rIns="0" bIns="0">
+            <a:spAutoFit/>
+          </a:bodyPr>
+          <a:lstStyle/>
+          <a:p>
+            <a:r>
+              <a:rPr sz="1100" b="1">
+                <a:solidFill>
+                  <a:srgbClr val="4A2040"/>
+                </a:solidFill>
+                <a:latin typeface="Calibri"/>
+              </a:rPr>
+              <a:t>Product</a:t>
+            </a:r>
+          </a:p>
+        </p:txBody>
+      </p:sp>
+      <p:sp>
+        <p:nvSpPr>
+          <p:cNvPr id="14" name="TextBox 13"/>
+          <p:cNvSpPr txBox="1"/>
+          <p:nvPr/>
+        </p:nvSpPr>
+        <p:spPr>
+          <a:xfrm>
+            <a:off x="9250000" y="365760"/>
+            <a:ext cx="1000000" cy="310896"/>
+          </a:xfrm>
+          <a:prstGeom prst="rect">
+            <a:avLst/>
+          </a:prstGeom>
+          <a:noFill/>
+        </p:spPr>
+        <p:txBody>
+          <a:bodyPr wrap="none" lIns="0" tIns="0" rIns="0" bIns="0">
+            <a:spAutoFit/>
+          </a:bodyPr>
+          <a:lstStyle/>
+          <a:p>
+            <a:r>
+              <a:rPr sz="1100" b="1">
+                <a:solidFill>
+                  <a:srgbClr val="4A2040"/>
+                </a:solidFill>
+                <a:latin typeface="Calibri"/>
+              </a:rPr>
+              <a:t>Vision</a:t>
+            </a:r>
+          </a:p>
+        </p:txBody>
+      </p:sp>
+      <p:sp>
+        <p:nvSpPr>
+          <p:cNvPr id="14" name="Rectangle 13"/>
+          <p:cNvSpPr/>
+          <p:nvPr/>
+        </p:nvSpPr>
+        <p:spPr>
+          <a:xfrm>
+            <a:off x="457200" y="1042416"/>
+            <a:ext cx="201168" cy="13716"/>
+          </a:xfrm>
+          <a:prstGeom prst="rect">
+            <a:avLst/>
+          </a:prstGeom>
+          <a:solidFill>
+            <a:srgbClr val="C5A070"/>
+          </a:solidFill>
+          <a:ln>
+            <a:noFill/>
+          </a:ln>
+        </p:spPr>
+        <p:style>
+          <a:lnRef idx="1">
+            <a:schemeClr val="accent1"/>
+          </a:lnRef>
+          <a:fillRef idx="3">
+            <a:schemeClr val="accent1"/>
+          </a:fillRef>
+          <a:effectRef idx="2">
+            <a:schemeClr val="accent1"/>
+          </a:effectRef>
+          <a:fontRef idx="minor">
+            <a:schemeClr val="lt1"/>
+          </a:fontRef>
+        </p:style>
+        <p:txBody>
+          <a:bodyPr rtlCol="0" anchor="ctr"/>
+          <a:lstStyle/>
+          <a:p>
+            <a:pPr algn="ctr"/>
+            <a:endParaRPr/>
+          </a:p>
+        </p:txBody>
+      </p:sp>
+      <p:sp>
+        <p:nvSpPr>
+          <p:cNvPr id="15" name="TextBox 14"/>
+          <p:cNvSpPr txBox="1"/>
+          <p:nvPr/>
+        </p:nvSpPr>
+        <p:spPr>
+          <a:xfrm>
+            <a:off x="731520" y="960120"/>
+            <a:ext cx="9144000" cy="256032"/>
+          </a:xfrm>
+          <a:prstGeom prst="rect">
+            <a:avLst/>
+          </a:prstGeom>
+          <a:noFill/>
+        </p:spPr>
+        <p:txBody>
+          <a:bodyPr wrap="none" lIns="0" tIns="0" rIns="0" bIns="0">
+            <a:spAutoFit/>
+          </a:bodyPr>
+          <a:lstStyle/>
+          <a:p>
+            <a:r>
+              <a:rPr sz="1200" b="1" i="0">
+                <a:solidFill>
+                  <a:srgbClr val="C5A070"/>
+                </a:solidFill>
+                <a:latin typeface="Calibri"/>
+              </a:rPr>
+              <a:t>04  —  TARGET MARKET</a:t>
+            </a:r>
+          </a:p>
+        </p:txBody>
+      </p:sp>
+      <p:sp>
+        <p:nvSpPr>
+          <p:cNvPr id="16" name="TextBox 15"/>
+          <p:cNvSpPr txBox="1"/>
+          <p:nvPr/>
+        </p:nvSpPr>
+        <p:spPr>
+          <a:xfrm>
+            <a:off x="457200" y="1207008"/>
+            <a:ext cx="10972800" cy="420000"/>
+          </a:xfrm>
+          <a:prstGeom prst="rect">
+            <a:avLst/>
+          </a:prstGeom>
+          <a:noFill/>
+        </p:spPr>
+        <p:txBody>
+          <a:bodyPr wrap="none" lIns="0" tIns="0" rIns="0" bIns="0">
+            <a:spAutoFit/>
+          </a:bodyPr>
+          <a:lstStyle/>
+          <a:p>
+            <a:r>
+              <a:rPr sz="2500" b="1" i="0">
+                <a:solidFill>
+                  <a:srgbClr val="4A2040"/>
+                </a:solidFill>
+                <a:latin typeface="Georgia"/>
+              </a:rPr>
+              <a:t>Serving the growing demand for digital event venue management</a:t>
+            </a:r>
+          </a:p>
+        </p:txBody>
+      </p:sp>
+      <p:sp>
+        <p:nvSpPr>
+          <p:cNvPr id="28" name="TextBox 27"/>
+          <p:cNvSpPr txBox="1"/>
+          <p:nvPr/>
+        </p:nvSpPr>
+        <p:spPr>
+          <a:xfrm>
+            <a:off x="640080" y="6510528"/>
+            <a:ext cx="2743200" cy="256032"/>
+          </a:xfrm>
+          <a:prstGeom prst="rect">
+            <a:avLst/>
+          </a:prstGeom>
+          <a:noFill/>
+        </p:spPr>
+        <p:txBody>
+          <a:bodyPr wrap="square">
+            <a:spAutoFit/>
+          </a:bodyPr>
+          <a:lstStyle/>
+          <a:p>
+            <a:pPr algn="l"/>
+            <a:r>
+              <a:rPr sz="1300" b="1">
+                <a:solidFill>
+                  <a:srgbClr val="4A2040"/>
+                </a:solidFill>
+                <a:latin typeface="Georgia"/>
+              </a:rPr>
+              <a:t>HallHub</a:t>
+            </a:r>
+          </a:p>
+        </p:txBody>
+      </p:sp>
+      <p:sp>
+        <p:nvSpPr>
+          <p:cNvPr id="29" name="TextBox 28"/>
+          <p:cNvSpPr txBox="1"/>
+          <p:nvPr/>
+        </p:nvSpPr>
+        <p:spPr>
+          <a:xfrm>
+            <a:off x="10241280" y="6510528"/>
+            <a:ext cx="1280160" cy="256032"/>
+          </a:xfrm>
+          <a:prstGeom prst="rect">
+            <a:avLst/>
+          </a:prstGeom>
+          <a:noFill/>
+        </p:spPr>
+        <p:txBody>
+          <a:bodyPr wrap="none" lIns="0" tIns="0" rIns="0" bIns="0">
+            <a:spAutoFit/>
+          </a:bodyPr>
+          <a:lstStyle/>
+          <a:p>
+            <a:r>
+              <a:rPr sz="1200" b="0" i="0">
+                <a:solidFill>
+                  <a:srgbClr val="6B6570"/>
+                </a:solidFill>
+                <a:latin typeface="Calibri"/>
+              </a:rPr>
+              <a:t>04 / 08</a:t>
+            </a:r>
+          </a:p>
+        </p:txBody>
+      </p:sp>
+      <p:sp>
+        <p:nvSpPr>
+          <p:cNvPr id="17" name="Rounded Rectangle 16"/>
+          <p:cNvSpPr/>
+          <p:nvPr/>
+        </p:nvSpPr>
+        <p:spPr>
+          <a:xfrm>
+            <a:off x="457200" y="1737360"/>
+            <a:ext cx="3657600" cy="4434840"/>
+          </a:xfrm>
+          <a:prstGeom prst="roundRect">
+            <a:avLst>
+              <a:gd name="adj" fmla="val 8000"/>
+            </a:avLst>
+          </a:prstGeom>
+          <a:solidFill>
+            <a:srgbClr val="FFFDFB"/>
+          </a:solidFill>
+          <a:ln w="12700">
+            <a:solidFill>
+              <a:srgbClr val="EAD9C2"/>
+            </a:solidFill>
+          </a:ln>
+        </p:spPr>
+        <p:style>
+          <a:lnRef idx="1">
+            <a:schemeClr val="accent1"/>
+          </a:lnRef>
+          <a:fillRef idx="3">
+            <a:schemeClr val="accent1"/>
+          </a:fillRef>
+          <a:effectRef idx="2">
+            <a:schemeClr val="accent1"/>
+          </a:effectRef>
+          <a:fontRef idx="minor">
+            <a:schemeClr val="lt1"/>
+          </a:fontRef>
+        </p:style>
+        <p:txBody>
+          <a:bodyPr rtlCol="0" anchor="ctr"/>
+          <a:lstStyle/>
+          <a:p>
+            <a:pPr algn="ctr"/>
+            <a:endParaRPr dirty="0"/>
+          </a:p>
+        </p:txBody>
+      </p:sp>
+      <p:sp>
+        <p:nvSpPr>
+          <p:cNvPr id="18" name="Oval 17"/>
+          <p:cNvSpPr/>
+          <p:nvPr/>
+        </p:nvSpPr>
+        <p:spPr>
+          <a:xfrm>
+            <a:off x="731520" y="1938528"/>
+            <a:ext cx="384048" cy="384048"/>
+          </a:xfrm>
+          <a:prstGeom prst="ellipse">
+            <a:avLst/>
+          </a:prstGeom>
+          <a:solidFill>
+            <a:srgbClr val="F4EBF1"/>
+          </a:solidFill>
+          <a:ln>
+            <a:noFill/>
+          </a:ln>
+        </p:spPr>
+        <p:style>
+          <a:lnRef idx="1">
+            <a:schemeClr val="accent1"/>
+          </a:lnRef>
+          <a:fillRef idx="3">
+            <a:schemeClr val="accent1"/>
+          </a:fillRef>
+          <a:effectRef idx="2">
+            <a:schemeClr val="accent1"/>
+          </a:effectRef>
+          <a:fontRef idx="minor">
+            <a:schemeClr val="lt1"/>
+          </a:fontRef>
+        </p:style>
+        <p:txBody>
+          <a:bodyPr rtlCol="0" anchor="ctr"/>
+          <a:lstStyle/>
+          <a:p>
+            <a:pPr algn="ctr"/>
+            <a:endParaRPr/>
+          </a:p>
+        </p:txBody>
+      </p:sp>
+      <p:sp>
+        <p:nvSpPr>
+          <p:cNvPr id="30" name="TextBox 29"/>
+          <p:cNvSpPr txBox="1"/>
+          <p:nvPr/>
+        </p:nvSpPr>
+        <p:spPr>
+          <a:xfrm>
+            <a:off x="731520" y="2468880"/>
+            <a:ext cx="3108960" cy="411480"/>
+          </a:xfrm>
+          <a:prstGeom prst="rect">
+            <a:avLst/>
+          </a:prstGeom>
+          <a:noFill/>
+        </p:spPr>
+        <p:txBody>
+          <a:bodyPr wrap="none">
+            <a:spAutoFit/>
+          </a:bodyPr>
+          <a:lstStyle/>
+          <a:p>
+            <a:r>
+              <a:rPr sz="2200" b="1" i="0">
+                <a:solidFill>
+                  <a:srgbClr val="4A2040"/>
+                </a:solidFill>
+                <a:latin typeface="Georgia"/>
+              </a:rPr>
+              <a:t>Event Organizers</a:t>
+            </a:r>
+          </a:p>
+        </p:txBody>
+      </p:sp>
+      <p:sp>
+        <p:nvSpPr>
+          <p:cNvPr id="31" name="TextBox 30"/>
+          <p:cNvSpPr txBox="1"/>
+          <p:nvPr/>
+        </p:nvSpPr>
+        <p:spPr>
+          <a:xfrm>
+            <a:off x="731520" y="2907792"/>
+            <a:ext cx="3108960" cy="292608"/>
+          </a:xfrm>
+          <a:prstGeom prst="rect">
+            <a:avLst/>
+          </a:prstGeom>
+          <a:noFill/>
+        </p:spPr>
+        <p:txBody>
+          <a:bodyPr wrap="none">
+            <a:spAutoFit/>
+          </a:bodyPr>
+          <a:lstStyle/>
+          <a:p>
+            <a:r>
+              <a:rPr sz="1300" b="1" i="0">
+                <a:solidFill>
+                  <a:srgbClr val="C5A070"/>
+                </a:solidFill>
+                <a:latin typeface="Calibri"/>
+              </a:rPr>
+              <a:t>Individuals &amp; Organizations</a:t>
+            </a:r>
+          </a:p>
+        </p:txBody>
+      </p:sp>
+      <p:sp>
+        <p:nvSpPr>
+          <p:cNvPr id="32" name="TextBox 31"/>
+          <p:cNvSpPr txBox="1"/>
+          <p:nvPr/>
+        </p:nvSpPr>
+        <p:spPr>
+          <a:xfrm>
+            <a:off x="731520" y="3337560"/>
+            <a:ext cx="3108960" cy="2500000"/>
+          </a:xfrm>
+          <a:prstGeom prst="rect">
+            <a:avLst/>
+          </a:prstGeom>
+          <a:noFill/>
+        </p:spPr>
+        <p:txBody>
+          <a:bodyPr wrap="none">
+            <a:spAutoFit/>
+          </a:bodyPr>
+          <a:lstStyle/>
+          <a:p>
+            <a:pPr>
+              <a:spcAft>
+                <a:spcPts val="600"/>
+              </a:spcAft>
+            </a:pPr>
+            <a:r>
+              <a:rPr sz="1200" b="0" i="0">
+                <a:solidFill>
+                  <a:srgbClr val="2A1D33"/>
+                </a:solidFill>
+                <a:latin typeface="Calibri"/>
+              </a:rPr>
+              <a:t>•  Wedding parties and family celebrations</a:t>
+            </a:r>
+          </a:p>
+          <a:p>
+            <a:pPr>
+              <a:spcAft>
+                <a:spcPts val="600"/>
+              </a:spcAft>
+            </a:pPr>
+            <a:r>
+              <a:rPr sz="1200" b="0" i="0">
+                <a:solidFill>
+                  <a:srgbClr val="2A1D33"/>
+                </a:solidFill>
+                <a:latin typeface="Calibri"/>
+              </a:rPr>
+              <a:t>•  Corporate meetings, seminars &amp; workshops</a:t>
+            </a:r>
+          </a:p>
+          <a:p>
+            <a:pPr>
+              <a:spcAft>
+                <a:spcPts val="600"/>
+              </a:spcAft>
+            </a:pPr>
+            <a:r>
+              <a:rPr sz="1200" b="0" i="0">
+                <a:solidFill>
+                  <a:srgbClr val="2A1D33"/>
+                </a:solidFill>
+                <a:latin typeface="Calibri"/>
+              </a:rPr>
+              <a:t>•  University &amp; school graduation ceremonies</a:t>
+            </a:r>
+          </a:p>
+          <a:p>
+            <a:pPr>
+              <a:spcAft>
+                <a:spcPts val="600"/>
+              </a:spcAft>
+            </a:pPr>
+            <a:r>
+              <a:rPr sz="1200" b="0" i="0">
+                <a:solidFill>
+                  <a:srgbClr val="2A1D33"/>
+                </a:solidFill>
+                <a:latin typeface="Calibri"/>
+              </a:rPr>
+              <a:t>•  Community forums, conferences &amp; dinners</a:t>
+            </a:r>
+          </a:p>
+          <a:p>
+            <a:pPr>
+              <a:spcAft>
+                <a:spcPts val="600"/>
+              </a:spcAft>
+            </a:pPr>
+            <a:r>
+              <a:rPr sz="1200" b="0" i="0">
+                <a:solidFill>
+                  <a:srgbClr val="2A1D33"/>
+                </a:solidFill>
+                <a:latin typeface="Calibri"/>
+              </a:rPr>
+              <a:t>•  Seek fast comparisons, clear pricing &amp; dates</a:t>
+            </a:r>
+          </a:p>
+        </p:txBody>
+      </p:sp>
+      <p:sp>
+        <p:nvSpPr>
+          <p:cNvPr id="17" name="Rounded Rectangle 16"/>
+          <p:cNvSpPr/>
+          <p:nvPr/>
+        </p:nvSpPr>
+        <p:spPr>
+          <a:xfrm>
+            <a:off x="4297680" y="1737360"/>
+            <a:ext cx="3657600" cy="4434840"/>
+          </a:xfrm>
+          <a:prstGeom prst="roundRect">
+            <a:avLst>
+              <a:gd name="adj" fmla="val 8000"/>
+            </a:avLst>
+          </a:prstGeom>
+          <a:solidFill>
+            <a:srgbClr val="FFFDFB"/>
+          </a:solidFill>
+          <a:ln w="12700">
+            <a:solidFill>
+              <a:srgbClr val="EAD9C2"/>
+            </a:solidFill>
+          </a:ln>
+        </p:spPr>
+        <p:style>
+          <a:lnRef idx="1">
+            <a:schemeClr val="accent1"/>
+          </a:lnRef>
+          <a:fillRef idx="3">
+            <a:schemeClr val="accent1"/>
+          </a:fillRef>
+          <a:effectRef idx="2">
+            <a:schemeClr val="accent1"/>
+          </a:effectRef>
+          <a:fontRef idx="minor">
+            <a:schemeClr val="lt1"/>
+          </a:fontRef>
+        </p:style>
+        <p:txBody>
+          <a:bodyPr rtlCol="0" anchor="ctr"/>
+          <a:lstStyle/>
+          <a:p>
+            <a:pPr algn="ctr"/>
+            <a:endParaRPr dirty="0"/>
+          </a:p>
+        </p:txBody>
+      </p:sp>
+      <p:sp>
+        <p:nvSpPr>
+          <p:cNvPr id="18" name="Oval 17"/>
+          <p:cNvSpPr/>
+          <p:nvPr/>
+        </p:nvSpPr>
+        <p:spPr>
+          <a:xfrm>
+            <a:off x="4572000" y="1938528"/>
+            <a:ext cx="384048" cy="384048"/>
+          </a:xfrm>
+          <a:prstGeom prst="ellipse">
+            <a:avLst/>
+          </a:prstGeom>
+          <a:solidFill>
+            <a:srgbClr val="F4EBF1"/>
+          </a:solidFill>
+          <a:ln>
+            <a:noFill/>
+          </a:ln>
+        </p:spPr>
+        <p:style>
+          <a:lnRef idx="1">
+            <a:schemeClr val="accent1"/>
+          </a:lnRef>
+          <a:fillRef idx="3">
+            <a:schemeClr val="accent1"/>
+          </a:fillRef>
+          <a:effectRef idx="2">
+            <a:schemeClr val="accent1"/>
+          </a:effectRef>
+          <a:fontRef idx="minor">
+            <a:schemeClr val="lt1"/>
+          </a:fontRef>
+        </p:style>
+        <p:txBody>
+          <a:bodyPr rtlCol="0" anchor="ctr"/>
+          <a:lstStyle/>
+          <a:p>
+            <a:pPr algn="ctr"/>
+            <a:endParaRPr/>
+          </a:p>
+        </p:txBody>
+      </p:sp>
+      <p:sp>
+        <p:nvSpPr>
+          <p:cNvPr id="33" name="TextBox 32"/>
+          <p:cNvSpPr txBox="1"/>
+          <p:nvPr/>
+        </p:nvSpPr>
+        <p:spPr>
+          <a:xfrm>
+            <a:off x="4572000" y="2468880"/>
+            <a:ext cx="3108960" cy="411480"/>
+          </a:xfrm>
+          <a:prstGeom prst="rect">
+            <a:avLst/>
+          </a:prstGeom>
+          <a:noFill/>
+        </p:spPr>
+        <p:txBody>
+          <a:bodyPr wrap="none">
+            <a:spAutoFit/>
+          </a:bodyPr>
+          <a:lstStyle/>
+          <a:p>
+            <a:r>
+              <a:rPr sz="2200" b="1" i="0">
+                <a:solidFill>
+                  <a:srgbClr val="4A2040"/>
+                </a:solidFill>
+                <a:latin typeface="Georgia"/>
+              </a:rPr>
+              <a:t>Hotels &amp; Venues</a:t>
+            </a:r>
+          </a:p>
+        </p:txBody>
+      </p:sp>
+      <p:sp>
+        <p:nvSpPr>
+          <p:cNvPr id="34" name="TextBox 33"/>
+          <p:cNvSpPr txBox="1"/>
+          <p:nvPr/>
+        </p:nvSpPr>
+        <p:spPr>
+          <a:xfrm>
+            <a:off x="4572000" y="2907792"/>
+            <a:ext cx="3108960" cy="292608"/>
+          </a:xfrm>
+          <a:prstGeom prst="rect">
+            <a:avLst/>
+          </a:prstGeom>
+          <a:noFill/>
+        </p:spPr>
+        <p:txBody>
+          <a:bodyPr wrap="none">
+            <a:spAutoFit/>
+          </a:bodyPr>
+          <a:lstStyle/>
+          <a:p>
+            <a:r>
+              <a:rPr sz="1300" b="1" i="0">
+                <a:solidFill>
+                  <a:srgbClr val="C5A070"/>
+                </a:solidFill>
+                <a:latin typeface="Calibri"/>
+              </a:rPr>
+              <a:t>Venue Owners &amp; Managers</a:t>
+            </a:r>
+          </a:p>
+        </p:txBody>
+      </p:sp>
+      <p:sp>
+        <p:nvSpPr>
+          <p:cNvPr id="35" name="TextBox 34"/>
+          <p:cNvSpPr txBox="1"/>
+          <p:nvPr/>
+        </p:nvSpPr>
+        <p:spPr>
+          <a:xfrm>
+            <a:off x="4572000" y="3337560"/>
+            <a:ext cx="3108960" cy="2500000"/>
+          </a:xfrm>
+          <a:prstGeom prst="rect">
+            <a:avLst/>
+          </a:prstGeom>
+          <a:noFill/>
+        </p:spPr>
+        <p:txBody>
+          <a:bodyPr wrap="none">
+            <a:spAutoFit/>
+          </a:bodyPr>
+          <a:lstStyle/>
+          <a:p>
+            <a:pPr>
+              <a:spcAft>
+                <a:spcPts val="600"/>
+              </a:spcAft>
+            </a:pPr>
+            <a:r>
+              <a:rPr sz="1200" b="0" i="0">
+                <a:solidFill>
+                  <a:srgbClr val="2A1D33"/>
+                </a:solidFill>
+                <a:latin typeface="Calibri"/>
+              </a:rPr>
+              <a:t>•  Hotels with banquet, conference &amp; party halls</a:t>
+            </a:r>
+          </a:p>
+          <a:p>
+            <a:pPr>
+              <a:spcAft>
+                <a:spcPts val="600"/>
+              </a:spcAft>
+            </a:pPr>
+            <a:r>
+              <a:rPr sz="1200" b="0" i="0">
+                <a:solidFill>
+                  <a:srgbClr val="2A1D33"/>
+                </a:solidFill>
+                <a:latin typeface="Calibri"/>
+              </a:rPr>
+              <a:t>•  Independent event centers and wedding venues</a:t>
+            </a:r>
+          </a:p>
+          <a:p>
+            <a:pPr>
+              <a:spcAft>
+                <a:spcPts val="600"/>
+              </a:spcAft>
+            </a:pPr>
+            <a:r>
+              <a:rPr sz="1200" b="0" i="0">
+                <a:solidFill>
+                  <a:srgbClr val="2A1D33"/>
+                </a:solidFill>
+                <a:latin typeface="Calibri"/>
+              </a:rPr>
+              <a:t>•  Seeking to transition from manual to digital tools</a:t>
+            </a:r>
+          </a:p>
+          <a:p>
+            <a:pPr>
+              <a:spcAft>
+                <a:spcPts val="600"/>
+              </a:spcAft>
+            </a:pPr>
+            <a:r>
+              <a:rPr sz="1200" b="0" i="0">
+                <a:solidFill>
+                  <a:srgbClr val="2A1D33"/>
+                </a:solidFill>
+                <a:latin typeface="Calibri"/>
+              </a:rPr>
+              <a:t>•  Need expanded market visibility across the city</a:t>
+            </a:r>
+          </a:p>
+          <a:p>
+            <a:pPr>
+              <a:spcAft>
+                <a:spcPts val="600"/>
+              </a:spcAft>
+            </a:pPr>
+            <a:r>
+              <a:rPr sz="1200" b="0" i="0">
+                <a:solidFill>
+                  <a:srgbClr val="2A1D33"/>
+                </a:solidFill>
+                <a:latin typeface="Calibri"/>
+              </a:rPr>
+              <a:t>•  Require tools to eliminate double-booking risks</a:t>
+            </a:r>
+          </a:p>
+        </p:txBody>
+      </p:sp>
+      <p:sp>
+        <p:nvSpPr>
+          <p:cNvPr id="23" name="Rounded Rectangle 22"/>
+          <p:cNvSpPr/>
+          <p:nvPr/>
+        </p:nvSpPr>
+        <p:spPr>
+          <a:xfrm>
+            <a:off x="8138160" y="1737360"/>
+            <a:ext cx="3657600" cy="4434840"/>
+          </a:xfrm>
+          <a:prstGeom prst="roundRect">
+            <a:avLst>
+              <a:gd name="adj" fmla="val 8000"/>
+            </a:avLst>
+          </a:prstGeom>
+          <a:solidFill>
+            <a:srgbClr val="4A2040"/>
+          </a:solidFill>
+          <a:ln>
+            <a:noFill/>
+          </a:ln>
+        </p:spPr>
+        <p:style>
+          <a:lnRef idx="1">
+            <a:schemeClr val="accent1"/>
+          </a:lnRef>
+          <a:fillRef idx="3">
+            <a:schemeClr val="accent1"/>
+          </a:fillRef>
+          <a:effectRef idx="2">
+            <a:schemeClr val="accent1"/>
+          </a:effectRef>
+          <a:fontRef idx="minor">
+            <a:schemeClr val="lt1"/>
+          </a:fontRef>
+        </p:style>
+        <p:txBody>
+          <a:bodyPr rtlCol="0" anchor="ctr"/>
+          <a:lstStyle/>
+          <a:p>
+            <a:pPr algn="ctr"/>
+            <a:endParaRPr/>
+          </a:p>
+        </p:txBody>
+      </p:sp>
+      <p:sp>
+        <p:nvSpPr>
+          <p:cNvPr id="36" name="TextBox 35"/>
+          <p:cNvSpPr txBox="1"/>
+          <p:nvPr/>
+        </p:nvSpPr>
+        <p:spPr>
+          <a:xfrm>
+            <a:off x="8412480" y="2468880"/>
+            <a:ext cx="3108960" cy="411480"/>
+          </a:xfrm>
+          <a:prstGeom prst="rect">
+            <a:avLst/>
+          </a:prstGeom>
+          <a:noFill/>
+        </p:spPr>
+        <p:txBody>
+          <a:bodyPr wrap="none">
+            <a:spAutoFit/>
+          </a:bodyPr>
+          <a:lstStyle/>
+          <a:p>
+            <a:r>
+              <a:rPr sz="2200" b="1" i="0">
+                <a:solidFill>
+                  <a:srgbClr val="FFFFFF"/>
+                </a:solidFill>
+                <a:latin typeface="Georgia"/>
+              </a:rPr>
+              <a:t>Market Scope</a:t>
+            </a:r>
+          </a:p>
+        </p:txBody>
+      </p:sp>
+      <p:sp>
+        <p:nvSpPr>
+          <p:cNvPr id="37" name="TextBox 36"/>
+          <p:cNvSpPr txBox="1"/>
+          <p:nvPr/>
+        </p:nvSpPr>
+        <p:spPr>
+          <a:xfrm>
+            <a:off x="8412480" y="2907792"/>
+            <a:ext cx="3108960" cy="292608"/>
+          </a:xfrm>
+          <a:prstGeom prst="rect">
+            <a:avLst/>
+          </a:prstGeom>
+          <a:noFill/>
+        </p:spPr>
+        <p:txBody>
+          <a:bodyPr wrap="none">
+            <a:spAutoFit/>
+          </a:bodyPr>
+          <a:lstStyle/>
+          <a:p>
+            <a:r>
+              <a:rPr sz="1300" b="1" i="0">
+                <a:solidFill>
+                  <a:srgbClr val="C5A070"/>
+                </a:solidFill>
+                <a:latin typeface="Calibri"/>
+              </a:rPr>
+              <a:t>Local Foundation → Regional</a:t>
+            </a:r>
+          </a:p>
+        </p:txBody>
+      </p:sp>
+      <p:sp>
+        <p:nvSpPr>
+          <p:cNvPr id="38" name="TextBox 37"/>
+          <p:cNvSpPr txBox="1"/>
+          <p:nvPr/>
+        </p:nvSpPr>
+        <p:spPr>
+          <a:xfrm>
+            <a:off x="8412480" y="3337560"/>
+            <a:ext cx="3108960" cy="2500000"/>
+          </a:xfrm>
+          <a:prstGeom prst="rect">
+            <a:avLst/>
+          </a:prstGeom>
+          <a:noFill/>
+        </p:spPr>
+        <p:txBody>
+          <a:bodyPr wrap="none">
+            <a:spAutoFit/>
+          </a:bodyPr>
+          <a:lstStyle/>
+          <a:p>
+            <a:pPr>
+              <a:spcAft>
+                <a:spcPts val="600"/>
+              </a:spcAft>
+            </a:pPr>
+            <a:r>
+              <a:rPr sz="1200" b="0" i="0">
+                <a:solidFill>
+                  <a:srgbClr val="FFFFFF"/>
+                </a:solidFill>
+                <a:latin typeface="Calibri"/>
+              </a:rPr>
+              <a:t>•  High frequency of year-round social &amp; business events</a:t>
+            </a:r>
+          </a:p>
+          <a:p>
+            <a:pPr>
+              <a:spcAft>
+                <a:spcPts val="600"/>
+              </a:spcAft>
+            </a:pPr>
+            <a:r>
+              <a:rPr sz="1200" b="0" i="0">
+                <a:solidFill>
+                  <a:srgbClr val="FFFFFF"/>
+                </a:solidFill>
+                <a:latin typeface="Calibri"/>
+              </a:rPr>
+              <a:t>•  Initially focused on Hargeisa’s active hospitality sector</a:t>
+            </a:r>
+          </a:p>
+          <a:p>
+            <a:pPr>
+              <a:spcAft>
+                <a:spcPts val="600"/>
+              </a:spcAft>
+            </a:pPr>
+            <a:r>
+              <a:rPr sz="1200" b="0" i="0">
+                <a:solidFill>
+                  <a:srgbClr val="FFFFFF"/>
+                </a:solidFill>
+                <a:latin typeface="Calibri"/>
+              </a:rPr>
+              <a:t>•  Strong potential to scale to other cities and regions</a:t>
+            </a:r>
+          </a:p>
+          <a:p>
+            <a:pPr>
+              <a:spcAft>
+                <a:spcPts val="600"/>
+              </a:spcAft>
+            </a:pPr>
+            <a:r>
+              <a:rPr sz="1200" b="0" i="0">
+                <a:solidFill>
+                  <a:srgbClr val="FFFFFF"/>
+                </a:solidFill>
+                <a:latin typeface="Calibri"/>
+              </a:rPr>
+              <a:t>•  First-mover advantage in digitized venue ecosystems</a:t>
+            </a:r>
+          </a:p>
+          <a:p>
+            <a:pPr>
+              <a:spcAft>
+                <a:spcPts val="600"/>
+              </a:spcAft>
+            </a:pPr>
+            <a:r>
+              <a:rPr sz="1200" b="0" i="0">
+                <a:solidFill>
+                  <a:srgbClr val="FFFFFF"/>
+                </a:solidFill>
+                <a:latin typeface="Calibri"/>
+              </a:rPr>
+              <a:t>•  Two-sided ecosystem: Customers ↔ HallHub ↔ Venue Owners</a:t>
             </a:r>
           </a:p>
         </p:txBody>
